--- a/docs/BIS_Portfolio_Deck.pptx
+++ b/docs/BIS_Portfolio_Deck.pptx
@@ -5,17 +5,19 @@
     <p:sldMasterId id="2147483648" r:id="rId1"/>
   </p:sldMasterIdLst>
   <p:sldIdLst>
-    <p:sldId id="256" r:id="rId7"/>
-    <p:sldId id="257" r:id="rId8"/>
-    <p:sldId id="258" r:id="rId9"/>
-    <p:sldId id="259" r:id="rId10"/>
-    <p:sldId id="260" r:id="rId11"/>
-    <p:sldId id="261" r:id="rId12"/>
-    <p:sldId id="262" r:id="rId13"/>
-    <p:sldId id="263" r:id="rId14"/>
-    <p:sldId id="264" r:id="rId15"/>
+    <p:sldId id="256" r:id="rId2"/>
+    <p:sldId id="257" r:id="rId3"/>
+    <p:sldId id="258" r:id="rId4"/>
+    <p:sldId id="259" r:id="rId5"/>
+    <p:sldId id="260" r:id="rId6"/>
+    <p:sldId id="261" r:id="rId7"/>
+    <p:sldId id="262" r:id="rId8"/>
+    <p:sldId id="263" r:id="rId9"/>
+    <p:sldId id="268" r:id="rId10"/>
+    <p:sldId id="267" r:id="rId11"/>
+    <p:sldId id="264" r:id="rId12"/>
   </p:sldIdLst>
-  <p:sldSz cx="12188952" cy="6858000" type="screen4x3"/>
+  <p:sldSz cx="12188825" cy="6858000"/>
   <p:notesSz cx="6858000" cy="9144000"/>
   <p:defaultTextStyle>
     <a:defPPr>
@@ -112,6 +114,22 @@
       </a:defRPr>
     </a:lvl9pPr>
   </p:defaultTextStyle>
+  <p:extLst>
+    <p:ext uri="{EFAFB233-063F-42B5-8137-9DF3F51BA10A}">
+      <p15:sldGuideLst xmlns:p15="http://schemas.microsoft.com/office/powerpoint/2012/main">
+        <p15:guide id="1" orient="horz" pos="2160">
+          <p15:clr>
+            <a:srgbClr val="A4A3A4"/>
+          </p15:clr>
+        </p15:guide>
+        <p15:guide id="2" pos="2880">
+          <p15:clr>
+            <a:srgbClr val="A4A3A4"/>
+          </p15:clr>
+        </p15:guide>
+      </p15:sldGuideLst>
+    </p:ext>
+  </p:extLst>
 </p:presentation>
 </file>
 
@@ -153,10 +171,9 @@
           <a:lstStyle/>
           <a:p>
             <a:r>
-              <a:rPr lang="en-US" smtClean="0"/>
+              <a:rPr lang="en-US"/>
               <a:t>Click to edit Master title style</a:t>
             </a:r>
-            <a:endParaRPr lang="en-US"/>
           </a:p>
         </p:txBody>
       </p:sp>
@@ -272,10 +289,9 @@
           </a:lstStyle>
           <a:p>
             <a:r>
-              <a:rPr lang="en-US" smtClean="0"/>
+              <a:rPr lang="en-US"/>
               <a:t>Click to edit Master subtitle style</a:t>
             </a:r>
-            <a:endParaRPr lang="en-US"/>
           </a:p>
         </p:txBody>
       </p:sp>
@@ -296,7 +312,7 @@
           <a:p>
             <a:fld id="{5BCAD085-E8A6-8845-BD4E-CB4CCA059FC4}" type="datetimeFigureOut">
               <a:rPr lang="en-US" smtClean="0"/>
-              <a:t>1/27/13</a:t>
+              <a:t>4/27/2026</a:t>
             </a:fld>
             <a:endParaRPr lang="en-US"/>
           </a:p>
@@ -390,10 +406,9 @@
           <a:lstStyle/>
           <a:p>
             <a:r>
-              <a:rPr lang="en-US" smtClean="0"/>
+              <a:rPr lang="en-US"/>
               <a:t>Click to edit Master title style</a:t>
             </a:r>
-            <a:endParaRPr lang="en-US"/>
           </a:p>
         </p:txBody>
       </p:sp>
@@ -414,38 +429,37 @@
           <a:p>
             <a:pPr lvl="0"/>
             <a:r>
-              <a:rPr lang="en-US" smtClean="0"/>
+              <a:rPr lang="en-US"/>
               <a:t>Click to edit Master text styles</a:t>
             </a:r>
           </a:p>
           <a:p>
             <a:pPr lvl="1"/>
             <a:r>
-              <a:rPr lang="en-US" smtClean="0"/>
+              <a:rPr lang="en-US"/>
               <a:t>Second level</a:t>
             </a:r>
           </a:p>
           <a:p>
             <a:pPr lvl="2"/>
             <a:r>
-              <a:rPr lang="en-US" smtClean="0"/>
+              <a:rPr lang="en-US"/>
               <a:t>Third level</a:t>
             </a:r>
           </a:p>
           <a:p>
             <a:pPr lvl="3"/>
             <a:r>
-              <a:rPr lang="en-US" smtClean="0"/>
+              <a:rPr lang="en-US"/>
               <a:t>Fourth level</a:t>
             </a:r>
           </a:p>
           <a:p>
             <a:pPr lvl="4"/>
             <a:r>
-              <a:rPr lang="en-US" smtClean="0"/>
+              <a:rPr lang="en-US"/>
               <a:t>Fifth level</a:t>
             </a:r>
-            <a:endParaRPr lang="en-US"/>
           </a:p>
         </p:txBody>
       </p:sp>
@@ -466,7 +480,7 @@
           <a:p>
             <a:fld id="{5BCAD085-E8A6-8845-BD4E-CB4CCA059FC4}" type="datetimeFigureOut">
               <a:rPr lang="en-US" smtClean="0"/>
-              <a:t>1/27/13</a:t>
+              <a:t>4/27/2026</a:t>
             </a:fld>
             <a:endParaRPr lang="en-US"/>
           </a:p>
@@ -565,10 +579,9 @@
           <a:lstStyle/>
           <a:p>
             <a:r>
-              <a:rPr lang="en-US" smtClean="0"/>
+              <a:rPr lang="en-US"/>
               <a:t>Click to edit Master title style</a:t>
             </a:r>
-            <a:endParaRPr lang="en-US"/>
           </a:p>
         </p:txBody>
       </p:sp>
@@ -594,38 +607,37 @@
           <a:p>
             <a:pPr lvl="0"/>
             <a:r>
-              <a:rPr lang="en-US" smtClean="0"/>
+              <a:rPr lang="en-US"/>
               <a:t>Click to edit Master text styles</a:t>
             </a:r>
           </a:p>
           <a:p>
             <a:pPr lvl="1"/>
             <a:r>
-              <a:rPr lang="en-US" smtClean="0"/>
+              <a:rPr lang="en-US"/>
               <a:t>Second level</a:t>
             </a:r>
           </a:p>
           <a:p>
             <a:pPr lvl="2"/>
             <a:r>
-              <a:rPr lang="en-US" smtClean="0"/>
+              <a:rPr lang="en-US"/>
               <a:t>Third level</a:t>
             </a:r>
           </a:p>
           <a:p>
             <a:pPr lvl="3"/>
             <a:r>
-              <a:rPr lang="en-US" smtClean="0"/>
+              <a:rPr lang="en-US"/>
               <a:t>Fourth level</a:t>
             </a:r>
           </a:p>
           <a:p>
             <a:pPr lvl="4"/>
             <a:r>
-              <a:rPr lang="en-US" smtClean="0"/>
+              <a:rPr lang="en-US"/>
               <a:t>Fifth level</a:t>
             </a:r>
-            <a:endParaRPr lang="en-US"/>
           </a:p>
         </p:txBody>
       </p:sp>
@@ -646,7 +658,7 @@
           <a:p>
             <a:fld id="{5BCAD085-E8A6-8845-BD4E-CB4CCA059FC4}" type="datetimeFigureOut">
               <a:rPr lang="en-US" smtClean="0"/>
-              <a:t>1/27/13</a:t>
+              <a:t>4/27/2026</a:t>
             </a:fld>
             <a:endParaRPr lang="en-US"/>
           </a:p>
@@ -740,10 +752,9 @@
           <a:lstStyle/>
           <a:p>
             <a:r>
-              <a:rPr lang="en-US" smtClean="0"/>
+              <a:rPr lang="en-US"/>
               <a:t>Click to edit Master title style</a:t>
             </a:r>
-            <a:endParaRPr lang="en-US"/>
           </a:p>
         </p:txBody>
       </p:sp>
@@ -764,38 +775,37 @@
           <a:p>
             <a:pPr lvl="0"/>
             <a:r>
-              <a:rPr lang="en-US" smtClean="0"/>
+              <a:rPr lang="en-US"/>
               <a:t>Click to edit Master text styles</a:t>
             </a:r>
           </a:p>
           <a:p>
             <a:pPr lvl="1"/>
             <a:r>
-              <a:rPr lang="en-US" smtClean="0"/>
+              <a:rPr lang="en-US"/>
               <a:t>Second level</a:t>
             </a:r>
           </a:p>
           <a:p>
             <a:pPr lvl="2"/>
             <a:r>
-              <a:rPr lang="en-US" smtClean="0"/>
+              <a:rPr lang="en-US"/>
               <a:t>Third level</a:t>
             </a:r>
           </a:p>
           <a:p>
             <a:pPr lvl="3"/>
             <a:r>
-              <a:rPr lang="en-US" smtClean="0"/>
+              <a:rPr lang="en-US"/>
               <a:t>Fourth level</a:t>
             </a:r>
           </a:p>
           <a:p>
             <a:pPr lvl="4"/>
             <a:r>
-              <a:rPr lang="en-US" smtClean="0"/>
+              <a:rPr lang="en-US"/>
               <a:t>Fifth level</a:t>
             </a:r>
-            <a:endParaRPr lang="en-US"/>
           </a:p>
         </p:txBody>
       </p:sp>
@@ -816,7 +826,7 @@
           <a:p>
             <a:fld id="{5BCAD085-E8A6-8845-BD4E-CB4CCA059FC4}" type="datetimeFigureOut">
               <a:rPr lang="en-US" smtClean="0"/>
-              <a:t>1/27/13</a:t>
+              <a:t>4/27/2026</a:t>
             </a:fld>
             <a:endParaRPr lang="en-US"/>
           </a:p>
@@ -919,10 +929,9 @@
           </a:lstStyle>
           <a:p>
             <a:r>
-              <a:rPr lang="en-US" smtClean="0"/>
+              <a:rPr lang="en-US"/>
               <a:t>Click to edit Master title style</a:t>
             </a:r>
-            <a:endParaRPr lang="en-US"/>
           </a:p>
         </p:txBody>
       </p:sp>
@@ -1039,7 +1048,7 @@
           <a:p>
             <a:pPr lvl="0"/>
             <a:r>
-              <a:rPr lang="en-US" smtClean="0"/>
+              <a:rPr lang="en-US"/>
               <a:t>Click to edit Master text styles</a:t>
             </a:r>
           </a:p>
@@ -1062,7 +1071,7 @@
           <a:p>
             <a:fld id="{5BCAD085-E8A6-8845-BD4E-CB4CCA059FC4}" type="datetimeFigureOut">
               <a:rPr lang="en-US" smtClean="0"/>
-              <a:t>1/27/13</a:t>
+              <a:t>4/27/2026</a:t>
             </a:fld>
             <a:endParaRPr lang="en-US"/>
           </a:p>
@@ -1156,10 +1165,9 @@
           <a:lstStyle/>
           <a:p>
             <a:r>
-              <a:rPr lang="en-US" smtClean="0"/>
+              <a:rPr lang="en-US"/>
               <a:t>Click to edit Master title style</a:t>
             </a:r>
-            <a:endParaRPr lang="en-US"/>
           </a:p>
         </p:txBody>
       </p:sp>
@@ -1213,38 +1221,37 @@
           <a:p>
             <a:pPr lvl="0"/>
             <a:r>
-              <a:rPr lang="en-US" smtClean="0"/>
+              <a:rPr lang="en-US"/>
               <a:t>Click to edit Master text styles</a:t>
             </a:r>
           </a:p>
           <a:p>
             <a:pPr lvl="1"/>
             <a:r>
-              <a:rPr lang="en-US" smtClean="0"/>
+              <a:rPr lang="en-US"/>
               <a:t>Second level</a:t>
             </a:r>
           </a:p>
           <a:p>
             <a:pPr lvl="2"/>
             <a:r>
-              <a:rPr lang="en-US" smtClean="0"/>
+              <a:rPr lang="en-US"/>
               <a:t>Third level</a:t>
             </a:r>
           </a:p>
           <a:p>
             <a:pPr lvl="3"/>
             <a:r>
-              <a:rPr lang="en-US" smtClean="0"/>
+              <a:rPr lang="en-US"/>
               <a:t>Fourth level</a:t>
             </a:r>
           </a:p>
           <a:p>
             <a:pPr lvl="4"/>
             <a:r>
-              <a:rPr lang="en-US" smtClean="0"/>
+              <a:rPr lang="en-US"/>
               <a:t>Fifth level</a:t>
             </a:r>
-            <a:endParaRPr lang="en-US"/>
           </a:p>
         </p:txBody>
       </p:sp>
@@ -1298,38 +1305,37 @@
           <a:p>
             <a:pPr lvl="0"/>
             <a:r>
-              <a:rPr lang="en-US" smtClean="0"/>
+              <a:rPr lang="en-US"/>
               <a:t>Click to edit Master text styles</a:t>
             </a:r>
           </a:p>
           <a:p>
             <a:pPr lvl="1"/>
             <a:r>
-              <a:rPr lang="en-US" smtClean="0"/>
+              <a:rPr lang="en-US"/>
               <a:t>Second level</a:t>
             </a:r>
           </a:p>
           <a:p>
             <a:pPr lvl="2"/>
             <a:r>
-              <a:rPr lang="en-US" smtClean="0"/>
+              <a:rPr lang="en-US"/>
               <a:t>Third level</a:t>
             </a:r>
           </a:p>
           <a:p>
             <a:pPr lvl="3"/>
             <a:r>
-              <a:rPr lang="en-US" smtClean="0"/>
+              <a:rPr lang="en-US"/>
               <a:t>Fourth level</a:t>
             </a:r>
           </a:p>
           <a:p>
             <a:pPr lvl="4"/>
             <a:r>
-              <a:rPr lang="en-US" smtClean="0"/>
+              <a:rPr lang="en-US"/>
               <a:t>Fifth level</a:t>
             </a:r>
-            <a:endParaRPr lang="en-US"/>
           </a:p>
         </p:txBody>
       </p:sp>
@@ -1350,7 +1356,7 @@
           <a:p>
             <a:fld id="{5BCAD085-E8A6-8845-BD4E-CB4CCA059FC4}" type="datetimeFigureOut">
               <a:rPr lang="en-US" smtClean="0"/>
-              <a:t>1/27/13</a:t>
+              <a:t>4/27/2026</a:t>
             </a:fld>
             <a:endParaRPr lang="en-US"/>
           </a:p>
@@ -1448,10 +1454,9 @@
           </a:lstStyle>
           <a:p>
             <a:r>
-              <a:rPr lang="en-US" smtClean="0"/>
+              <a:rPr lang="en-US"/>
               <a:t>Click to edit Master title style</a:t>
             </a:r>
-            <a:endParaRPr lang="en-US"/>
           </a:p>
         </p:txBody>
       </p:sp>
@@ -1514,7 +1519,7 @@
           <a:p>
             <a:pPr lvl="0"/>
             <a:r>
-              <a:rPr lang="en-US" smtClean="0"/>
+              <a:rPr lang="en-US"/>
               <a:t>Click to edit Master text styles</a:t>
             </a:r>
           </a:p>
@@ -1570,38 +1575,37 @@
           <a:p>
             <a:pPr lvl="0"/>
             <a:r>
-              <a:rPr lang="en-US" smtClean="0"/>
+              <a:rPr lang="en-US"/>
               <a:t>Click to edit Master text styles</a:t>
             </a:r>
           </a:p>
           <a:p>
             <a:pPr lvl="1"/>
             <a:r>
-              <a:rPr lang="en-US" smtClean="0"/>
+              <a:rPr lang="en-US"/>
               <a:t>Second level</a:t>
             </a:r>
           </a:p>
           <a:p>
             <a:pPr lvl="2"/>
             <a:r>
-              <a:rPr lang="en-US" smtClean="0"/>
+              <a:rPr lang="en-US"/>
               <a:t>Third level</a:t>
             </a:r>
           </a:p>
           <a:p>
             <a:pPr lvl="3"/>
             <a:r>
-              <a:rPr lang="en-US" smtClean="0"/>
+              <a:rPr lang="en-US"/>
               <a:t>Fourth level</a:t>
             </a:r>
           </a:p>
           <a:p>
             <a:pPr lvl="4"/>
             <a:r>
-              <a:rPr lang="en-US" smtClean="0"/>
+              <a:rPr lang="en-US"/>
               <a:t>Fifth level</a:t>
             </a:r>
-            <a:endParaRPr lang="en-US"/>
           </a:p>
         </p:txBody>
       </p:sp>
@@ -1664,7 +1668,7 @@
           <a:p>
             <a:pPr lvl="0"/>
             <a:r>
-              <a:rPr lang="en-US" smtClean="0"/>
+              <a:rPr lang="en-US"/>
               <a:t>Click to edit Master text styles</a:t>
             </a:r>
           </a:p>
@@ -1720,38 +1724,37 @@
           <a:p>
             <a:pPr lvl="0"/>
             <a:r>
-              <a:rPr lang="en-US" smtClean="0"/>
+              <a:rPr lang="en-US"/>
               <a:t>Click to edit Master text styles</a:t>
             </a:r>
           </a:p>
           <a:p>
             <a:pPr lvl="1"/>
             <a:r>
-              <a:rPr lang="en-US" smtClean="0"/>
+              <a:rPr lang="en-US"/>
               <a:t>Second level</a:t>
             </a:r>
           </a:p>
           <a:p>
             <a:pPr lvl="2"/>
             <a:r>
-              <a:rPr lang="en-US" smtClean="0"/>
+              <a:rPr lang="en-US"/>
               <a:t>Third level</a:t>
             </a:r>
           </a:p>
           <a:p>
             <a:pPr lvl="3"/>
             <a:r>
-              <a:rPr lang="en-US" smtClean="0"/>
+              <a:rPr lang="en-US"/>
               <a:t>Fourth level</a:t>
             </a:r>
           </a:p>
           <a:p>
             <a:pPr lvl="4"/>
             <a:r>
-              <a:rPr lang="en-US" smtClean="0"/>
+              <a:rPr lang="en-US"/>
               <a:t>Fifth level</a:t>
             </a:r>
-            <a:endParaRPr lang="en-US"/>
           </a:p>
         </p:txBody>
       </p:sp>
@@ -1772,7 +1775,7 @@
           <a:p>
             <a:fld id="{5BCAD085-E8A6-8845-BD4E-CB4CCA059FC4}" type="datetimeFigureOut">
               <a:rPr lang="en-US" smtClean="0"/>
-              <a:t>1/27/13</a:t>
+              <a:t>4/27/2026</a:t>
             </a:fld>
             <a:endParaRPr lang="en-US"/>
           </a:p>
@@ -1866,10 +1869,9 @@
           <a:lstStyle/>
           <a:p>
             <a:r>
-              <a:rPr lang="en-US" smtClean="0"/>
+              <a:rPr lang="en-US"/>
               <a:t>Click to edit Master title style</a:t>
             </a:r>
-            <a:endParaRPr lang="en-US"/>
           </a:p>
         </p:txBody>
       </p:sp>
@@ -1890,7 +1892,7 @@
           <a:p>
             <a:fld id="{5BCAD085-E8A6-8845-BD4E-CB4CCA059FC4}" type="datetimeFigureOut">
               <a:rPr lang="en-US" smtClean="0"/>
-              <a:t>1/27/13</a:t>
+              <a:t>4/27/2026</a:t>
             </a:fld>
             <a:endParaRPr lang="en-US"/>
           </a:p>
@@ -1985,7 +1987,7 @@
           <a:p>
             <a:fld id="{5BCAD085-E8A6-8845-BD4E-CB4CCA059FC4}" type="datetimeFigureOut">
               <a:rPr lang="en-US" smtClean="0"/>
-              <a:t>1/27/13</a:t>
+              <a:t>4/27/2026</a:t>
             </a:fld>
             <a:endParaRPr lang="en-US"/>
           </a:p>
@@ -2088,10 +2090,9 @@
           </a:lstStyle>
           <a:p>
             <a:r>
-              <a:rPr lang="en-US" smtClean="0"/>
+              <a:rPr lang="en-US"/>
               <a:t>Click to edit Master title style</a:t>
             </a:r>
-            <a:endParaRPr lang="en-US"/>
           </a:p>
         </p:txBody>
       </p:sp>
@@ -2145,38 +2146,37 @@
           <a:p>
             <a:pPr lvl="0"/>
             <a:r>
-              <a:rPr lang="en-US" smtClean="0"/>
+              <a:rPr lang="en-US"/>
               <a:t>Click to edit Master text styles</a:t>
             </a:r>
           </a:p>
           <a:p>
             <a:pPr lvl="1"/>
             <a:r>
-              <a:rPr lang="en-US" smtClean="0"/>
+              <a:rPr lang="en-US"/>
               <a:t>Second level</a:t>
             </a:r>
           </a:p>
           <a:p>
             <a:pPr lvl="2"/>
             <a:r>
-              <a:rPr lang="en-US" smtClean="0"/>
+              <a:rPr lang="en-US"/>
               <a:t>Third level</a:t>
             </a:r>
           </a:p>
           <a:p>
             <a:pPr lvl="3"/>
             <a:r>
-              <a:rPr lang="en-US" smtClean="0"/>
+              <a:rPr lang="en-US"/>
               <a:t>Fourth level</a:t>
             </a:r>
           </a:p>
           <a:p>
             <a:pPr lvl="4"/>
             <a:r>
-              <a:rPr lang="en-US" smtClean="0"/>
+              <a:rPr lang="en-US"/>
               <a:t>Fifth level</a:t>
             </a:r>
-            <a:endParaRPr lang="en-US"/>
           </a:p>
         </p:txBody>
       </p:sp>
@@ -2239,7 +2239,7 @@
           <a:p>
             <a:pPr lvl="0"/>
             <a:r>
-              <a:rPr lang="en-US" smtClean="0"/>
+              <a:rPr lang="en-US"/>
               <a:t>Click to edit Master text styles</a:t>
             </a:r>
           </a:p>
@@ -2262,7 +2262,7 @@
           <a:p>
             <a:fld id="{5BCAD085-E8A6-8845-BD4E-CB4CCA059FC4}" type="datetimeFigureOut">
               <a:rPr lang="en-US" smtClean="0"/>
-              <a:t>1/27/13</a:t>
+              <a:t>4/27/2026</a:t>
             </a:fld>
             <a:endParaRPr lang="en-US"/>
           </a:p>
@@ -2365,10 +2365,9 @@
           </a:lstStyle>
           <a:p>
             <a:r>
-              <a:rPr lang="en-US" smtClean="0"/>
+              <a:rPr lang="en-US"/>
               <a:t>Click to edit Master title style</a:t>
             </a:r>
-            <a:endParaRPr lang="en-US"/>
           </a:p>
         </p:txBody>
       </p:sp>
@@ -2492,7 +2491,7 @@
           <a:p>
             <a:pPr lvl="0"/>
             <a:r>
-              <a:rPr lang="en-US" smtClean="0"/>
+              <a:rPr lang="en-US"/>
               <a:t>Click to edit Master text styles</a:t>
             </a:r>
           </a:p>
@@ -2515,7 +2514,7 @@
           <a:p>
             <a:fld id="{5BCAD085-E8A6-8845-BD4E-CB4CCA059FC4}" type="datetimeFigureOut">
               <a:rPr lang="en-US" smtClean="0"/>
-              <a:t>1/27/13</a:t>
+              <a:t>4/27/2026</a:t>
             </a:fld>
             <a:endParaRPr lang="en-US"/>
           </a:p>
@@ -2624,10 +2623,9 @@
           <a:lstStyle/>
           <a:p>
             <a:r>
-              <a:rPr lang="en-US" smtClean="0"/>
+              <a:rPr lang="en-US"/>
               <a:t>Click to edit Master title style</a:t>
             </a:r>
-            <a:endParaRPr lang="en-US"/>
           </a:p>
         </p:txBody>
       </p:sp>
@@ -2658,38 +2656,37 @@
           <a:p>
             <a:pPr lvl="0"/>
             <a:r>
-              <a:rPr lang="en-US" smtClean="0"/>
+              <a:rPr lang="en-US"/>
               <a:t>Click to edit Master text styles</a:t>
             </a:r>
           </a:p>
           <a:p>
             <a:pPr lvl="1"/>
             <a:r>
-              <a:rPr lang="en-US" smtClean="0"/>
+              <a:rPr lang="en-US"/>
               <a:t>Second level</a:t>
             </a:r>
           </a:p>
           <a:p>
             <a:pPr lvl="2"/>
             <a:r>
-              <a:rPr lang="en-US" smtClean="0"/>
+              <a:rPr lang="en-US"/>
               <a:t>Third level</a:t>
             </a:r>
           </a:p>
           <a:p>
             <a:pPr lvl="3"/>
             <a:r>
-              <a:rPr lang="en-US" smtClean="0"/>
+              <a:rPr lang="en-US"/>
               <a:t>Fourth level</a:t>
             </a:r>
           </a:p>
           <a:p>
             <a:pPr lvl="4"/>
             <a:r>
-              <a:rPr lang="en-US" smtClean="0"/>
+              <a:rPr lang="en-US"/>
               <a:t>Fifth level</a:t>
             </a:r>
-            <a:endParaRPr lang="en-US"/>
           </a:p>
         </p:txBody>
       </p:sp>
@@ -2728,7 +2725,7 @@
           <a:p>
             <a:fld id="{5BCAD085-E8A6-8845-BD4E-CB4CCA059FC4}" type="datetimeFigureOut">
               <a:rPr lang="en-US" smtClean="0"/>
-              <a:t>1/27/13</a:t>
+              <a:t>4/27/2026</a:t>
             </a:fld>
             <a:endParaRPr lang="en-US"/>
           </a:p>
@@ -3087,7 +3084,7 @@
 </file>
 
 <file path=ppt/slides/slide1.xml><?xml version="1.0" encoding="utf-8"?>
-<p:sld xmlns:a="http://schemas.openxmlformats.org/drawingml/2006/main" xmlns:p="http://schemas.openxmlformats.org/presentationml/2006/main" xmlns:r="http://schemas.openxmlformats.org/officeDocument/2006/relationships">
+<p:sld xmlns:a="http://schemas.openxmlformats.org/drawingml/2006/main" xmlns:r="http://schemas.openxmlformats.org/officeDocument/2006/relationships" xmlns:p="http://schemas.openxmlformats.org/presentationml/2006/main">
   <p:cSld>
     <p:bg>
       <p:bgPr>
@@ -3103,7 +3100,14 @@
         <p:cNvGrpSpPr/>
         <p:nvPr/>
       </p:nvGrpSpPr>
-      <p:grpSpPr/>
+      <p:grpSpPr>
+        <a:xfrm>
+          <a:off x="0" y="0"/>
+          <a:ext cx="0" cy="0"/>
+          <a:chOff x="0" y="0"/>
+          <a:chExt cx="0" cy="0"/>
+        </a:xfrm>
+      </p:grpSpPr>
       <p:sp>
         <p:nvSpPr>
           <p:cNvPr id="2" name="Rectangle 1"/>
@@ -3144,6 +3148,7 @@
           <a:lstStyle/>
           <a:p>
             <a:pPr algn="ctr"/>
+            <a:endParaRPr/>
           </a:p>
         </p:txBody>
       </p:sp>
@@ -3187,6 +3192,7 @@
           <a:lstStyle/>
           <a:p>
             <a:pPr algn="ctr"/>
+            <a:endParaRPr/>
           </a:p>
         </p:txBody>
       </p:sp>
@@ -3230,6 +3236,7 @@
           <a:lstStyle/>
           <a:p>
             <a:pPr algn="ctr"/>
+            <a:endParaRPr/>
           </a:p>
         </p:txBody>
       </p:sp>
@@ -3273,6 +3280,7 @@
           <a:lstStyle/>
           <a:p>
             <a:pPr algn="ctr"/>
+            <a:endParaRPr/>
           </a:p>
         </p:txBody>
       </p:sp>
@@ -3293,7 +3301,7 @@
           <a:noFill/>
         </p:spPr>
         <p:txBody>
-          <a:bodyPr wrap="square" lIns="0" rIns="0" tIns="0" bIns="0">
+          <a:bodyPr wrap="square" lIns="0" tIns="0" rIns="0" bIns="0">
             <a:spAutoFit/>
           </a:bodyPr>
           <a:lstStyle/>
@@ -3328,7 +3336,7 @@
           <a:noFill/>
         </p:spPr>
         <p:txBody>
-          <a:bodyPr wrap="square" lIns="0" rIns="0" tIns="0" bIns="0">
+          <a:bodyPr wrap="square" lIns="0" tIns="0" rIns="0" bIns="0">
             <a:spAutoFit/>
           </a:bodyPr>
           <a:lstStyle/>
@@ -3363,7 +3371,7 @@
           <a:noFill/>
         </p:spPr>
         <p:txBody>
-          <a:bodyPr wrap="square" lIns="0" rIns="0" tIns="0" bIns="0">
+          <a:bodyPr wrap="square" lIns="0" tIns="0" rIns="0" bIns="0">
             <a:spAutoFit/>
           </a:bodyPr>
           <a:lstStyle/>
@@ -3398,14 +3406,14 @@
           <a:noFill/>
         </p:spPr>
         <p:txBody>
-          <a:bodyPr wrap="square" lIns="0" rIns="0" tIns="0" bIns="0">
-            <a:spAutoFit/>
-          </a:bodyPr>
-          <a:lstStyle/>
-          <a:p>
-            <a:pPr algn="l"/>
-            <a:r>
-              <a:rPr sz="1500" b="0" i="0">
+          <a:bodyPr wrap="square" lIns="0" tIns="0" rIns="0" bIns="0">
+            <a:spAutoFit/>
+          </a:bodyPr>
+          <a:lstStyle/>
+          <a:p>
+            <a:pPr algn="l"/>
+            <a:r>
+              <a:rPr sz="1500" b="0" i="0" dirty="0">
                 <a:solidFill>
                   <a:srgbClr val="A0B4CC"/>
                 </a:solidFill>
@@ -3456,6 +3464,7 @@
           <a:lstStyle/>
           <a:p>
             <a:pPr algn="ctr"/>
+            <a:endParaRPr/>
           </a:p>
         </p:txBody>
       </p:sp>
@@ -3476,7 +3485,7 @@
           <a:noFill/>
         </p:spPr>
         <p:txBody>
-          <a:bodyPr wrap="square" lIns="0" rIns="0" tIns="0" bIns="0">
+          <a:bodyPr wrap="square" lIns="0" tIns="0" rIns="0" bIns="0">
             <a:spAutoFit/>
           </a:bodyPr>
           <a:lstStyle/>
@@ -3511,7 +3520,7 @@
           <a:noFill/>
         </p:spPr>
         <p:txBody>
-          <a:bodyPr wrap="square" lIns="0" rIns="0" tIns="0" bIns="0">
+          <a:bodyPr wrap="square" lIns="0" tIns="0" rIns="0" bIns="0">
             <a:spAutoFit/>
           </a:bodyPr>
           <a:lstStyle/>
@@ -3546,7 +3555,7 @@
           <a:noFill/>
         </p:spPr>
         <p:txBody>
-          <a:bodyPr wrap="square" lIns="0" rIns="0" tIns="0" bIns="0">
+          <a:bodyPr wrap="square" lIns="0" tIns="0" rIns="0" bIns="0">
             <a:spAutoFit/>
           </a:bodyPr>
           <a:lstStyle/>
@@ -3560,6 +3569,895 @@
                 <a:latin typeface="Calibri"/>
               </a:rPr>
               <a:t>April 2026</a:t>
+            </a:r>
+          </a:p>
+        </p:txBody>
+      </p:sp>
+    </p:spTree>
+  </p:cSld>
+  <p:clrMapOvr>
+    <a:masterClrMapping/>
+  </p:clrMapOvr>
+</p:sld>
+</file>
+
+<file path=ppt/slides/slide10.xml><?xml version="1.0" encoding="utf-8"?>
+<p:sld xmlns:a="http://schemas.openxmlformats.org/drawingml/2006/main" xmlns:r="http://schemas.openxmlformats.org/officeDocument/2006/relationships" xmlns:p="http://schemas.openxmlformats.org/presentationml/2006/main">
+  <p:cSld>
+    <p:spTree>
+      <p:nvGrpSpPr>
+        <p:cNvPr id="1" name=""/>
+        <p:cNvGrpSpPr/>
+        <p:nvPr/>
+      </p:nvGrpSpPr>
+      <p:grpSpPr>
+        <a:xfrm>
+          <a:off x="0" y="0"/>
+          <a:ext cx="0" cy="0"/>
+          <a:chOff x="0" y="0"/>
+          <a:chExt cx="0" cy="0"/>
+        </a:xfrm>
+      </p:grpSpPr>
+      <p:sp>
+        <p:nvSpPr>
+          <p:cNvPr id="6" name="Add-in_Banner">
+            <a:extLst>
+              <a:ext uri="{FF2B5EF4-FFF2-40B4-BE49-F238E27FC236}">
+                <a16:creationId xmlns:a16="http://schemas.microsoft.com/office/drawing/2014/main" id="{3469E413-BCF5-4E2F-BE4B-EB617C589FA5}"/>
+              </a:ext>
+            </a:extLst>
+          </p:cNvPr>
+          <p:cNvSpPr txBox="1">
+            <a:spLocks noGrp="1"/>
+          </p:cNvSpPr>
+          <p:nvPr>
+            <p:ph type="title"/>
+          </p:nvPr>
+        </p:nvSpPr>
+        <p:spPr>
+          <a:xfrm>
+            <a:off x="-1" y="352197"/>
+            <a:ext cx="12188825" cy="640348"/>
+          </a:xfrm>
+          <a:prstGeom prst="rect">
+            <a:avLst/>
+          </a:prstGeom>
+          <a:solidFill>
+            <a:srgbClr val="494748">
+              <a:alpha val="4706"/>
+            </a:srgbClr>
+          </a:solidFill>
+          <a:ln>
+            <a:noFill/>
+          </a:ln>
+        </p:spPr>
+        <p:style>
+          <a:lnRef idx="2">
+            <a:schemeClr val="accent1">
+              <a:shade val="50000"/>
+            </a:schemeClr>
+          </a:lnRef>
+          <a:fillRef idx="1">
+            <a:schemeClr val="accent1"/>
+          </a:fillRef>
+          <a:effectRef idx="0">
+            <a:schemeClr val="accent1"/>
+          </a:effectRef>
+          <a:fontRef idx="minor">
+            <a:schemeClr val="lt1"/>
+          </a:fontRef>
+        </p:style>
+        <p:txBody>
+          <a:bodyPr rot="0" spcFirstLastPara="0" vert="horz" wrap="square" lIns="1331653" tIns="179953" rIns="215944" bIns="179953" numCol="1" spcCol="0" rtlCol="0" fromWordArt="0" anchor="ctr" anchorCtr="0" forceAA="0" compatLnSpc="1">
+            <a:prstTxWarp prst="textNoShape">
+              <a:avLst/>
+            </a:prstTxWarp>
+            <a:spAutoFit/>
+          </a:bodyPr>
+          <a:lstStyle/>
+          <a:p>
+            <a:pPr algn="l"/>
+            <a:r>
+              <a:rPr lang="en-GB" sz="1799" dirty="0">
+                <a:solidFill>
+                  <a:srgbClr val="000000"/>
+                </a:solidFill>
+                <a:latin typeface="Segoe UI Light" panose="020B0502040204020203" pitchFamily="34" charset="0"/>
+                <a:ea typeface="Calibri" panose="020F0502020204030204" pitchFamily="34" charset="0"/>
+                <a:cs typeface="Segoe UI Light" panose="020B0502040204020203" pitchFamily="34" charset="0"/>
+              </a:rPr>
+              <a:t>Microsoft Power BI</a:t>
+            </a:r>
+            <a:endParaRPr lang="en-IE" sz="1200" dirty="0">
+              <a:latin typeface="Segoe UI Light" panose="020B0502040204020203" pitchFamily="34" charset="0"/>
+              <a:ea typeface="Calibri" panose="020F0502020204030204" pitchFamily="34" charset="0"/>
+              <a:cs typeface="Segoe UI Light" panose="020B0502040204020203" pitchFamily="34" charset="0"/>
+            </a:endParaRPr>
+          </a:p>
+        </p:txBody>
+      </p:sp>
+      <p:pic>
+        <p:nvPicPr>
+          <p:cNvPr id="7" name="Add-in_Icon" descr="Icon for Microsoft Power BI.">
+            <a:extLst>
+              <a:ext uri="{FF2B5EF4-FFF2-40B4-BE49-F238E27FC236}">
+                <a16:creationId xmlns:a16="http://schemas.microsoft.com/office/drawing/2014/main" id="{87D43E1C-7B4D-44A2-8E6D-6786349BFB58}"/>
+              </a:ext>
+            </a:extLst>
+          </p:cNvPr>
+          <p:cNvPicPr/>
+          <p:nvPr/>
+        </p:nvPicPr>
+        <p:blipFill>
+          <a:blip r:embed="rId2"/>
+          <a:stretch>
+            <a:fillRect/>
+          </a:stretch>
+        </p:blipFill>
+        <p:spPr bwMode="auto">
+          <a:xfrm>
+            <a:off x="914162" y="531120"/>
+            <a:ext cx="291389" cy="291389"/>
+          </a:xfrm>
+          <a:prstGeom prst="rect">
+            <a:avLst/>
+          </a:prstGeom>
+          <a:noFill/>
+        </p:spPr>
+      </p:pic>
+      <mc:AlternateContent xmlns:mc="http://schemas.openxmlformats.org/markup-compatibility/2006">
+        <mc:Choice xmlns:we="http://schemas.microsoft.com/office/webextensions/webextension/2010/11" xmlns:pca="http://schemas.microsoft.com/office/powerpoint/2013/contentapp" Requires="we pca">
+          <p:graphicFrame>
+            <p:nvGraphicFramePr>
+              <p:cNvPr id="2" name="Add-in" descr="Add-in content for Microsoft Power BI."/>
+              <p:cNvGraphicFramePr>
+                <a:graphicFrameLocks noGrp="1"/>
+              </p:cNvGraphicFramePr>
+              <p:nvPr/>
+            </p:nvGraphicFramePr>
+            <p:xfrm>
+              <a:off x="720824" y="1171468"/>
+              <a:ext cx="10747177" cy="5334335"/>
+            </p:xfrm>
+            <a:graphic>
+              <a:graphicData uri="http://schemas.microsoft.com/office/webextensions/webextension/2010/11">
+                <we:webextensionref xmlns:we="http://schemas.microsoft.com/office/webextensions/webextension/2010/11" xmlns:r="http://schemas.openxmlformats.org/officeDocument/2006/relationships" r:id="rId3"/>
+              </a:graphicData>
+            </a:graphic>
+          </p:graphicFrame>
+        </mc:Choice>
+        <mc:Fallback>
+          <p:pic>
+            <p:nvPicPr>
+              <p:cNvPr id="2" name="Add-in" descr="Add-in content for Microsoft Power BI."/>
+              <p:cNvPicPr>
+                <a:picLocks noGrp="1" noRot="1" noChangeAspect="1" noMove="1" noResize="1" noEditPoints="1" noAdjustHandles="1" noChangeArrowheads="1" noChangeShapeType="1"/>
+              </p:cNvPicPr>
+              <p:nvPr/>
+            </p:nvPicPr>
+            <p:blipFill>
+              <a:blip r:embed="rId4"/>
+              <a:stretch>
+                <a:fillRect/>
+              </a:stretch>
+            </p:blipFill>
+            <p:spPr>
+              <a:xfrm>
+                <a:off x="720824" y="1171468"/>
+                <a:ext cx="10747177" cy="5334335"/>
+              </a:xfrm>
+              <a:prstGeom prst="rect">
+                <a:avLst/>
+              </a:prstGeom>
+            </p:spPr>
+          </p:pic>
+        </mc:Fallback>
+      </mc:AlternateContent>
+      <mc:AlternateContent xmlns:mc="http://schemas.openxmlformats.org/markup-compatibility/2006">
+        <mc:Choice xmlns:we="http://schemas.microsoft.com/office/webextensions/webextension/2010/11" xmlns:pca="http://schemas.microsoft.com/office/powerpoint/2013/contentapp" Requires="we pca">
+          <p:graphicFrame>
+            <p:nvGraphicFramePr>
+              <p:cNvPr id="3" name="Add-in" descr="Add-in content for Microsoft Power BI.">
+                <a:extLst>
+                  <a:ext uri="{FF2B5EF4-FFF2-40B4-BE49-F238E27FC236}">
+                    <a16:creationId xmlns:a16="http://schemas.microsoft.com/office/drawing/2014/main" id="{ADA6C17F-11F7-577A-15FC-4BBC697D3F29}"/>
+                  </a:ext>
+                </a:extLst>
+              </p:cNvPr>
+              <p:cNvGraphicFramePr>
+                <a:graphicFrameLocks noGrp="1"/>
+              </p:cNvGraphicFramePr>
+              <p:nvPr/>
+            </p:nvGraphicFramePr>
+            <p:xfrm>
+              <a:off x="721012" y="1170879"/>
+              <a:ext cx="10749976" cy="5335725"/>
+            </p:xfrm>
+            <a:graphic>
+              <a:graphicData uri="http://schemas.microsoft.com/office/webextensions/webextension/2010/11">
+                <we:webextensionref xmlns:we="http://schemas.microsoft.com/office/webextensions/webextension/2010/11" xmlns:r="http://schemas.openxmlformats.org/officeDocument/2006/relationships" r:id="rId5"/>
+              </a:graphicData>
+            </a:graphic>
+          </p:graphicFrame>
+        </mc:Choice>
+        <mc:Fallback>
+          <p:pic>
+            <p:nvPicPr>
+              <p:cNvPr id="3" name="Add-in" descr="Add-in content for Microsoft Power BI.">
+                <a:extLst>
+                  <a:ext uri="{FF2B5EF4-FFF2-40B4-BE49-F238E27FC236}">
+                    <a16:creationId xmlns:a16="http://schemas.microsoft.com/office/drawing/2014/main" id="{ADA6C17F-11F7-577A-15FC-4BBC697D3F29}"/>
+                  </a:ext>
+                </a:extLst>
+              </p:cNvPr>
+              <p:cNvPicPr>
+                <a:picLocks noGrp="1" noRot="1" noChangeAspect="1" noMove="1" noResize="1" noEditPoints="1" noAdjustHandles="1" noChangeArrowheads="1" noChangeShapeType="1"/>
+              </p:cNvPicPr>
+              <p:nvPr/>
+            </p:nvPicPr>
+            <p:blipFill>
+              <a:blip r:embed="rId4"/>
+              <a:stretch>
+                <a:fillRect/>
+              </a:stretch>
+            </p:blipFill>
+            <p:spPr>
+              <a:xfrm>
+                <a:off x="721012" y="1170879"/>
+                <a:ext cx="10749976" cy="5335725"/>
+              </a:xfrm>
+              <a:prstGeom prst="rect">
+                <a:avLst/>
+              </a:prstGeom>
+            </p:spPr>
+          </p:pic>
+        </mc:Fallback>
+      </mc:AlternateContent>
+    </p:spTree>
+    <p:extLst>
+      <p:ext uri="{BB962C8B-B14F-4D97-AF65-F5344CB8AC3E}">
+        <p14:creationId xmlns:p14="http://schemas.microsoft.com/office/powerpoint/2010/main" val="3211859542"/>
+      </p:ext>
+    </p:extLst>
+  </p:cSld>
+  <p:clrMapOvr>
+    <a:masterClrMapping/>
+  </p:clrMapOvr>
+</p:sld>
+</file>
+
+<file path=ppt/slides/slide11.xml><?xml version="1.0" encoding="utf-8"?>
+<p:sld xmlns:a="http://schemas.openxmlformats.org/drawingml/2006/main" xmlns:r="http://schemas.openxmlformats.org/officeDocument/2006/relationships" xmlns:p="http://schemas.openxmlformats.org/presentationml/2006/main">
+  <p:cSld>
+    <p:bg>
+      <p:bgPr>
+        <a:solidFill>
+          <a:srgbClr val="14263D"/>
+        </a:solidFill>
+        <a:effectLst/>
+      </p:bgPr>
+    </p:bg>
+    <p:spTree>
+      <p:nvGrpSpPr>
+        <p:cNvPr id="1" name=""/>
+        <p:cNvGrpSpPr/>
+        <p:nvPr/>
+      </p:nvGrpSpPr>
+      <p:grpSpPr>
+        <a:xfrm>
+          <a:off x="0" y="0"/>
+          <a:ext cx="0" cy="0"/>
+          <a:chOff x="0" y="0"/>
+          <a:chExt cx="0" cy="0"/>
+        </a:xfrm>
+      </p:grpSpPr>
+      <p:sp>
+        <p:nvSpPr>
+          <p:cNvPr id="2" name="Rectangle 1"/>
+          <p:cNvSpPr/>
+          <p:nvPr/>
+        </p:nvSpPr>
+        <p:spPr>
+          <a:xfrm>
+            <a:off x="0" y="0"/>
+            <a:ext cx="256032" cy="6858000"/>
+          </a:xfrm>
+          <a:prstGeom prst="rect">
+            <a:avLst/>
+          </a:prstGeom>
+          <a:solidFill>
+            <a:srgbClr val="E8A020"/>
+          </a:solidFill>
+          <a:ln>
+            <a:noFill/>
+          </a:ln>
+        </p:spPr>
+        <p:style>
+          <a:lnRef idx="1">
+            <a:schemeClr val="accent1"/>
+          </a:lnRef>
+          <a:fillRef idx="3">
+            <a:schemeClr val="accent1"/>
+          </a:fillRef>
+          <a:effectRef idx="2">
+            <a:schemeClr val="accent1"/>
+          </a:effectRef>
+          <a:fontRef idx="minor">
+            <a:schemeClr val="lt1"/>
+          </a:fontRef>
+        </p:style>
+        <p:txBody>
+          <a:bodyPr rtlCol="0" anchor="ctr"/>
+          <a:lstStyle/>
+          <a:p>
+            <a:pPr algn="ctr"/>
+            <a:endParaRPr/>
+          </a:p>
+        </p:txBody>
+      </p:sp>
+      <p:sp>
+        <p:nvSpPr>
+          <p:cNvPr id="3" name="Oval 2"/>
+          <p:cNvSpPr/>
+          <p:nvPr/>
+        </p:nvSpPr>
+        <p:spPr>
+          <a:xfrm>
+            <a:off x="8229600" y="-731520"/>
+            <a:ext cx="4572000" cy="4572000"/>
+          </a:xfrm>
+          <a:prstGeom prst="ellipse">
+            <a:avLst/>
+          </a:prstGeom>
+          <a:solidFill>
+            <a:srgbClr val="2D4A6E"/>
+          </a:solidFill>
+          <a:ln>
+            <a:noFill/>
+          </a:ln>
+        </p:spPr>
+        <p:style>
+          <a:lnRef idx="1">
+            <a:schemeClr val="accent1"/>
+          </a:lnRef>
+          <a:fillRef idx="3">
+            <a:schemeClr val="accent1"/>
+          </a:fillRef>
+          <a:effectRef idx="2">
+            <a:schemeClr val="accent1"/>
+          </a:effectRef>
+          <a:fontRef idx="minor">
+            <a:schemeClr val="lt1"/>
+          </a:fontRef>
+        </p:style>
+        <p:txBody>
+          <a:bodyPr rtlCol="0" anchor="ctr"/>
+          <a:lstStyle/>
+          <a:p>
+            <a:pPr algn="ctr"/>
+            <a:endParaRPr/>
+          </a:p>
+        </p:txBody>
+      </p:sp>
+      <p:sp>
+        <p:nvSpPr>
+          <p:cNvPr id="4" name="TextBox 3"/>
+          <p:cNvSpPr txBox="1"/>
+          <p:nvPr/>
+        </p:nvSpPr>
+        <p:spPr>
+          <a:xfrm>
+            <a:off x="502920" y="1097280"/>
+            <a:ext cx="9144000" cy="731520"/>
+          </a:xfrm>
+          <a:prstGeom prst="rect">
+            <a:avLst/>
+          </a:prstGeom>
+          <a:noFill/>
+        </p:spPr>
+        <p:txBody>
+          <a:bodyPr wrap="square" lIns="0" tIns="0" rIns="0" bIns="0">
+            <a:spAutoFit/>
+          </a:bodyPr>
+          <a:lstStyle/>
+          <a:p>
+            <a:pPr algn="l"/>
+            <a:r>
+              <a:rPr sz="3800" b="1" i="0">
+                <a:solidFill>
+                  <a:srgbClr val="FFFFFF"/>
+                </a:solidFill>
+                <a:latin typeface="Calibri"/>
+              </a:rPr>
+              <a:t>Let's connect</a:t>
+            </a:r>
+          </a:p>
+        </p:txBody>
+      </p:sp>
+      <p:sp>
+        <p:nvSpPr>
+          <p:cNvPr id="5" name="TextBox 4"/>
+          <p:cNvSpPr txBox="1"/>
+          <p:nvPr/>
+        </p:nvSpPr>
+        <p:spPr>
+          <a:xfrm>
+            <a:off x="502920" y="1965960"/>
+            <a:ext cx="8686800" cy="640080"/>
+          </a:xfrm>
+          <a:prstGeom prst="rect">
+            <a:avLst/>
+          </a:prstGeom>
+          <a:noFill/>
+        </p:spPr>
+        <p:txBody>
+          <a:bodyPr wrap="square" lIns="0" tIns="0" rIns="0" bIns="0">
+            <a:spAutoFit/>
+          </a:bodyPr>
+          <a:lstStyle/>
+          <a:p>
+            <a:pPr algn="l"/>
+            <a:r>
+              <a:rPr sz="1400" b="0" i="0">
+                <a:solidFill>
+                  <a:srgbClr val="A0B4CC"/>
+                </a:solidFill>
+                <a:latin typeface="Calibri"/>
+              </a:rPr>
+              <a:t>I built this pipeline specifically to demonstrate readiness for the BIS Banking Department analytics role.</a:t>
+            </a:r>
+          </a:p>
+        </p:txBody>
+      </p:sp>
+      <p:sp>
+        <p:nvSpPr>
+          <p:cNvPr id="6" name="Rectangle 5"/>
+          <p:cNvSpPr/>
+          <p:nvPr/>
+        </p:nvSpPr>
+        <p:spPr>
+          <a:xfrm>
+            <a:off x="502920" y="2761488"/>
+            <a:ext cx="5486400" cy="18288"/>
+          </a:xfrm>
+          <a:prstGeom prst="rect">
+            <a:avLst/>
+          </a:prstGeom>
+          <a:solidFill>
+            <a:srgbClr val="2D4A6E"/>
+          </a:solidFill>
+          <a:ln>
+            <a:noFill/>
+          </a:ln>
+        </p:spPr>
+        <p:style>
+          <a:lnRef idx="1">
+            <a:schemeClr val="accent1"/>
+          </a:lnRef>
+          <a:fillRef idx="3">
+            <a:schemeClr val="accent1"/>
+          </a:fillRef>
+          <a:effectRef idx="2">
+            <a:schemeClr val="accent1"/>
+          </a:effectRef>
+          <a:fontRef idx="minor">
+            <a:schemeClr val="lt1"/>
+          </a:fontRef>
+        </p:style>
+        <p:txBody>
+          <a:bodyPr rtlCol="0" anchor="ctr"/>
+          <a:lstStyle/>
+          <a:p>
+            <a:pPr algn="ctr"/>
+            <a:endParaRPr/>
+          </a:p>
+        </p:txBody>
+      </p:sp>
+      <p:sp>
+        <p:nvSpPr>
+          <p:cNvPr id="7" name="TextBox 6"/>
+          <p:cNvSpPr txBox="1"/>
+          <p:nvPr/>
+        </p:nvSpPr>
+        <p:spPr>
+          <a:xfrm>
+            <a:off x="502920" y="2907792"/>
+            <a:ext cx="1371600" cy="402336"/>
+          </a:xfrm>
+          <a:prstGeom prst="rect">
+            <a:avLst/>
+          </a:prstGeom>
+          <a:noFill/>
+        </p:spPr>
+        <p:txBody>
+          <a:bodyPr wrap="square" lIns="0" tIns="0" rIns="0" bIns="0">
+            <a:spAutoFit/>
+          </a:bodyPr>
+          <a:lstStyle/>
+          <a:p>
+            <a:pPr algn="l"/>
+            <a:r>
+              <a:rPr sz="1200" b="1" i="0">
+                <a:solidFill>
+                  <a:srgbClr val="E8A020"/>
+                </a:solidFill>
+                <a:latin typeface="Calibri"/>
+              </a:rPr>
+              <a:t>Email:</a:t>
+            </a:r>
+          </a:p>
+        </p:txBody>
+      </p:sp>
+      <p:sp>
+        <p:nvSpPr>
+          <p:cNvPr id="8" name="TextBox 7"/>
+          <p:cNvSpPr txBox="1"/>
+          <p:nvPr/>
+        </p:nvSpPr>
+        <p:spPr>
+          <a:xfrm>
+            <a:off x="1920240" y="2907792"/>
+            <a:ext cx="8686800" cy="184666"/>
+          </a:xfrm>
+          <a:prstGeom prst="rect">
+            <a:avLst/>
+          </a:prstGeom>
+          <a:noFill/>
+        </p:spPr>
+        <p:txBody>
+          <a:bodyPr wrap="square" lIns="0" tIns="0" rIns="0" bIns="0">
+            <a:spAutoFit/>
+          </a:bodyPr>
+          <a:lstStyle/>
+          <a:p>
+            <a:pPr algn="l"/>
+            <a:r>
+              <a:rPr lang="en-US" sz="1200" dirty="0">
+                <a:solidFill>
+                  <a:srgbClr val="FFFFFF"/>
+                </a:solidFill>
+                <a:latin typeface="Calibri"/>
+              </a:rPr>
+              <a:t>g</a:t>
+            </a:r>
+            <a:r>
+              <a:rPr lang="en-US" sz="1200" b="0" i="0" dirty="0">
+                <a:solidFill>
+                  <a:srgbClr val="FFFFFF"/>
+                </a:solidFill>
+                <a:latin typeface="Calibri"/>
+              </a:rPr>
+              <a:t>authier@gny-consulting.com</a:t>
+            </a:r>
+            <a:endParaRPr sz="1200" b="0" i="0" dirty="0">
+              <a:solidFill>
+                <a:srgbClr val="FFFFFF"/>
+              </a:solidFill>
+              <a:latin typeface="Calibri"/>
+            </a:endParaRPr>
+          </a:p>
+        </p:txBody>
+      </p:sp>
+      <p:sp>
+        <p:nvSpPr>
+          <p:cNvPr id="9" name="TextBox 8"/>
+          <p:cNvSpPr txBox="1"/>
+          <p:nvPr/>
+        </p:nvSpPr>
+        <p:spPr>
+          <a:xfrm>
+            <a:off x="502920" y="3474720"/>
+            <a:ext cx="1371600" cy="402336"/>
+          </a:xfrm>
+          <a:prstGeom prst="rect">
+            <a:avLst/>
+          </a:prstGeom>
+          <a:noFill/>
+        </p:spPr>
+        <p:txBody>
+          <a:bodyPr wrap="square" lIns="0" tIns="0" rIns="0" bIns="0">
+            <a:spAutoFit/>
+          </a:bodyPr>
+          <a:lstStyle/>
+          <a:p>
+            <a:pPr algn="l"/>
+            <a:r>
+              <a:rPr sz="1200" b="1" i="0">
+                <a:solidFill>
+                  <a:srgbClr val="E8A020"/>
+                </a:solidFill>
+                <a:latin typeface="Calibri"/>
+              </a:rPr>
+              <a:t>Role:</a:t>
+            </a:r>
+          </a:p>
+        </p:txBody>
+      </p:sp>
+      <p:sp>
+        <p:nvSpPr>
+          <p:cNvPr id="10" name="TextBox 9"/>
+          <p:cNvSpPr txBox="1"/>
+          <p:nvPr/>
+        </p:nvSpPr>
+        <p:spPr>
+          <a:xfrm>
+            <a:off x="1920240" y="3474720"/>
+            <a:ext cx="8686800" cy="402336"/>
+          </a:xfrm>
+          <a:prstGeom prst="rect">
+            <a:avLst/>
+          </a:prstGeom>
+          <a:noFill/>
+        </p:spPr>
+        <p:txBody>
+          <a:bodyPr wrap="square" lIns="0" tIns="0" rIns="0" bIns="0">
+            <a:spAutoFit/>
+          </a:bodyPr>
+          <a:lstStyle/>
+          <a:p>
+            <a:pPr algn="l"/>
+            <a:r>
+              <a:rPr sz="1200" b="0" i="0">
+                <a:solidFill>
+                  <a:srgbClr val="FFFFFF"/>
+                </a:solidFill>
+                <a:latin typeface="Calibri"/>
+              </a:rPr>
+              <a:t>Senior Business Data Analyst — BIS Banking Department</a:t>
+            </a:r>
+          </a:p>
+        </p:txBody>
+      </p:sp>
+      <p:sp>
+        <p:nvSpPr>
+          <p:cNvPr id="11" name="TextBox 10"/>
+          <p:cNvSpPr txBox="1"/>
+          <p:nvPr/>
+        </p:nvSpPr>
+        <p:spPr>
+          <a:xfrm>
+            <a:off x="502920" y="4041648"/>
+            <a:ext cx="1371600" cy="402336"/>
+          </a:xfrm>
+          <a:prstGeom prst="rect">
+            <a:avLst/>
+          </a:prstGeom>
+          <a:noFill/>
+        </p:spPr>
+        <p:txBody>
+          <a:bodyPr wrap="square" lIns="0" tIns="0" rIns="0" bIns="0">
+            <a:spAutoFit/>
+          </a:bodyPr>
+          <a:lstStyle/>
+          <a:p>
+            <a:pPr algn="l"/>
+            <a:r>
+              <a:rPr sz="1200" b="1" i="0">
+                <a:solidFill>
+                  <a:srgbClr val="E8A020"/>
+                </a:solidFill>
+                <a:latin typeface="Calibri"/>
+              </a:rPr>
+              <a:t>Stack:</a:t>
+            </a:r>
+          </a:p>
+        </p:txBody>
+      </p:sp>
+      <p:sp>
+        <p:nvSpPr>
+          <p:cNvPr id="12" name="TextBox 11"/>
+          <p:cNvSpPr txBox="1"/>
+          <p:nvPr/>
+        </p:nvSpPr>
+        <p:spPr>
+          <a:xfrm>
+            <a:off x="1920240" y="4041648"/>
+            <a:ext cx="8686800" cy="402336"/>
+          </a:xfrm>
+          <a:prstGeom prst="rect">
+            <a:avLst/>
+          </a:prstGeom>
+          <a:noFill/>
+        </p:spPr>
+        <p:txBody>
+          <a:bodyPr wrap="square" lIns="0" tIns="0" rIns="0" bIns="0">
+            <a:spAutoFit/>
+          </a:bodyPr>
+          <a:lstStyle/>
+          <a:p>
+            <a:pPr algn="l"/>
+            <a:r>
+              <a:rPr sz="1200" b="0" i="0">
+                <a:solidFill>
+                  <a:srgbClr val="FFFFFF"/>
+                </a:solidFill>
+                <a:latin typeface="Calibri"/>
+              </a:rPr>
+              <a:t>MS Fabric  ·  dbt Core  ·  Power BI  ·  T-SQL  ·  Python</a:t>
+            </a:r>
+          </a:p>
+        </p:txBody>
+      </p:sp>
+      <p:sp>
+        <p:nvSpPr>
+          <p:cNvPr id="13" name="TextBox 12"/>
+          <p:cNvSpPr txBox="1"/>
+          <p:nvPr/>
+        </p:nvSpPr>
+        <p:spPr>
+          <a:xfrm>
+            <a:off x="502920" y="4608576"/>
+            <a:ext cx="1371600" cy="402336"/>
+          </a:xfrm>
+          <a:prstGeom prst="rect">
+            <a:avLst/>
+          </a:prstGeom>
+          <a:noFill/>
+        </p:spPr>
+        <p:txBody>
+          <a:bodyPr wrap="square" lIns="0" tIns="0" rIns="0" bIns="0">
+            <a:spAutoFit/>
+          </a:bodyPr>
+          <a:lstStyle/>
+          <a:p>
+            <a:pPr algn="l"/>
+            <a:r>
+              <a:rPr sz="1200" b="1" i="0">
+                <a:solidFill>
+                  <a:srgbClr val="E8A020"/>
+                </a:solidFill>
+                <a:latin typeface="Calibri"/>
+              </a:rPr>
+              <a:t>Project:</a:t>
+            </a:r>
+          </a:p>
+        </p:txBody>
+      </p:sp>
+      <p:sp>
+        <p:nvSpPr>
+          <p:cNvPr id="14" name="TextBox 13"/>
+          <p:cNvSpPr txBox="1"/>
+          <p:nvPr/>
+        </p:nvSpPr>
+        <p:spPr>
+          <a:xfrm>
+            <a:off x="1920240" y="4608576"/>
+            <a:ext cx="8686800" cy="402336"/>
+          </a:xfrm>
+          <a:prstGeom prst="rect">
+            <a:avLst/>
+          </a:prstGeom>
+          <a:noFill/>
+        </p:spPr>
+        <p:txBody>
+          <a:bodyPr wrap="square" lIns="0" tIns="0" rIns="0" bIns="0">
+            <a:spAutoFit/>
+          </a:bodyPr>
+          <a:lstStyle/>
+          <a:p>
+            <a:pPr algn="l"/>
+            <a:r>
+              <a:rPr sz="1200" b="0" i="0">
+                <a:solidFill>
+                  <a:srgbClr val="FFFFFF"/>
+                </a:solidFill>
+                <a:latin typeface="Calibri"/>
+              </a:rPr>
+              <a:t>BIS_Project_2026 — full pipeline available on request</a:t>
+            </a:r>
+          </a:p>
+        </p:txBody>
+      </p:sp>
+      <p:sp>
+        <p:nvSpPr>
+          <p:cNvPr id="15" name="Rectangle 14"/>
+          <p:cNvSpPr/>
+          <p:nvPr/>
+        </p:nvSpPr>
+        <p:spPr>
+          <a:xfrm>
+            <a:off x="502920" y="5349240"/>
+            <a:ext cx="5486400" cy="18288"/>
+          </a:xfrm>
+          <a:prstGeom prst="rect">
+            <a:avLst/>
+          </a:prstGeom>
+          <a:solidFill>
+            <a:srgbClr val="2D4A6E"/>
+          </a:solidFill>
+          <a:ln>
+            <a:noFill/>
+          </a:ln>
+        </p:spPr>
+        <p:style>
+          <a:lnRef idx="1">
+            <a:schemeClr val="accent1"/>
+          </a:lnRef>
+          <a:fillRef idx="3">
+            <a:schemeClr val="accent1"/>
+          </a:fillRef>
+          <a:effectRef idx="2">
+            <a:schemeClr val="accent1"/>
+          </a:effectRef>
+          <a:fontRef idx="minor">
+            <a:schemeClr val="lt1"/>
+          </a:fontRef>
+        </p:style>
+        <p:txBody>
+          <a:bodyPr rtlCol="0" anchor="ctr"/>
+          <a:lstStyle/>
+          <a:p>
+            <a:pPr algn="ctr"/>
+            <a:endParaRPr/>
+          </a:p>
+        </p:txBody>
+      </p:sp>
+      <p:sp>
+        <p:nvSpPr>
+          <p:cNvPr id="16" name="TextBox 15"/>
+          <p:cNvSpPr txBox="1"/>
+          <p:nvPr/>
+        </p:nvSpPr>
+        <p:spPr>
+          <a:xfrm>
+            <a:off x="502920" y="5532120"/>
+            <a:ext cx="7315200" cy="502920"/>
+          </a:xfrm>
+          <a:prstGeom prst="rect">
+            <a:avLst/>
+          </a:prstGeom>
+          <a:noFill/>
+        </p:spPr>
+        <p:txBody>
+          <a:bodyPr wrap="square" lIns="0" tIns="0" rIns="0" bIns="0">
+            <a:spAutoFit/>
+          </a:bodyPr>
+          <a:lstStyle/>
+          <a:p>
+            <a:pPr algn="l"/>
+            <a:r>
+              <a:rPr sz="2200" b="1" i="0">
+                <a:solidFill>
+                  <a:srgbClr val="E8A020"/>
+                </a:solidFill>
+                <a:latin typeface="Calibri"/>
+              </a:rPr>
+              <a:t>Thank you</a:t>
+            </a:r>
+          </a:p>
+        </p:txBody>
+      </p:sp>
+      <p:sp>
+        <p:nvSpPr>
+          <p:cNvPr id="17" name="TextBox 16"/>
+          <p:cNvSpPr txBox="1"/>
+          <p:nvPr/>
+        </p:nvSpPr>
+        <p:spPr>
+          <a:xfrm>
+            <a:off x="502920" y="6053328"/>
+            <a:ext cx="9144000" cy="411480"/>
+          </a:xfrm>
+          <a:prstGeom prst="rect">
+            <a:avLst/>
+          </a:prstGeom>
+          <a:noFill/>
+        </p:spPr>
+        <p:txBody>
+          <a:bodyPr wrap="square" lIns="0" tIns="0" rIns="0" bIns="0">
+            <a:spAutoFit/>
+          </a:bodyPr>
+          <a:lstStyle/>
+          <a:p>
+            <a:pPr algn="l"/>
+            <a:r>
+              <a:rPr sz="1200" b="0" i="0">
+                <a:solidFill>
+                  <a:srgbClr val="A0B4CC"/>
+                </a:solidFill>
+                <a:latin typeface="Calibri"/>
+              </a:rPr>
+              <a:t>I look forward to contributing to the BIS Banking Department analytics team.</a:t>
             </a:r>
           </a:p>
         </p:txBody>
@@ -3573,7 +4471,7 @@
 </file>
 
 <file path=ppt/slides/slide2.xml><?xml version="1.0" encoding="utf-8"?>
-<p:sld xmlns:a="http://schemas.openxmlformats.org/drawingml/2006/main" xmlns:p="http://schemas.openxmlformats.org/presentationml/2006/main" xmlns:r="http://schemas.openxmlformats.org/officeDocument/2006/relationships">
+<p:sld xmlns:a="http://schemas.openxmlformats.org/drawingml/2006/main" xmlns:r="http://schemas.openxmlformats.org/officeDocument/2006/relationships" xmlns:p="http://schemas.openxmlformats.org/presentationml/2006/main">
   <p:cSld>
     <p:bg>
       <p:bgPr>
@@ -3589,7 +4487,14 @@
         <p:cNvGrpSpPr/>
         <p:nvPr/>
       </p:nvGrpSpPr>
-      <p:grpSpPr/>
+      <p:grpSpPr>
+        <a:xfrm>
+          <a:off x="0" y="0"/>
+          <a:ext cx="0" cy="0"/>
+          <a:chOff x="0" y="0"/>
+          <a:chExt cx="0" cy="0"/>
+        </a:xfrm>
+      </p:grpSpPr>
       <p:sp>
         <p:nvSpPr>
           <p:cNvPr id="2" name="Rectangle 1"/>
@@ -3630,6 +4535,7 @@
           <a:lstStyle/>
           <a:p>
             <a:pPr algn="ctr"/>
+            <a:endParaRPr/>
           </a:p>
         </p:txBody>
       </p:sp>
@@ -3650,7 +4556,7 @@
           <a:noFill/>
         </p:spPr>
         <p:txBody>
-          <a:bodyPr wrap="square" lIns="0" rIns="0" tIns="0" bIns="0">
+          <a:bodyPr wrap="square" lIns="0" tIns="0" rIns="0" bIns="0">
             <a:spAutoFit/>
           </a:bodyPr>
           <a:lstStyle/>
@@ -3708,6 +4614,7 @@
           <a:lstStyle/>
           <a:p>
             <a:pPr algn="ctr"/>
+            <a:endParaRPr/>
           </a:p>
         </p:txBody>
       </p:sp>
@@ -3728,7 +4635,7 @@
           <a:noFill/>
         </p:spPr>
         <p:txBody>
-          <a:bodyPr wrap="square" lIns="0" rIns="0" tIns="0" bIns="0">
+          <a:bodyPr wrap="square" lIns="0" tIns="0" rIns="0" bIns="0">
             <a:spAutoFit/>
           </a:bodyPr>
           <a:lstStyle/>
@@ -3786,6 +4693,7 @@
           <a:lstStyle/>
           <a:p>
             <a:pPr algn="ctr"/>
+            <a:endParaRPr/>
           </a:p>
         </p:txBody>
       </p:sp>
@@ -3829,6 +4737,7 @@
           <a:lstStyle/>
           <a:p>
             <a:pPr algn="ctr"/>
+            <a:endParaRPr/>
           </a:p>
         </p:txBody>
       </p:sp>
@@ -3849,7 +4758,7 @@
           <a:noFill/>
         </p:spPr>
         <p:txBody>
-          <a:bodyPr wrap="square" lIns="0" rIns="0" tIns="0" bIns="0">
+          <a:bodyPr wrap="square" lIns="0" tIns="0" rIns="0" bIns="0">
             <a:spAutoFit/>
           </a:bodyPr>
           <a:lstStyle/>
@@ -3884,7 +4793,7 @@
           <a:noFill/>
         </p:spPr>
         <p:txBody>
-          <a:bodyPr wrap="square" lIns="0" rIns="0" tIns="0" bIns="0">
+          <a:bodyPr wrap="square" lIns="0" tIns="0" rIns="0" bIns="0">
             <a:spAutoFit/>
           </a:bodyPr>
           <a:lstStyle/>
@@ -3943,6 +4852,7 @@
           <a:lstStyle/>
           <a:p>
             <a:pPr algn="ctr"/>
+            <a:endParaRPr/>
           </a:p>
         </p:txBody>
       </p:sp>
@@ -3986,6 +4896,7 @@
           <a:lstStyle/>
           <a:p>
             <a:pPr algn="ctr"/>
+            <a:endParaRPr/>
           </a:p>
         </p:txBody>
       </p:sp>
@@ -4006,7 +4917,7 @@
           <a:noFill/>
         </p:spPr>
         <p:txBody>
-          <a:bodyPr wrap="square" lIns="0" rIns="0" tIns="0" bIns="0">
+          <a:bodyPr wrap="square" lIns="0" tIns="0" rIns="0" bIns="0">
             <a:spAutoFit/>
           </a:bodyPr>
           <a:lstStyle/>
@@ -4041,7 +4952,7 @@
           <a:noFill/>
         </p:spPr>
         <p:txBody>
-          <a:bodyPr wrap="square" lIns="0" rIns="0" tIns="0" bIns="0">
+          <a:bodyPr wrap="square" lIns="0" tIns="0" rIns="0" bIns="0">
             <a:spAutoFit/>
           </a:bodyPr>
           <a:lstStyle/>
@@ -4100,6 +5011,7 @@
           <a:lstStyle/>
           <a:p>
             <a:pPr algn="ctr"/>
+            <a:endParaRPr/>
           </a:p>
         </p:txBody>
       </p:sp>
@@ -4143,6 +5055,7 @@
           <a:lstStyle/>
           <a:p>
             <a:pPr algn="ctr"/>
+            <a:endParaRPr/>
           </a:p>
         </p:txBody>
       </p:sp>
@@ -4163,7 +5076,7 @@
           <a:noFill/>
         </p:spPr>
         <p:txBody>
-          <a:bodyPr wrap="square" lIns="0" rIns="0" tIns="0" bIns="0">
+          <a:bodyPr wrap="square" lIns="0" tIns="0" rIns="0" bIns="0">
             <a:spAutoFit/>
           </a:bodyPr>
           <a:lstStyle/>
@@ -4198,7 +5111,7 @@
           <a:noFill/>
         </p:spPr>
         <p:txBody>
-          <a:bodyPr wrap="square" lIns="0" rIns="0" tIns="0" bIns="0">
+          <a:bodyPr wrap="square" lIns="0" tIns="0" rIns="0" bIns="0">
             <a:spAutoFit/>
           </a:bodyPr>
           <a:lstStyle/>
@@ -4257,6 +5170,7 @@
           <a:lstStyle/>
           <a:p>
             <a:pPr algn="ctr"/>
+            <a:endParaRPr/>
           </a:p>
         </p:txBody>
       </p:sp>
@@ -4300,6 +5214,7 @@
           <a:lstStyle/>
           <a:p>
             <a:pPr algn="ctr"/>
+            <a:endParaRPr/>
           </a:p>
         </p:txBody>
       </p:sp>
@@ -4320,7 +5235,7 @@
           <a:noFill/>
         </p:spPr>
         <p:txBody>
-          <a:bodyPr wrap="square" lIns="0" rIns="0" tIns="0" bIns="0">
+          <a:bodyPr wrap="square" lIns="0" tIns="0" rIns="0" bIns="0">
             <a:spAutoFit/>
           </a:bodyPr>
           <a:lstStyle/>
@@ -4355,7 +5270,7 @@
           <a:noFill/>
         </p:spPr>
         <p:txBody>
-          <a:bodyPr wrap="square" lIns="0" rIns="0" tIns="0" bIns="0">
+          <a:bodyPr wrap="square" lIns="0" tIns="0" rIns="0" bIns="0">
             <a:spAutoFit/>
           </a:bodyPr>
           <a:lstStyle/>
@@ -4414,6 +5329,7 @@
           <a:lstStyle/>
           <a:p>
             <a:pPr algn="ctr"/>
+            <a:endParaRPr/>
           </a:p>
         </p:txBody>
       </p:sp>
@@ -4457,6 +5373,7 @@
           <a:lstStyle/>
           <a:p>
             <a:pPr algn="ctr"/>
+            <a:endParaRPr/>
           </a:p>
         </p:txBody>
       </p:sp>
@@ -4477,7 +5394,7 @@
           <a:noFill/>
         </p:spPr>
         <p:txBody>
-          <a:bodyPr wrap="square" lIns="0" rIns="0" tIns="0" bIns="0">
+          <a:bodyPr wrap="square" lIns="0" tIns="0" rIns="0" bIns="0">
             <a:spAutoFit/>
           </a:bodyPr>
           <a:lstStyle/>
@@ -4512,7 +5429,7 @@
           <a:noFill/>
         </p:spPr>
         <p:txBody>
-          <a:bodyPr wrap="square" lIns="0" rIns="0" tIns="0" bIns="0">
+          <a:bodyPr wrap="square" lIns="0" tIns="0" rIns="0" bIns="0">
             <a:spAutoFit/>
           </a:bodyPr>
           <a:lstStyle/>
@@ -4547,7 +5464,7 @@
           <a:noFill/>
         </p:spPr>
         <p:txBody>
-          <a:bodyPr wrap="square" lIns="0" rIns="0" tIns="0" bIns="0">
+          <a:bodyPr wrap="square" lIns="0" tIns="0" rIns="0" bIns="0">
             <a:spAutoFit/>
           </a:bodyPr>
           <a:lstStyle/>
@@ -4582,7 +5499,7 @@
           <a:noFill/>
         </p:spPr>
         <p:txBody>
-          <a:bodyPr wrap="square" lIns="0" rIns="0" tIns="0" bIns="0">
+          <a:bodyPr wrap="square" lIns="0" tIns="0" rIns="0" bIns="0">
             <a:spAutoFit/>
           </a:bodyPr>
           <a:lstStyle/>
@@ -4617,7 +5534,7 @@
           <a:noFill/>
         </p:spPr>
         <p:txBody>
-          <a:bodyPr wrap="square" lIns="0" rIns="0" tIns="0" bIns="0">
+          <a:bodyPr wrap="square" lIns="0" tIns="0" rIns="0" bIns="0">
             <a:spAutoFit/>
           </a:bodyPr>
           <a:lstStyle/>
@@ -4675,6 +5592,7 @@
           <a:lstStyle/>
           <a:p>
             <a:pPr algn="ctr"/>
+            <a:endParaRPr/>
           </a:p>
         </p:txBody>
       </p:sp>
@@ -4718,6 +5636,7 @@
           <a:lstStyle/>
           <a:p>
             <a:pPr algn="ctr"/>
+            <a:endParaRPr/>
           </a:p>
         </p:txBody>
       </p:sp>
@@ -4738,7 +5657,7 @@
           <a:noFill/>
         </p:spPr>
         <p:txBody>
-          <a:bodyPr wrap="square" lIns="0" rIns="0" tIns="0" bIns="0">
+          <a:bodyPr wrap="square" lIns="0" tIns="0" rIns="0" bIns="0">
             <a:spAutoFit/>
           </a:bodyPr>
           <a:lstStyle/>
@@ -4773,7 +5692,7 @@
           <a:noFill/>
         </p:spPr>
         <p:txBody>
-          <a:bodyPr wrap="square" lIns="0" rIns="0" tIns="0" bIns="0">
+          <a:bodyPr wrap="square" lIns="0" tIns="0" rIns="0" bIns="0">
             <a:spAutoFit/>
           </a:bodyPr>
           <a:lstStyle/>
@@ -4808,7 +5727,7 @@
           <a:noFill/>
         </p:spPr>
         <p:txBody>
-          <a:bodyPr wrap="square" lIns="0" rIns="0" tIns="0" bIns="0">
+          <a:bodyPr wrap="square" lIns="0" tIns="0" rIns="0" bIns="0">
             <a:spAutoFit/>
           </a:bodyPr>
           <a:lstStyle/>
@@ -4843,7 +5762,7 @@
           <a:noFill/>
         </p:spPr>
         <p:txBody>
-          <a:bodyPr wrap="square" lIns="0" rIns="0" tIns="0" bIns="0">
+          <a:bodyPr wrap="square" lIns="0" tIns="0" rIns="0" bIns="0">
             <a:spAutoFit/>
           </a:bodyPr>
           <a:lstStyle/>
@@ -4878,7 +5797,7 @@
           <a:noFill/>
         </p:spPr>
         <p:txBody>
-          <a:bodyPr wrap="square" lIns="0" rIns="0" tIns="0" bIns="0">
+          <a:bodyPr wrap="square" lIns="0" tIns="0" rIns="0" bIns="0">
             <a:spAutoFit/>
           </a:bodyPr>
           <a:lstStyle/>
@@ -4936,6 +5855,7 @@
           <a:lstStyle/>
           <a:p>
             <a:pPr algn="ctr"/>
+            <a:endParaRPr/>
           </a:p>
         </p:txBody>
       </p:sp>
@@ -4979,6 +5899,7 @@
           <a:lstStyle/>
           <a:p>
             <a:pPr algn="ctr"/>
+            <a:endParaRPr/>
           </a:p>
         </p:txBody>
       </p:sp>
@@ -4999,7 +5920,7 @@
           <a:noFill/>
         </p:spPr>
         <p:txBody>
-          <a:bodyPr wrap="square" lIns="0" rIns="0" tIns="0" bIns="0">
+          <a:bodyPr wrap="square" lIns="0" tIns="0" rIns="0" bIns="0">
             <a:spAutoFit/>
           </a:bodyPr>
           <a:lstStyle/>
@@ -5034,7 +5955,7 @@
           <a:noFill/>
         </p:spPr>
         <p:txBody>
-          <a:bodyPr wrap="square" lIns="0" rIns="0" tIns="0" bIns="0">
+          <a:bodyPr wrap="square" lIns="0" tIns="0" rIns="0" bIns="0">
             <a:spAutoFit/>
           </a:bodyPr>
           <a:lstStyle/>
@@ -5069,7 +5990,7 @@
           <a:noFill/>
         </p:spPr>
         <p:txBody>
-          <a:bodyPr wrap="square" lIns="0" rIns="0" tIns="0" bIns="0">
+          <a:bodyPr wrap="square" lIns="0" tIns="0" rIns="0" bIns="0">
             <a:spAutoFit/>
           </a:bodyPr>
           <a:lstStyle/>
@@ -5104,7 +6025,7 @@
           <a:noFill/>
         </p:spPr>
         <p:txBody>
-          <a:bodyPr wrap="square" lIns="0" rIns="0" tIns="0" bIns="0">
+          <a:bodyPr wrap="square" lIns="0" tIns="0" rIns="0" bIns="0">
             <a:spAutoFit/>
           </a:bodyPr>
           <a:lstStyle/>
@@ -5139,7 +6060,7 @@
           <a:noFill/>
         </p:spPr>
         <p:txBody>
-          <a:bodyPr wrap="square" lIns="0" rIns="0" tIns="0" bIns="0">
+          <a:bodyPr wrap="square" lIns="0" tIns="0" rIns="0" bIns="0">
             <a:spAutoFit/>
           </a:bodyPr>
           <a:lstStyle/>
@@ -5166,7 +6087,7 @@
 </file>
 
 <file path=ppt/slides/slide3.xml><?xml version="1.0" encoding="utf-8"?>
-<p:sld xmlns:a="http://schemas.openxmlformats.org/drawingml/2006/main" xmlns:p="http://schemas.openxmlformats.org/presentationml/2006/main" xmlns:r="http://schemas.openxmlformats.org/officeDocument/2006/relationships">
+<p:sld xmlns:a="http://schemas.openxmlformats.org/drawingml/2006/main" xmlns:r="http://schemas.openxmlformats.org/officeDocument/2006/relationships" xmlns:p="http://schemas.openxmlformats.org/presentationml/2006/main">
   <p:cSld>
     <p:bg>
       <p:bgPr>
@@ -5182,7 +6103,14 @@
         <p:cNvGrpSpPr/>
         <p:nvPr/>
       </p:nvGrpSpPr>
-      <p:grpSpPr/>
+      <p:grpSpPr>
+        <a:xfrm>
+          <a:off x="0" y="0"/>
+          <a:ext cx="0" cy="0"/>
+          <a:chOff x="0" y="0"/>
+          <a:chExt cx="0" cy="0"/>
+        </a:xfrm>
+      </p:grpSpPr>
       <p:sp>
         <p:nvSpPr>
           <p:cNvPr id="2" name="Rectangle 1"/>
@@ -5223,6 +6151,7 @@
           <a:lstStyle/>
           <a:p>
             <a:pPr algn="ctr"/>
+            <a:endParaRPr/>
           </a:p>
         </p:txBody>
       </p:sp>
@@ -5243,7 +6172,7 @@
           <a:noFill/>
         </p:spPr>
         <p:txBody>
-          <a:bodyPr wrap="square" lIns="0" rIns="0" tIns="0" bIns="0">
+          <a:bodyPr wrap="square" lIns="0" tIns="0" rIns="0" bIns="0">
             <a:spAutoFit/>
           </a:bodyPr>
           <a:lstStyle/>
@@ -5301,6 +6230,7 @@
           <a:lstStyle/>
           <a:p>
             <a:pPr algn="ctr"/>
+            <a:endParaRPr/>
           </a:p>
         </p:txBody>
       </p:sp>
@@ -5321,7 +6251,7 @@
           <a:noFill/>
         </p:spPr>
         <p:txBody>
-          <a:bodyPr wrap="square" lIns="0" rIns="0" tIns="0" bIns="0">
+          <a:bodyPr wrap="square" lIns="0" tIns="0" rIns="0" bIns="0">
             <a:spAutoFit/>
           </a:bodyPr>
           <a:lstStyle/>
@@ -5379,6 +6309,7 @@
           <a:lstStyle/>
           <a:p>
             <a:pPr algn="ctr"/>
+            <a:endParaRPr/>
           </a:p>
         </p:txBody>
       </p:sp>
@@ -5422,6 +6353,7 @@
           <a:lstStyle/>
           <a:p>
             <a:pPr algn="ctr"/>
+            <a:endParaRPr/>
           </a:p>
         </p:txBody>
       </p:sp>
@@ -5442,7 +6374,7 @@
           <a:noFill/>
         </p:spPr>
         <p:txBody>
-          <a:bodyPr wrap="square" lIns="0" rIns="0" tIns="0" bIns="0">
+          <a:bodyPr wrap="square" lIns="0" tIns="0" rIns="0" bIns="0">
             <a:spAutoFit/>
           </a:bodyPr>
           <a:lstStyle/>
@@ -5477,7 +6409,7 @@
           <a:noFill/>
         </p:spPr>
         <p:txBody>
-          <a:bodyPr wrap="square" lIns="0" rIns="0" tIns="0" bIns="0">
+          <a:bodyPr wrap="square" lIns="0" tIns="0" rIns="0" bIns="0">
             <a:spAutoFit/>
           </a:bodyPr>
           <a:lstStyle/>
@@ -5512,7 +6444,7 @@
           <a:noFill/>
         </p:spPr>
         <p:txBody>
-          <a:bodyPr wrap="square" lIns="0" rIns="0" tIns="0" bIns="0">
+          <a:bodyPr wrap="square" lIns="0" tIns="0" rIns="0" bIns="0">
             <a:spAutoFit/>
           </a:bodyPr>
           <a:lstStyle/>
@@ -5547,7 +6479,7 @@
           <a:noFill/>
         </p:spPr>
         <p:txBody>
-          <a:bodyPr wrap="square" lIns="0" rIns="0" tIns="0" bIns="0">
+          <a:bodyPr wrap="square" lIns="0" tIns="0" rIns="0" bIns="0">
             <a:spAutoFit/>
           </a:bodyPr>
           <a:lstStyle/>
@@ -5582,7 +6514,7 @@
           <a:noFill/>
         </p:spPr>
         <p:txBody>
-          <a:bodyPr wrap="square" lIns="0" rIns="0" tIns="0" bIns="0">
+          <a:bodyPr wrap="square" lIns="0" tIns="0" rIns="0" bIns="0">
             <a:spAutoFit/>
           </a:bodyPr>
           <a:lstStyle/>
@@ -5617,7 +6549,7 @@
           <a:noFill/>
         </p:spPr>
         <p:txBody>
-          <a:bodyPr wrap="square" lIns="0" rIns="0" tIns="0" bIns="0">
+          <a:bodyPr wrap="square" lIns="0" tIns="0" rIns="0" bIns="0">
             <a:spAutoFit/>
           </a:bodyPr>
           <a:lstStyle/>
@@ -5675,6 +6607,7 @@
           <a:lstStyle/>
           <a:p>
             <a:pPr algn="ctr"/>
+            <a:endParaRPr/>
           </a:p>
         </p:txBody>
       </p:sp>
@@ -5718,6 +6651,7 @@
           <a:lstStyle/>
           <a:p>
             <a:pPr algn="ctr"/>
+            <a:endParaRPr/>
           </a:p>
         </p:txBody>
       </p:sp>
@@ -5738,7 +6672,7 @@
           <a:noFill/>
         </p:spPr>
         <p:txBody>
-          <a:bodyPr wrap="square" lIns="0" rIns="0" tIns="0" bIns="0">
+          <a:bodyPr wrap="square" lIns="0" tIns="0" rIns="0" bIns="0">
             <a:spAutoFit/>
           </a:bodyPr>
           <a:lstStyle/>
@@ -5773,7 +6707,7 @@
           <a:noFill/>
         </p:spPr>
         <p:txBody>
-          <a:bodyPr wrap="square" lIns="0" rIns="0" tIns="0" bIns="0">
+          <a:bodyPr wrap="square" lIns="0" tIns="0" rIns="0" bIns="0">
             <a:spAutoFit/>
           </a:bodyPr>
           <a:lstStyle/>
@@ -5808,7 +6742,7 @@
           <a:noFill/>
         </p:spPr>
         <p:txBody>
-          <a:bodyPr wrap="square" lIns="0" rIns="0" tIns="0" bIns="0">
+          <a:bodyPr wrap="square" lIns="0" tIns="0" rIns="0" bIns="0">
             <a:spAutoFit/>
           </a:bodyPr>
           <a:lstStyle/>
@@ -5843,7 +6777,7 @@
           <a:noFill/>
         </p:spPr>
         <p:txBody>
-          <a:bodyPr wrap="square" lIns="0" rIns="0" tIns="0" bIns="0">
+          <a:bodyPr wrap="square" lIns="0" tIns="0" rIns="0" bIns="0">
             <a:spAutoFit/>
           </a:bodyPr>
           <a:lstStyle/>
@@ -5878,7 +6812,7 @@
           <a:noFill/>
         </p:spPr>
         <p:txBody>
-          <a:bodyPr wrap="square" lIns="0" rIns="0" tIns="0" bIns="0">
+          <a:bodyPr wrap="square" lIns="0" tIns="0" rIns="0" bIns="0">
             <a:spAutoFit/>
           </a:bodyPr>
           <a:lstStyle/>
@@ -5913,7 +6847,7 @@
           <a:noFill/>
         </p:spPr>
         <p:txBody>
-          <a:bodyPr wrap="square" lIns="0" rIns="0" tIns="0" bIns="0">
+          <a:bodyPr wrap="square" lIns="0" tIns="0" rIns="0" bIns="0">
             <a:spAutoFit/>
           </a:bodyPr>
           <a:lstStyle/>
@@ -5948,7 +6882,7 @@
           <a:noFill/>
         </p:spPr>
         <p:txBody>
-          <a:bodyPr wrap="square" lIns="0" rIns="0" tIns="0" bIns="0">
+          <a:bodyPr wrap="square" lIns="0" tIns="0" rIns="0" bIns="0">
             <a:spAutoFit/>
           </a:bodyPr>
           <a:lstStyle/>
@@ -5983,7 +6917,7 @@
           <a:noFill/>
         </p:spPr>
         <p:txBody>
-          <a:bodyPr wrap="square" lIns="0" rIns="0" tIns="0" bIns="0">
+          <a:bodyPr wrap="square" lIns="0" tIns="0" rIns="0" bIns="0">
             <a:spAutoFit/>
           </a:bodyPr>
           <a:lstStyle/>
@@ -6018,7 +6952,7 @@
           <a:noFill/>
         </p:spPr>
         <p:txBody>
-          <a:bodyPr wrap="square" lIns="0" rIns="0" tIns="0" bIns="0">
+          <a:bodyPr wrap="square" lIns="0" tIns="0" rIns="0" bIns="0">
             <a:spAutoFit/>
           </a:bodyPr>
           <a:lstStyle/>
@@ -6053,7 +6987,7 @@
           <a:noFill/>
         </p:spPr>
         <p:txBody>
-          <a:bodyPr wrap="square" lIns="0" rIns="0" tIns="0" bIns="0">
+          <a:bodyPr wrap="square" lIns="0" tIns="0" rIns="0" bIns="0">
             <a:spAutoFit/>
           </a:bodyPr>
           <a:lstStyle/>
@@ -6111,6 +7045,7 @@
           <a:lstStyle/>
           <a:p>
             <a:pPr algn="ctr"/>
+            <a:endParaRPr/>
           </a:p>
         </p:txBody>
       </p:sp>
@@ -6154,6 +7089,7 @@
           <a:lstStyle/>
           <a:p>
             <a:pPr algn="ctr"/>
+            <a:endParaRPr/>
           </a:p>
         </p:txBody>
       </p:sp>
@@ -6174,7 +7110,7 @@
           <a:noFill/>
         </p:spPr>
         <p:txBody>
-          <a:bodyPr wrap="square" lIns="0" rIns="0" tIns="0" bIns="0">
+          <a:bodyPr wrap="square" lIns="0" tIns="0" rIns="0" bIns="0">
             <a:spAutoFit/>
           </a:bodyPr>
           <a:lstStyle/>
@@ -6209,7 +7145,7 @@
           <a:noFill/>
         </p:spPr>
         <p:txBody>
-          <a:bodyPr wrap="square" lIns="0" rIns="0" tIns="0" bIns="0">
+          <a:bodyPr wrap="square" lIns="0" tIns="0" rIns="0" bIns="0">
             <a:spAutoFit/>
           </a:bodyPr>
           <a:lstStyle/>
@@ -6244,7 +7180,7 @@
           <a:noFill/>
         </p:spPr>
         <p:txBody>
-          <a:bodyPr wrap="square" lIns="0" rIns="0" tIns="0" bIns="0">
+          <a:bodyPr wrap="square" lIns="0" tIns="0" rIns="0" bIns="0">
             <a:spAutoFit/>
           </a:bodyPr>
           <a:lstStyle/>
@@ -6279,7 +7215,7 @@
           <a:noFill/>
         </p:spPr>
         <p:txBody>
-          <a:bodyPr wrap="square" lIns="0" rIns="0" tIns="0" bIns="0">
+          <a:bodyPr wrap="square" lIns="0" tIns="0" rIns="0" bIns="0">
             <a:spAutoFit/>
           </a:bodyPr>
           <a:lstStyle/>
@@ -6314,7 +7250,7 @@
           <a:noFill/>
         </p:spPr>
         <p:txBody>
-          <a:bodyPr wrap="square" lIns="0" rIns="0" tIns="0" bIns="0">
+          <a:bodyPr wrap="square" lIns="0" tIns="0" rIns="0" bIns="0">
             <a:spAutoFit/>
           </a:bodyPr>
           <a:lstStyle/>
@@ -6349,7 +7285,7 @@
           <a:noFill/>
         </p:spPr>
         <p:txBody>
-          <a:bodyPr wrap="square" lIns="0" rIns="0" tIns="0" bIns="0">
+          <a:bodyPr wrap="square" lIns="0" tIns="0" rIns="0" bIns="0">
             <a:spAutoFit/>
           </a:bodyPr>
           <a:lstStyle/>
@@ -6384,7 +7320,7 @@
           <a:noFill/>
         </p:spPr>
         <p:txBody>
-          <a:bodyPr wrap="square" lIns="0" rIns="0" tIns="0" bIns="0">
+          <a:bodyPr wrap="square" lIns="0" tIns="0" rIns="0" bIns="0">
             <a:spAutoFit/>
           </a:bodyPr>
           <a:lstStyle/>
@@ -6419,7 +7355,7 @@
           <a:noFill/>
         </p:spPr>
         <p:txBody>
-          <a:bodyPr wrap="square" lIns="0" rIns="0" tIns="0" bIns="0">
+          <a:bodyPr wrap="square" lIns="0" tIns="0" rIns="0" bIns="0">
             <a:spAutoFit/>
           </a:bodyPr>
           <a:lstStyle/>
@@ -6454,7 +7390,7 @@
           <a:noFill/>
         </p:spPr>
         <p:txBody>
-          <a:bodyPr wrap="square" lIns="0" rIns="0" tIns="0" bIns="0">
+          <a:bodyPr wrap="square" lIns="0" tIns="0" rIns="0" bIns="0">
             <a:spAutoFit/>
           </a:bodyPr>
           <a:lstStyle/>
@@ -6489,7 +7425,7 @@
           <a:noFill/>
         </p:spPr>
         <p:txBody>
-          <a:bodyPr wrap="square" lIns="0" rIns="0" tIns="0" bIns="0">
+          <a:bodyPr wrap="square" lIns="0" tIns="0" rIns="0" bIns="0">
             <a:spAutoFit/>
           </a:bodyPr>
           <a:lstStyle/>
@@ -6547,6 +7483,7 @@
           <a:lstStyle/>
           <a:p>
             <a:pPr algn="ctr"/>
+            <a:endParaRPr/>
           </a:p>
         </p:txBody>
       </p:sp>
@@ -6590,6 +7527,7 @@
           <a:lstStyle/>
           <a:p>
             <a:pPr algn="ctr"/>
+            <a:endParaRPr/>
           </a:p>
         </p:txBody>
       </p:sp>
@@ -6610,7 +7548,7 @@
           <a:noFill/>
         </p:spPr>
         <p:txBody>
-          <a:bodyPr wrap="square" lIns="0" rIns="0" tIns="0" bIns="0">
+          <a:bodyPr wrap="square" lIns="0" tIns="0" rIns="0" bIns="0">
             <a:spAutoFit/>
           </a:bodyPr>
           <a:lstStyle/>
@@ -6645,7 +7583,7 @@
           <a:noFill/>
         </p:spPr>
         <p:txBody>
-          <a:bodyPr wrap="square" lIns="0" rIns="0" tIns="0" bIns="0">
+          <a:bodyPr wrap="square" lIns="0" tIns="0" rIns="0" bIns="0">
             <a:spAutoFit/>
           </a:bodyPr>
           <a:lstStyle/>
@@ -6680,7 +7618,7 @@
           <a:noFill/>
         </p:spPr>
         <p:txBody>
-          <a:bodyPr wrap="square" lIns="0" rIns="0" tIns="0" bIns="0">
+          <a:bodyPr wrap="square" lIns="0" tIns="0" rIns="0" bIns="0">
             <a:spAutoFit/>
           </a:bodyPr>
           <a:lstStyle/>
@@ -6715,7 +7653,7 @@
           <a:noFill/>
         </p:spPr>
         <p:txBody>
-          <a:bodyPr wrap="square" lIns="0" rIns="0" tIns="0" bIns="0">
+          <a:bodyPr wrap="square" lIns="0" tIns="0" rIns="0" bIns="0">
             <a:spAutoFit/>
           </a:bodyPr>
           <a:lstStyle/>
@@ -6741,8 +7679,8 @@
         </p:nvSpPr>
         <p:spPr>
           <a:xfrm>
-            <a:off x="9098280" y="4224528"/>
-            <a:ext cx="3200400" cy="155448"/>
+            <a:off x="9099299" y="4224528"/>
+            <a:ext cx="2607812" cy="155448"/>
           </a:xfrm>
           <a:prstGeom prst="rect">
             <a:avLst/>
@@ -6773,6 +7711,7 @@
           <a:lstStyle/>
           <a:p>
             <a:pPr algn="ctr"/>
+            <a:endParaRPr/>
           </a:p>
         </p:txBody>
       </p:sp>
@@ -6793,7 +7732,7 @@
           <a:noFill/>
         </p:spPr>
         <p:txBody>
-          <a:bodyPr wrap="square" lIns="0" rIns="0" tIns="0" bIns="0">
+          <a:bodyPr wrap="square" lIns="0" tIns="0" rIns="0" bIns="0">
             <a:spAutoFit/>
           </a:bodyPr>
           <a:lstStyle/>
@@ -6828,7 +7767,7 @@
           <a:noFill/>
         </p:spPr>
         <p:txBody>
-          <a:bodyPr wrap="square" lIns="0" rIns="0" tIns="0" bIns="0">
+          <a:bodyPr wrap="square" lIns="0" tIns="0" rIns="0" bIns="0">
             <a:spAutoFit/>
           </a:bodyPr>
           <a:lstStyle/>
@@ -6886,6 +7825,7 @@
           <a:lstStyle/>
           <a:p>
             <a:pPr algn="ctr"/>
+            <a:endParaRPr/>
           </a:p>
         </p:txBody>
       </p:sp>
@@ -6906,7 +7846,7 @@
           <a:noFill/>
         </p:spPr>
         <p:txBody>
-          <a:bodyPr wrap="square" lIns="0" rIns="0" tIns="0" bIns="0">
+          <a:bodyPr wrap="square" lIns="0" tIns="0" rIns="0" bIns="0">
             <a:spAutoFit/>
           </a:bodyPr>
           <a:lstStyle/>
@@ -6941,7 +7881,7 @@
           <a:noFill/>
         </p:spPr>
         <p:txBody>
-          <a:bodyPr wrap="square" lIns="0" rIns="0" tIns="0" bIns="0">
+          <a:bodyPr wrap="square" lIns="0" tIns="0" rIns="0" bIns="0">
             <a:spAutoFit/>
           </a:bodyPr>
           <a:lstStyle/>
@@ -6999,6 +7939,7 @@
           <a:lstStyle/>
           <a:p>
             <a:pPr algn="ctr"/>
+            <a:endParaRPr/>
           </a:p>
         </p:txBody>
       </p:sp>
@@ -7019,7 +7960,7 @@
           <a:noFill/>
         </p:spPr>
         <p:txBody>
-          <a:bodyPr wrap="square" lIns="0" rIns="0" tIns="0" bIns="0">
+          <a:bodyPr wrap="square" lIns="0" tIns="0" rIns="0" bIns="0">
             <a:spAutoFit/>
           </a:bodyPr>
           <a:lstStyle/>
@@ -7054,7 +7995,7 @@
           <a:noFill/>
         </p:spPr>
         <p:txBody>
-          <a:bodyPr wrap="square" lIns="0" rIns="0" tIns="0" bIns="0">
+          <a:bodyPr wrap="square" lIns="0" tIns="0" rIns="0" bIns="0">
             <a:spAutoFit/>
           </a:bodyPr>
           <a:lstStyle/>
@@ -7112,6 +8053,7 @@
           <a:lstStyle/>
           <a:p>
             <a:pPr algn="ctr"/>
+            <a:endParaRPr/>
           </a:p>
         </p:txBody>
       </p:sp>
@@ -7132,7 +8074,7 @@
           <a:noFill/>
         </p:spPr>
         <p:txBody>
-          <a:bodyPr wrap="square" lIns="0" rIns="0" tIns="0" bIns="0">
+          <a:bodyPr wrap="square" lIns="0" tIns="0" rIns="0" bIns="0">
             <a:spAutoFit/>
           </a:bodyPr>
           <a:lstStyle/>
@@ -7167,7 +8109,7 @@
           <a:noFill/>
         </p:spPr>
         <p:txBody>
-          <a:bodyPr wrap="square" lIns="0" rIns="0" tIns="0" bIns="0">
+          <a:bodyPr wrap="square" lIns="0" tIns="0" rIns="0" bIns="0">
             <a:spAutoFit/>
           </a:bodyPr>
           <a:lstStyle/>
@@ -7225,6 +8167,7 @@
           <a:lstStyle/>
           <a:p>
             <a:pPr algn="ctr"/>
+            <a:endParaRPr/>
           </a:p>
         </p:txBody>
       </p:sp>
@@ -7245,7 +8188,7 @@
           <a:noFill/>
         </p:spPr>
         <p:txBody>
-          <a:bodyPr wrap="square" lIns="0" rIns="0" tIns="0" bIns="0">
+          <a:bodyPr wrap="square" lIns="0" tIns="0" rIns="0" bIns="0">
             <a:spAutoFit/>
           </a:bodyPr>
           <a:lstStyle/>
@@ -7280,7 +8223,7 @@
           <a:noFill/>
         </p:spPr>
         <p:txBody>
-          <a:bodyPr wrap="square" lIns="0" rIns="0" tIns="0" bIns="0">
+          <a:bodyPr wrap="square" lIns="0" tIns="0" rIns="0" bIns="0">
             <a:spAutoFit/>
           </a:bodyPr>
           <a:lstStyle/>
@@ -7338,6 +8281,7 @@
           <a:lstStyle/>
           <a:p>
             <a:pPr algn="ctr"/>
+            <a:endParaRPr/>
           </a:p>
         </p:txBody>
       </p:sp>
@@ -7350,7 +8294,7 @@
 </file>
 
 <file path=ppt/slides/slide4.xml><?xml version="1.0" encoding="utf-8"?>
-<p:sld xmlns:a="http://schemas.openxmlformats.org/drawingml/2006/main" xmlns:p="http://schemas.openxmlformats.org/presentationml/2006/main" xmlns:r="http://schemas.openxmlformats.org/officeDocument/2006/relationships">
+<p:sld xmlns:a="http://schemas.openxmlformats.org/drawingml/2006/main" xmlns:r="http://schemas.openxmlformats.org/officeDocument/2006/relationships" xmlns:p="http://schemas.openxmlformats.org/presentationml/2006/main">
   <p:cSld>
     <p:bg>
       <p:bgPr>
@@ -7366,7 +8310,14 @@
         <p:cNvGrpSpPr/>
         <p:nvPr/>
       </p:nvGrpSpPr>
-      <p:grpSpPr/>
+      <p:grpSpPr>
+        <a:xfrm>
+          <a:off x="0" y="0"/>
+          <a:ext cx="0" cy="0"/>
+          <a:chOff x="0" y="0"/>
+          <a:chExt cx="0" cy="0"/>
+        </a:xfrm>
+      </p:grpSpPr>
       <p:sp>
         <p:nvSpPr>
           <p:cNvPr id="2" name="Rectangle 1"/>
@@ -7407,6 +8358,7 @@
           <a:lstStyle/>
           <a:p>
             <a:pPr algn="ctr"/>
+            <a:endParaRPr/>
           </a:p>
         </p:txBody>
       </p:sp>
@@ -7427,7 +8379,7 @@
           <a:noFill/>
         </p:spPr>
         <p:txBody>
-          <a:bodyPr wrap="square" lIns="0" rIns="0" tIns="0" bIns="0">
+          <a:bodyPr wrap="square" lIns="0" tIns="0" rIns="0" bIns="0">
             <a:spAutoFit/>
           </a:bodyPr>
           <a:lstStyle/>
@@ -7485,6 +8437,7 @@
           <a:lstStyle/>
           <a:p>
             <a:pPr algn="ctr"/>
+            <a:endParaRPr/>
           </a:p>
         </p:txBody>
       </p:sp>
@@ -7528,6 +8481,7 @@
           <a:lstStyle/>
           <a:p>
             <a:pPr algn="ctr"/>
+            <a:endParaRPr/>
           </a:p>
         </p:txBody>
       </p:sp>
@@ -7571,6 +8525,7 @@
           <a:lstStyle/>
           <a:p>
             <a:pPr algn="ctr"/>
+            <a:endParaRPr/>
           </a:p>
         </p:txBody>
       </p:sp>
@@ -7591,7 +8546,7 @@
           <a:noFill/>
         </p:spPr>
         <p:txBody>
-          <a:bodyPr wrap="square" lIns="0" rIns="0" tIns="0" bIns="0">
+          <a:bodyPr wrap="square" lIns="0" tIns="0" rIns="0" bIns="0">
             <a:spAutoFit/>
           </a:bodyPr>
           <a:lstStyle/>
@@ -7626,7 +8581,7 @@
           <a:noFill/>
         </p:spPr>
         <p:txBody>
-          <a:bodyPr wrap="square" lIns="0" rIns="0" tIns="0" bIns="0">
+          <a:bodyPr wrap="square" lIns="0" tIns="0" rIns="0" bIns="0">
             <a:spAutoFit/>
           </a:bodyPr>
           <a:lstStyle/>
@@ -7662,7 +8617,7 @@
           <a:noFill/>
         </p:spPr>
         <p:txBody>
-          <a:bodyPr wrap="square" lIns="0" rIns="0" tIns="0" bIns="0">
+          <a:bodyPr wrap="square" lIns="0" tIns="0" rIns="0" bIns="0">
             <a:spAutoFit/>
           </a:bodyPr>
           <a:lstStyle/>
@@ -7721,6 +8676,7 @@
           <a:lstStyle/>
           <a:p>
             <a:pPr algn="ctr"/>
+            <a:endParaRPr/>
           </a:p>
         </p:txBody>
       </p:sp>
@@ -7741,7 +8697,7 @@
           <a:noFill/>
         </p:spPr>
         <p:txBody>
-          <a:bodyPr wrap="square" lIns="0" rIns="0" tIns="0" bIns="0">
+          <a:bodyPr wrap="square" lIns="0" tIns="0" rIns="0" bIns="0">
             <a:spAutoFit/>
           </a:bodyPr>
           <a:lstStyle/>
@@ -7799,6 +8755,7 @@
           <a:lstStyle/>
           <a:p>
             <a:pPr algn="ctr"/>
+            <a:endParaRPr/>
           </a:p>
         </p:txBody>
       </p:sp>
@@ -7842,6 +8799,7 @@
           <a:lstStyle/>
           <a:p>
             <a:pPr algn="ctr"/>
+            <a:endParaRPr/>
           </a:p>
         </p:txBody>
       </p:sp>
@@ -7862,7 +8820,7 @@
           <a:noFill/>
         </p:spPr>
         <p:txBody>
-          <a:bodyPr wrap="square" lIns="0" rIns="0" tIns="0" bIns="0">
+          <a:bodyPr wrap="square" lIns="0" tIns="0" rIns="0" bIns="0">
             <a:spAutoFit/>
           </a:bodyPr>
           <a:lstStyle/>
@@ -7897,7 +8855,7 @@
           <a:noFill/>
         </p:spPr>
         <p:txBody>
-          <a:bodyPr wrap="square" lIns="0" rIns="0" tIns="0" bIns="0">
+          <a:bodyPr wrap="square" lIns="0" tIns="0" rIns="0" bIns="0">
             <a:spAutoFit/>
           </a:bodyPr>
           <a:lstStyle/>
@@ -7933,7 +8891,7 @@
           <a:noFill/>
         </p:spPr>
         <p:txBody>
-          <a:bodyPr wrap="square" lIns="0" rIns="0" tIns="0" bIns="0">
+          <a:bodyPr wrap="square" lIns="0" tIns="0" rIns="0" bIns="0">
             <a:spAutoFit/>
           </a:bodyPr>
           <a:lstStyle/>
@@ -7992,6 +8950,7 @@
           <a:lstStyle/>
           <a:p>
             <a:pPr algn="ctr"/>
+            <a:endParaRPr/>
           </a:p>
         </p:txBody>
       </p:sp>
@@ -8012,7 +8971,7 @@
           <a:noFill/>
         </p:spPr>
         <p:txBody>
-          <a:bodyPr wrap="square" lIns="0" rIns="0" tIns="0" bIns="0">
+          <a:bodyPr wrap="square" lIns="0" tIns="0" rIns="0" bIns="0">
             <a:spAutoFit/>
           </a:bodyPr>
           <a:lstStyle/>
@@ -8070,6 +9029,7 @@
           <a:lstStyle/>
           <a:p>
             <a:pPr algn="ctr"/>
+            <a:endParaRPr/>
           </a:p>
         </p:txBody>
       </p:sp>
@@ -8113,6 +9073,7 @@
           <a:lstStyle/>
           <a:p>
             <a:pPr algn="ctr"/>
+            <a:endParaRPr/>
           </a:p>
         </p:txBody>
       </p:sp>
@@ -8133,7 +9094,7 @@
           <a:noFill/>
         </p:spPr>
         <p:txBody>
-          <a:bodyPr wrap="square" lIns="0" rIns="0" tIns="0" bIns="0">
+          <a:bodyPr wrap="square" lIns="0" tIns="0" rIns="0" bIns="0">
             <a:spAutoFit/>
           </a:bodyPr>
           <a:lstStyle/>
@@ -8168,7 +9129,7 @@
           <a:noFill/>
         </p:spPr>
         <p:txBody>
-          <a:bodyPr wrap="square" lIns="0" rIns="0" tIns="0" bIns="0">
+          <a:bodyPr wrap="square" lIns="0" tIns="0" rIns="0" bIns="0">
             <a:spAutoFit/>
           </a:bodyPr>
           <a:lstStyle/>
@@ -8204,7 +9165,7 @@
           <a:noFill/>
         </p:spPr>
         <p:txBody>
-          <a:bodyPr wrap="square" lIns="0" rIns="0" tIns="0" bIns="0">
+          <a:bodyPr wrap="square" lIns="0" tIns="0" rIns="0" bIns="0">
             <a:spAutoFit/>
           </a:bodyPr>
           <a:lstStyle/>
@@ -8263,6 +9224,7 @@
           <a:lstStyle/>
           <a:p>
             <a:pPr algn="ctr"/>
+            <a:endParaRPr/>
           </a:p>
         </p:txBody>
       </p:sp>
@@ -8283,7 +9245,7 @@
           <a:noFill/>
         </p:spPr>
         <p:txBody>
-          <a:bodyPr wrap="square" lIns="0" rIns="0" tIns="0" bIns="0">
+          <a:bodyPr wrap="square" lIns="0" tIns="0" rIns="0" bIns="0">
             <a:spAutoFit/>
           </a:bodyPr>
           <a:lstStyle/>
@@ -8341,6 +9303,7 @@
           <a:lstStyle/>
           <a:p>
             <a:pPr algn="ctr"/>
+            <a:endParaRPr/>
           </a:p>
         </p:txBody>
       </p:sp>
@@ -8384,6 +9347,7 @@
           <a:lstStyle/>
           <a:p>
             <a:pPr algn="ctr"/>
+            <a:endParaRPr/>
           </a:p>
         </p:txBody>
       </p:sp>
@@ -8404,7 +9368,7 @@
           <a:noFill/>
         </p:spPr>
         <p:txBody>
-          <a:bodyPr wrap="square" lIns="0" rIns="0" tIns="0" bIns="0">
+          <a:bodyPr wrap="square" lIns="0" tIns="0" rIns="0" bIns="0">
             <a:spAutoFit/>
           </a:bodyPr>
           <a:lstStyle/>
@@ -8439,7 +9403,7 @@
           <a:noFill/>
         </p:spPr>
         <p:txBody>
-          <a:bodyPr wrap="square" lIns="0" rIns="0" tIns="0" bIns="0">
+          <a:bodyPr wrap="square" lIns="0" tIns="0" rIns="0" bIns="0">
             <a:spAutoFit/>
           </a:bodyPr>
           <a:lstStyle/>
@@ -8475,7 +9439,7 @@
           <a:noFill/>
         </p:spPr>
         <p:txBody>
-          <a:bodyPr wrap="square" lIns="0" rIns="0" tIns="0" bIns="0">
+          <a:bodyPr wrap="square" lIns="0" tIns="0" rIns="0" bIns="0">
             <a:spAutoFit/>
           </a:bodyPr>
           <a:lstStyle/>
@@ -8534,6 +9498,7 @@
           <a:lstStyle/>
           <a:p>
             <a:pPr algn="ctr"/>
+            <a:endParaRPr/>
           </a:p>
         </p:txBody>
       </p:sp>
@@ -8554,7 +9519,7 @@
           <a:noFill/>
         </p:spPr>
         <p:txBody>
-          <a:bodyPr wrap="square" lIns="0" rIns="0" tIns="0" bIns="0">
+          <a:bodyPr wrap="square" lIns="0" tIns="0" rIns="0" bIns="0">
             <a:spAutoFit/>
           </a:bodyPr>
           <a:lstStyle/>
@@ -8612,6 +9577,7 @@
           <a:lstStyle/>
           <a:p>
             <a:pPr algn="ctr"/>
+            <a:endParaRPr/>
           </a:p>
         </p:txBody>
       </p:sp>
@@ -8655,6 +9621,7 @@
           <a:lstStyle/>
           <a:p>
             <a:pPr algn="ctr"/>
+            <a:endParaRPr/>
           </a:p>
         </p:txBody>
       </p:sp>
@@ -8675,7 +9642,7 @@
           <a:noFill/>
         </p:spPr>
         <p:txBody>
-          <a:bodyPr wrap="square" lIns="0" rIns="0" tIns="0" bIns="0">
+          <a:bodyPr wrap="square" lIns="0" tIns="0" rIns="0" bIns="0">
             <a:spAutoFit/>
           </a:bodyPr>
           <a:lstStyle/>
@@ -8710,7 +9677,7 @@
           <a:noFill/>
         </p:spPr>
         <p:txBody>
-          <a:bodyPr wrap="square" lIns="0" rIns="0" tIns="0" bIns="0">
+          <a:bodyPr wrap="square" lIns="0" tIns="0" rIns="0" bIns="0">
             <a:spAutoFit/>
           </a:bodyPr>
           <a:lstStyle/>
@@ -8746,7 +9713,7 @@
           <a:noFill/>
         </p:spPr>
         <p:txBody>
-          <a:bodyPr wrap="square" lIns="0" rIns="0" tIns="0" bIns="0">
+          <a:bodyPr wrap="square" lIns="0" tIns="0" rIns="0" bIns="0">
             <a:spAutoFit/>
           </a:bodyPr>
           <a:lstStyle/>
@@ -8782,7 +9749,7 @@
           <a:noFill/>
         </p:spPr>
         <p:txBody>
-          <a:bodyPr wrap="square" lIns="0" rIns="0" tIns="0" bIns="0">
+          <a:bodyPr wrap="square" lIns="0" tIns="0" rIns="0" bIns="0">
             <a:spAutoFit/>
           </a:bodyPr>
           <a:lstStyle/>
@@ -8818,7 +9785,7 @@
           <a:noFill/>
         </p:spPr>
         <p:txBody>
-          <a:bodyPr wrap="square" lIns="0" rIns="0" tIns="0" bIns="0">
+          <a:bodyPr wrap="square" lIns="0" tIns="0" rIns="0" bIns="0">
             <a:spAutoFit/>
           </a:bodyPr>
           <a:lstStyle/>
@@ -8854,7 +9821,7 @@
           <a:noFill/>
         </p:spPr>
         <p:txBody>
-          <a:bodyPr wrap="square" lIns="0" rIns="0" tIns="0" bIns="0">
+          <a:bodyPr wrap="square" lIns="0" tIns="0" rIns="0" bIns="0">
             <a:spAutoFit/>
           </a:bodyPr>
           <a:lstStyle/>
@@ -8890,7 +9857,7 @@
           <a:noFill/>
         </p:spPr>
         <p:txBody>
-          <a:bodyPr wrap="square" lIns="0" rIns="0" tIns="0" bIns="0">
+          <a:bodyPr wrap="square" lIns="0" tIns="0" rIns="0" bIns="0">
             <a:spAutoFit/>
           </a:bodyPr>
           <a:lstStyle/>
@@ -8926,7 +9893,7 @@
           <a:noFill/>
         </p:spPr>
         <p:txBody>
-          <a:bodyPr wrap="square" lIns="0" rIns="0" tIns="0" bIns="0">
+          <a:bodyPr wrap="square" lIns="0" tIns="0" rIns="0" bIns="0">
             <a:spAutoFit/>
           </a:bodyPr>
           <a:lstStyle/>
@@ -8985,6 +9952,7 @@
           <a:lstStyle/>
           <a:p>
             <a:pPr algn="ctr"/>
+            <a:endParaRPr/>
           </a:p>
         </p:txBody>
       </p:sp>
@@ -9028,6 +9996,7 @@
           <a:lstStyle/>
           <a:p>
             <a:pPr algn="ctr"/>
+            <a:endParaRPr/>
           </a:p>
         </p:txBody>
       </p:sp>
@@ -9048,7 +10017,7 @@
           <a:noFill/>
         </p:spPr>
         <p:txBody>
-          <a:bodyPr wrap="square" lIns="0" rIns="0" tIns="0" bIns="0">
+          <a:bodyPr wrap="square" lIns="0" tIns="0" rIns="0" bIns="0">
             <a:spAutoFit/>
           </a:bodyPr>
           <a:lstStyle/>
@@ -9083,7 +10052,7 @@
           <a:noFill/>
         </p:spPr>
         <p:txBody>
-          <a:bodyPr wrap="square" lIns="0" rIns="0" tIns="0" bIns="0">
+          <a:bodyPr wrap="square" lIns="0" tIns="0" rIns="0" bIns="0">
             <a:spAutoFit/>
           </a:bodyPr>
           <a:lstStyle/>
@@ -9118,7 +10087,7 @@
           <a:noFill/>
         </p:spPr>
         <p:txBody>
-          <a:bodyPr wrap="square" lIns="0" rIns="0" tIns="0" bIns="0">
+          <a:bodyPr wrap="square" lIns="0" tIns="0" rIns="0" bIns="0">
             <a:spAutoFit/>
           </a:bodyPr>
           <a:lstStyle/>
@@ -9176,6 +10145,7 @@
           <a:lstStyle/>
           <a:p>
             <a:pPr algn="ctr"/>
+            <a:endParaRPr/>
           </a:p>
         </p:txBody>
       </p:sp>
@@ -9196,7 +10166,7 @@
           <a:noFill/>
         </p:spPr>
         <p:txBody>
-          <a:bodyPr wrap="square" lIns="0" rIns="0" tIns="0" bIns="0">
+          <a:bodyPr wrap="square" lIns="0" tIns="0" rIns="0" bIns="0">
             <a:spAutoFit/>
           </a:bodyPr>
           <a:lstStyle/>
@@ -9254,6 +10224,7 @@
           <a:lstStyle/>
           <a:p>
             <a:pPr algn="ctr"/>
+            <a:endParaRPr/>
           </a:p>
         </p:txBody>
       </p:sp>
@@ -9274,7 +10245,7 @@
           <a:noFill/>
         </p:spPr>
         <p:txBody>
-          <a:bodyPr wrap="square" lIns="0" rIns="0" tIns="0" bIns="0">
+          <a:bodyPr wrap="square" lIns="0" tIns="0" rIns="0" bIns="0">
             <a:spAutoFit/>
           </a:bodyPr>
           <a:lstStyle/>
@@ -9332,6 +10303,7 @@
           <a:lstStyle/>
           <a:p>
             <a:pPr algn="ctr"/>
+            <a:endParaRPr/>
           </a:p>
         </p:txBody>
       </p:sp>
@@ -9352,7 +10324,7 @@
           <a:noFill/>
         </p:spPr>
         <p:txBody>
-          <a:bodyPr wrap="square" lIns="0" rIns="0" tIns="0" bIns="0">
+          <a:bodyPr wrap="square" lIns="0" tIns="0" rIns="0" bIns="0">
             <a:spAutoFit/>
           </a:bodyPr>
           <a:lstStyle/>
@@ -9410,6 +10382,7 @@
           <a:lstStyle/>
           <a:p>
             <a:pPr algn="ctr"/>
+            <a:endParaRPr/>
           </a:p>
         </p:txBody>
       </p:sp>
@@ -9430,7 +10403,7 @@
           <a:noFill/>
         </p:spPr>
         <p:txBody>
-          <a:bodyPr wrap="square" lIns="0" rIns="0" tIns="0" bIns="0">
+          <a:bodyPr wrap="square" lIns="0" tIns="0" rIns="0" bIns="0">
             <a:spAutoFit/>
           </a:bodyPr>
           <a:lstStyle/>
@@ -9488,6 +10461,7 @@
           <a:lstStyle/>
           <a:p>
             <a:pPr algn="ctr"/>
+            <a:endParaRPr/>
           </a:p>
         </p:txBody>
       </p:sp>
@@ -9508,7 +10482,7 @@
           <a:noFill/>
         </p:spPr>
         <p:txBody>
-          <a:bodyPr wrap="square" lIns="0" rIns="0" tIns="0" bIns="0">
+          <a:bodyPr wrap="square" lIns="0" tIns="0" rIns="0" bIns="0">
             <a:spAutoFit/>
           </a:bodyPr>
           <a:lstStyle/>
@@ -9535,7 +10509,7 @@
 </file>
 
 <file path=ppt/slides/slide5.xml><?xml version="1.0" encoding="utf-8"?>
-<p:sld xmlns:a="http://schemas.openxmlformats.org/drawingml/2006/main" xmlns:p="http://schemas.openxmlformats.org/presentationml/2006/main" xmlns:r="http://schemas.openxmlformats.org/officeDocument/2006/relationships">
+<p:sld xmlns:a="http://schemas.openxmlformats.org/drawingml/2006/main" xmlns:r="http://schemas.openxmlformats.org/officeDocument/2006/relationships" xmlns:p="http://schemas.openxmlformats.org/presentationml/2006/main">
   <p:cSld>
     <p:bg>
       <p:bgPr>
@@ -9551,7 +10525,14 @@
         <p:cNvGrpSpPr/>
         <p:nvPr/>
       </p:nvGrpSpPr>
-      <p:grpSpPr/>
+      <p:grpSpPr>
+        <a:xfrm>
+          <a:off x="0" y="0"/>
+          <a:ext cx="0" cy="0"/>
+          <a:chOff x="0" y="0"/>
+          <a:chExt cx="0" cy="0"/>
+        </a:xfrm>
+      </p:grpSpPr>
       <p:sp>
         <p:nvSpPr>
           <p:cNvPr id="2" name="Rectangle 1"/>
@@ -9592,6 +10573,7 @@
           <a:lstStyle/>
           <a:p>
             <a:pPr algn="ctr"/>
+            <a:endParaRPr/>
           </a:p>
         </p:txBody>
       </p:sp>
@@ -9612,7 +10594,7 @@
           <a:noFill/>
         </p:spPr>
         <p:txBody>
-          <a:bodyPr wrap="square" lIns="0" rIns="0" tIns="0" bIns="0">
+          <a:bodyPr wrap="square" lIns="0" tIns="0" rIns="0" bIns="0">
             <a:spAutoFit/>
           </a:bodyPr>
           <a:lstStyle/>
@@ -9670,6 +10652,7 @@
           <a:lstStyle/>
           <a:p>
             <a:pPr algn="ctr"/>
+            <a:endParaRPr/>
           </a:p>
         </p:txBody>
       </p:sp>
@@ -9713,6 +10696,7 @@
           <a:lstStyle/>
           <a:p>
             <a:pPr algn="ctr"/>
+            <a:endParaRPr/>
           </a:p>
         </p:txBody>
       </p:sp>
@@ -9733,7 +10717,7 @@
           <a:noFill/>
         </p:spPr>
         <p:txBody>
-          <a:bodyPr wrap="square" lIns="0" rIns="0" tIns="0" bIns="0">
+          <a:bodyPr wrap="square" lIns="0" tIns="0" rIns="0" bIns="0">
             <a:spAutoFit/>
           </a:bodyPr>
           <a:lstStyle/>
@@ -9791,6 +10775,7 @@
           <a:lstStyle/>
           <a:p>
             <a:pPr algn="ctr"/>
+            <a:endParaRPr/>
           </a:p>
         </p:txBody>
       </p:sp>
@@ -9834,6 +10819,7 @@
           <a:lstStyle/>
           <a:p>
             <a:pPr algn="ctr"/>
+            <a:endParaRPr/>
           </a:p>
         </p:txBody>
       </p:sp>
@@ -9854,7 +10840,7 @@
           <a:noFill/>
         </p:spPr>
         <p:txBody>
-          <a:bodyPr wrap="square" lIns="0" rIns="0" tIns="0" bIns="0">
+          <a:bodyPr wrap="square" lIns="0" tIns="0" rIns="0" bIns="0">
             <a:spAutoFit/>
           </a:bodyPr>
           <a:lstStyle/>
@@ -9889,14 +10875,14 @@
           <a:noFill/>
         </p:spPr>
         <p:txBody>
-          <a:bodyPr wrap="square" lIns="0" rIns="0" tIns="0" bIns="0">
-            <a:spAutoFit/>
-          </a:bodyPr>
-          <a:lstStyle/>
-          <a:p>
-            <a:pPr algn="l"/>
-            <a:r>
-              <a:rPr sz="1050" b="0" i="0">
+          <a:bodyPr wrap="square" lIns="0" tIns="0" rIns="0" bIns="0">
+            <a:spAutoFit/>
+          </a:bodyPr>
+          <a:lstStyle/>
+          <a:p>
+            <a:pPr algn="l"/>
+            <a:r>
+              <a:rPr sz="1050" b="0" i="0" dirty="0">
                 <a:solidFill>
                   <a:srgbClr val="64748B"/>
                 </a:solidFill>
@@ -9947,6 +10933,7 @@
           <a:lstStyle/>
           <a:p>
             <a:pPr algn="ctr"/>
+            <a:endParaRPr/>
           </a:p>
         </p:txBody>
       </p:sp>
@@ -9967,7 +10954,7 @@
           <a:noFill/>
         </p:spPr>
         <p:txBody>
-          <a:bodyPr wrap="square" lIns="0" rIns="0" tIns="0" bIns="0">
+          <a:bodyPr wrap="square" lIns="0" tIns="0" rIns="0" bIns="0">
             <a:spAutoFit/>
           </a:bodyPr>
           <a:lstStyle/>
@@ -10025,6 +11012,7 @@
           <a:lstStyle/>
           <a:p>
             <a:pPr algn="ctr"/>
+            <a:endParaRPr/>
           </a:p>
         </p:txBody>
       </p:sp>
@@ -10068,6 +11056,7 @@
           <a:lstStyle/>
           <a:p>
             <a:pPr algn="ctr"/>
+            <a:endParaRPr/>
           </a:p>
         </p:txBody>
       </p:sp>
@@ -10088,7 +11077,7 @@
           <a:noFill/>
         </p:spPr>
         <p:txBody>
-          <a:bodyPr wrap="square" lIns="0" rIns="0" tIns="0" bIns="0">
+          <a:bodyPr wrap="square" lIns="0" tIns="0" rIns="0" bIns="0">
             <a:spAutoFit/>
           </a:bodyPr>
           <a:lstStyle/>
@@ -10123,7 +11112,7 @@
           <a:noFill/>
         </p:spPr>
         <p:txBody>
-          <a:bodyPr wrap="square" lIns="0" rIns="0" tIns="0" bIns="0">
+          <a:bodyPr wrap="square" lIns="0" tIns="0" rIns="0" bIns="0">
             <a:spAutoFit/>
           </a:bodyPr>
           <a:lstStyle/>
@@ -10181,6 +11170,7 @@
           <a:lstStyle/>
           <a:p>
             <a:pPr algn="ctr"/>
+            <a:endParaRPr/>
           </a:p>
         </p:txBody>
       </p:sp>
@@ -10201,7 +11191,7 @@
           <a:noFill/>
         </p:spPr>
         <p:txBody>
-          <a:bodyPr wrap="square" lIns="0" rIns="0" tIns="0" bIns="0">
+          <a:bodyPr wrap="square" lIns="0" tIns="0" rIns="0" bIns="0">
             <a:spAutoFit/>
           </a:bodyPr>
           <a:lstStyle/>
@@ -10259,6 +11249,7 @@
           <a:lstStyle/>
           <a:p>
             <a:pPr algn="ctr"/>
+            <a:endParaRPr/>
           </a:p>
         </p:txBody>
       </p:sp>
@@ -10302,6 +11293,7 @@
           <a:lstStyle/>
           <a:p>
             <a:pPr algn="ctr"/>
+            <a:endParaRPr/>
           </a:p>
         </p:txBody>
       </p:sp>
@@ -10322,7 +11314,7 @@
           <a:noFill/>
         </p:spPr>
         <p:txBody>
-          <a:bodyPr wrap="square" lIns="0" rIns="0" tIns="0" bIns="0">
+          <a:bodyPr wrap="square" lIns="0" tIns="0" rIns="0" bIns="0">
             <a:spAutoFit/>
           </a:bodyPr>
           <a:lstStyle/>
@@ -10357,7 +11349,7 @@
           <a:noFill/>
         </p:spPr>
         <p:txBody>
-          <a:bodyPr wrap="square" lIns="0" rIns="0" tIns="0" bIns="0">
+          <a:bodyPr wrap="square" lIns="0" tIns="0" rIns="0" bIns="0">
             <a:spAutoFit/>
           </a:bodyPr>
           <a:lstStyle/>
@@ -10415,6 +11407,7 @@
           <a:lstStyle/>
           <a:p>
             <a:pPr algn="ctr"/>
+            <a:endParaRPr/>
           </a:p>
         </p:txBody>
       </p:sp>
@@ -10435,7 +11428,7 @@
           <a:noFill/>
         </p:spPr>
         <p:txBody>
-          <a:bodyPr wrap="square" lIns="0" rIns="0" tIns="0" bIns="0">
+          <a:bodyPr wrap="square" lIns="0" tIns="0" rIns="0" bIns="0">
             <a:spAutoFit/>
           </a:bodyPr>
           <a:lstStyle/>
@@ -10493,6 +11486,7 @@
           <a:lstStyle/>
           <a:p>
             <a:pPr algn="ctr"/>
+            <a:endParaRPr/>
           </a:p>
         </p:txBody>
       </p:sp>
@@ -10536,6 +11530,7 @@
           <a:lstStyle/>
           <a:p>
             <a:pPr algn="ctr"/>
+            <a:endParaRPr/>
           </a:p>
         </p:txBody>
       </p:sp>
@@ -10556,7 +11551,7 @@
           <a:noFill/>
         </p:spPr>
         <p:txBody>
-          <a:bodyPr wrap="square" lIns="0" rIns="0" tIns="0" bIns="0">
+          <a:bodyPr wrap="square" lIns="0" tIns="0" rIns="0" bIns="0">
             <a:spAutoFit/>
           </a:bodyPr>
           <a:lstStyle/>
@@ -10591,7 +11586,7 @@
           <a:noFill/>
         </p:spPr>
         <p:txBody>
-          <a:bodyPr wrap="square" lIns="0" rIns="0" tIns="0" bIns="0">
+          <a:bodyPr wrap="square" lIns="0" tIns="0" rIns="0" bIns="0">
             <a:spAutoFit/>
           </a:bodyPr>
           <a:lstStyle/>
@@ -10649,6 +11644,7 @@
           <a:lstStyle/>
           <a:p>
             <a:pPr algn="ctr"/>
+            <a:endParaRPr/>
           </a:p>
         </p:txBody>
       </p:sp>
@@ -10669,7 +11665,7 @@
           <a:noFill/>
         </p:spPr>
         <p:txBody>
-          <a:bodyPr wrap="square" lIns="0" rIns="0" tIns="0" bIns="0">
+          <a:bodyPr wrap="square" lIns="0" tIns="0" rIns="0" bIns="0">
             <a:spAutoFit/>
           </a:bodyPr>
           <a:lstStyle/>
@@ -10727,6 +11723,7 @@
           <a:lstStyle/>
           <a:p>
             <a:pPr algn="ctr"/>
+            <a:endParaRPr/>
           </a:p>
         </p:txBody>
       </p:sp>
@@ -10770,6 +11767,7 @@
           <a:lstStyle/>
           <a:p>
             <a:pPr algn="ctr"/>
+            <a:endParaRPr/>
           </a:p>
         </p:txBody>
       </p:sp>
@@ -10790,7 +11788,7 @@
           <a:noFill/>
         </p:spPr>
         <p:txBody>
-          <a:bodyPr wrap="square" lIns="0" rIns="0" tIns="0" bIns="0">
+          <a:bodyPr wrap="square" lIns="0" tIns="0" rIns="0" bIns="0">
             <a:spAutoFit/>
           </a:bodyPr>
           <a:lstStyle/>
@@ -10825,7 +11823,7 @@
           <a:noFill/>
         </p:spPr>
         <p:txBody>
-          <a:bodyPr wrap="square" lIns="0" rIns="0" tIns="0" bIns="0">
+          <a:bodyPr wrap="square" lIns="0" tIns="0" rIns="0" bIns="0">
             <a:spAutoFit/>
           </a:bodyPr>
           <a:lstStyle/>
@@ -10858,7 +11856,9 @@
             <a:avLst/>
           </a:prstGeom>
           <a:solidFill>
-            <a:srgbClr val="E2E8F0"/>
+            <a:schemeClr val="bg1">
+              <a:lumMod val="50000"/>
+            </a:schemeClr>
           </a:solidFill>
           <a:ln>
             <a:noFill/>
@@ -10883,6 +11883,7 @@
           <a:lstStyle/>
           <a:p>
             <a:pPr algn="ctr"/>
+            <a:endParaRPr/>
           </a:p>
         </p:txBody>
       </p:sp>
@@ -10901,7 +11902,9 @@
             <a:avLst/>
           </a:prstGeom>
           <a:solidFill>
-            <a:srgbClr val="E2E8F0"/>
+            <a:schemeClr val="bg1">
+              <a:lumMod val="50000"/>
+            </a:schemeClr>
           </a:solidFill>
           <a:ln>
             <a:noFill/>
@@ -10926,6 +11929,7 @@
           <a:lstStyle/>
           <a:p>
             <a:pPr algn="ctr"/>
+            <a:endParaRPr/>
           </a:p>
         </p:txBody>
       </p:sp>
@@ -10944,7 +11948,9 @@
             <a:avLst/>
           </a:prstGeom>
           <a:solidFill>
-            <a:srgbClr val="E2E8F0"/>
+            <a:schemeClr val="bg1">
+              <a:lumMod val="50000"/>
+            </a:schemeClr>
           </a:solidFill>
           <a:ln>
             <a:noFill/>
@@ -10969,6 +11975,7 @@
           <a:lstStyle/>
           <a:p>
             <a:pPr algn="ctr"/>
+            <a:endParaRPr/>
           </a:p>
         </p:txBody>
       </p:sp>
@@ -10987,7 +11994,9 @@
             <a:avLst/>
           </a:prstGeom>
           <a:solidFill>
-            <a:srgbClr val="E2E8F0"/>
+            <a:schemeClr val="bg1">
+              <a:lumMod val="50000"/>
+            </a:schemeClr>
           </a:solidFill>
           <a:ln>
             <a:noFill/>
@@ -11012,6 +12021,7 @@
           <a:lstStyle/>
           <a:p>
             <a:pPr algn="ctr"/>
+            <a:endParaRPr/>
           </a:p>
         </p:txBody>
       </p:sp>
@@ -11055,6 +12065,7 @@
           <a:lstStyle/>
           <a:p>
             <a:pPr algn="ctr"/>
+            <a:endParaRPr/>
           </a:p>
         </p:txBody>
       </p:sp>
@@ -11075,7 +12086,7 @@
           <a:noFill/>
         </p:spPr>
         <p:txBody>
-          <a:bodyPr wrap="square" lIns="0" rIns="0" tIns="0" bIns="0">
+          <a:bodyPr wrap="square" lIns="0" tIns="0" rIns="0" bIns="0">
             <a:spAutoFit/>
           </a:bodyPr>
           <a:lstStyle/>
@@ -11101,8 +12112,8 @@
         </p:nvSpPr>
         <p:spPr>
           <a:xfrm>
-            <a:off x="8796528" y="2286000"/>
-            <a:ext cx="1828800" cy="1417320"/>
+            <a:off x="9253728" y="2286000"/>
+            <a:ext cx="1307592" cy="1417320"/>
           </a:xfrm>
           <a:prstGeom prst="rect">
             <a:avLst/>
@@ -11133,6 +12144,7 @@
           <a:lstStyle/>
           <a:p>
             <a:pPr algn="ctr"/>
+            <a:endParaRPr/>
           </a:p>
         </p:txBody>
       </p:sp>
@@ -11153,7 +12165,7 @@
           <a:noFill/>
         </p:spPr>
         <p:txBody>
-          <a:bodyPr wrap="square" lIns="0" rIns="0" tIns="0" bIns="0">
+          <a:bodyPr wrap="square" lIns="0" tIns="0" rIns="0" bIns="0">
             <a:spAutoFit/>
           </a:bodyPr>
           <a:lstStyle/>
@@ -11188,7 +12200,7 @@
           <a:noFill/>
         </p:spPr>
         <p:txBody>
-          <a:bodyPr wrap="square" lIns="0" rIns="0" tIns="0" bIns="0">
+          <a:bodyPr wrap="square" lIns="0" tIns="0" rIns="0" bIns="0">
             <a:spAutoFit/>
           </a:bodyPr>
           <a:lstStyle/>
@@ -11223,7 +12235,7 @@
           <a:noFill/>
         </p:spPr>
         <p:txBody>
-          <a:bodyPr wrap="square" lIns="0" rIns="0" tIns="0" bIns="0">
+          <a:bodyPr wrap="square" lIns="0" tIns="0" rIns="0" bIns="0">
             <a:spAutoFit/>
           </a:bodyPr>
           <a:lstStyle/>
@@ -11249,7 +12261,7 @@
         </p:nvSpPr>
         <p:spPr>
           <a:xfrm>
-            <a:off x="8979408" y="1389888"/>
+            <a:off x="9188958" y="1389888"/>
             <a:ext cx="1280160" cy="475488"/>
           </a:xfrm>
           <a:prstGeom prst="rect">
@@ -11281,6 +12293,7 @@
           <a:lstStyle/>
           <a:p>
             <a:pPr algn="ctr"/>
+            <a:endParaRPr/>
           </a:p>
         </p:txBody>
       </p:sp>
@@ -11292,7 +12305,7 @@
         </p:nvSpPr>
         <p:spPr>
           <a:xfrm>
-            <a:off x="9025128" y="1481328"/>
+            <a:off x="9234678" y="1481328"/>
             <a:ext cx="1188719" cy="320040"/>
           </a:xfrm>
           <a:prstGeom prst="rect">
@@ -11301,7 +12314,7 @@
           <a:noFill/>
         </p:spPr>
         <p:txBody>
-          <a:bodyPr wrap="square" lIns="0" rIns="0" tIns="0" bIns="0">
+          <a:bodyPr wrap="square" lIns="0" tIns="0" rIns="0" bIns="0">
             <a:spAutoFit/>
           </a:bodyPr>
           <a:lstStyle/>
@@ -11327,8 +12340,8 @@
         </p:nvSpPr>
         <p:spPr>
           <a:xfrm>
-            <a:off x="7818120" y="2697480"/>
-            <a:ext cx="1371600" cy="475488"/>
+            <a:off x="7818120" y="2766060"/>
+            <a:ext cx="1216729" cy="320040"/>
           </a:xfrm>
           <a:prstGeom prst="rect">
             <a:avLst/>
@@ -11359,6 +12372,7 @@
           <a:lstStyle/>
           <a:p>
             <a:pPr algn="ctr"/>
+            <a:endParaRPr/>
           </a:p>
         </p:txBody>
       </p:sp>
@@ -11379,7 +12393,7 @@
           <a:noFill/>
         </p:spPr>
         <p:txBody>
-          <a:bodyPr wrap="square" lIns="0" rIns="0" tIns="0" bIns="0">
+          <a:bodyPr wrap="square" lIns="0" tIns="0" rIns="0" bIns="0">
             <a:spAutoFit/>
           </a:bodyPr>
           <a:lstStyle/>
@@ -11437,6 +12451,7 @@
           <a:lstStyle/>
           <a:p>
             <a:pPr algn="ctr"/>
+            <a:endParaRPr/>
           </a:p>
         </p:txBody>
       </p:sp>
@@ -11457,7 +12472,7 @@
           <a:noFill/>
         </p:spPr>
         <p:txBody>
-          <a:bodyPr wrap="square" lIns="0" rIns="0" tIns="0" bIns="0">
+          <a:bodyPr wrap="square" lIns="0" tIns="0" rIns="0" bIns="0">
             <a:spAutoFit/>
           </a:bodyPr>
           <a:lstStyle/>
@@ -11483,7 +12498,7 @@
         </p:nvSpPr>
         <p:spPr>
           <a:xfrm>
-            <a:off x="8979408" y="4251960"/>
+            <a:off x="9274683" y="4251960"/>
             <a:ext cx="1280160" cy="475488"/>
           </a:xfrm>
           <a:prstGeom prst="rect">
@@ -11515,6 +12530,7 @@
           <a:lstStyle/>
           <a:p>
             <a:pPr algn="ctr"/>
+            <a:endParaRPr/>
           </a:p>
         </p:txBody>
       </p:sp>
@@ -11526,7 +12542,7 @@
         </p:nvSpPr>
         <p:spPr>
           <a:xfrm>
-            <a:off x="9025128" y="4343400"/>
+            <a:off x="9320403" y="4343400"/>
             <a:ext cx="1188719" cy="320040"/>
           </a:xfrm>
           <a:prstGeom prst="rect">
@@ -11535,7 +12551,7 @@
           <a:noFill/>
         </p:spPr>
         <p:txBody>
-          <a:bodyPr wrap="square" lIns="0" rIns="0" tIns="0" bIns="0">
+          <a:bodyPr wrap="square" lIns="0" tIns="0" rIns="0" bIns="0">
             <a:spAutoFit/>
           </a:bodyPr>
           <a:lstStyle/>
@@ -11561,7 +12577,7 @@
         </p:nvSpPr>
         <p:spPr>
           <a:xfrm>
-            <a:off x="9692640" y="1865376"/>
+            <a:off x="9902190" y="1865376"/>
             <a:ext cx="36576" cy="420624"/>
           </a:xfrm>
           <a:prstGeom prst="rect">
@@ -11593,6 +12609,7 @@
           <a:lstStyle/>
           <a:p>
             <a:pPr algn="ctr"/>
+            <a:endParaRPr/>
           </a:p>
         </p:txBody>
       </p:sp>
@@ -11604,8 +12621,8 @@
         </p:nvSpPr>
         <p:spPr>
           <a:xfrm>
-            <a:off x="9189720" y="2926080"/>
-            <a:ext cx="521207" cy="36576"/>
+            <a:off x="9063355" y="2926080"/>
+            <a:ext cx="164337" cy="36576"/>
           </a:xfrm>
           <a:prstGeom prst="rect">
             <a:avLst/>
@@ -11636,6 +12653,7 @@
           <a:lstStyle/>
           <a:p>
             <a:pPr algn="ctr"/>
+            <a:endParaRPr/>
           </a:p>
         </p:txBody>
       </p:sp>
@@ -11647,8 +12665,8 @@
         </p:nvSpPr>
         <p:spPr>
           <a:xfrm>
-            <a:off x="10625328" y="2926080"/>
-            <a:ext cx="91440" cy="36576"/>
+            <a:off x="10589919" y="2926080"/>
+            <a:ext cx="105108" cy="36576"/>
           </a:xfrm>
           <a:prstGeom prst="rect">
             <a:avLst/>
@@ -11679,6 +12697,7 @@
           <a:lstStyle/>
           <a:p>
             <a:pPr algn="ctr"/>
+            <a:endParaRPr/>
           </a:p>
         </p:txBody>
       </p:sp>
@@ -11690,7 +12709,7 @@
         </p:nvSpPr>
         <p:spPr>
           <a:xfrm>
-            <a:off x="9692640" y="3703320"/>
+            <a:off x="9987915" y="3703320"/>
             <a:ext cx="36576" cy="548640"/>
           </a:xfrm>
           <a:prstGeom prst="rect">
@@ -11722,6 +12741,7 @@
           <a:lstStyle/>
           <a:p>
             <a:pPr algn="ctr"/>
+            <a:endParaRPr/>
           </a:p>
         </p:txBody>
       </p:sp>
@@ -11765,6 +12785,7 @@
           <a:lstStyle/>
           <a:p>
             <a:pPr algn="ctr"/>
+            <a:endParaRPr/>
           </a:p>
         </p:txBody>
       </p:sp>
@@ -11785,7 +12806,7 @@
           <a:noFill/>
         </p:spPr>
         <p:txBody>
-          <a:bodyPr wrap="square" lIns="0" rIns="0" tIns="0" bIns="0">
+          <a:bodyPr wrap="square" lIns="0" tIns="0" rIns="0" bIns="0">
             <a:spAutoFit/>
           </a:bodyPr>
           <a:lstStyle/>
@@ -11812,7 +12833,7 @@
 </file>
 
 <file path=ppt/slides/slide6.xml><?xml version="1.0" encoding="utf-8"?>
-<p:sld xmlns:a="http://schemas.openxmlformats.org/drawingml/2006/main" xmlns:p="http://schemas.openxmlformats.org/presentationml/2006/main" xmlns:r="http://schemas.openxmlformats.org/officeDocument/2006/relationships">
+<p:sld xmlns:a="http://schemas.openxmlformats.org/drawingml/2006/main" xmlns:r="http://schemas.openxmlformats.org/officeDocument/2006/relationships" xmlns:p="http://schemas.openxmlformats.org/presentationml/2006/main">
   <p:cSld>
     <p:bg>
       <p:bgPr>
@@ -11828,7 +12849,14 @@
         <p:cNvGrpSpPr/>
         <p:nvPr/>
       </p:nvGrpSpPr>
-      <p:grpSpPr/>
+      <p:grpSpPr>
+        <a:xfrm>
+          <a:off x="0" y="0"/>
+          <a:ext cx="0" cy="0"/>
+          <a:chOff x="0" y="0"/>
+          <a:chExt cx="0" cy="0"/>
+        </a:xfrm>
+      </p:grpSpPr>
       <p:sp>
         <p:nvSpPr>
           <p:cNvPr id="2" name="Rectangle 1"/>
@@ -11869,6 +12897,7 @@
           <a:lstStyle/>
           <a:p>
             <a:pPr algn="ctr"/>
+            <a:endParaRPr/>
           </a:p>
         </p:txBody>
       </p:sp>
@@ -11889,7 +12918,7 @@
           <a:noFill/>
         </p:spPr>
         <p:txBody>
-          <a:bodyPr wrap="square" lIns="0" rIns="0" tIns="0" bIns="0">
+          <a:bodyPr wrap="square" lIns="0" tIns="0" rIns="0" bIns="0">
             <a:spAutoFit/>
           </a:bodyPr>
           <a:lstStyle/>
@@ -11947,6 +12976,7 @@
           <a:lstStyle/>
           <a:p>
             <a:pPr algn="ctr"/>
+            <a:endParaRPr/>
           </a:p>
         </p:txBody>
       </p:sp>
@@ -11990,6 +13020,7 @@
           <a:lstStyle/>
           <a:p>
             <a:pPr algn="ctr"/>
+            <a:endParaRPr/>
           </a:p>
         </p:txBody>
       </p:sp>
@@ -12033,6 +13064,7 @@
           <a:lstStyle/>
           <a:p>
             <a:pPr algn="ctr"/>
+            <a:endParaRPr/>
           </a:p>
         </p:txBody>
       </p:sp>
@@ -12053,7 +13085,7 @@
           <a:noFill/>
         </p:spPr>
         <p:txBody>
-          <a:bodyPr wrap="square" lIns="0" rIns="0" tIns="0" bIns="0">
+          <a:bodyPr wrap="square" lIns="0" tIns="0" rIns="0" bIns="0">
             <a:spAutoFit/>
           </a:bodyPr>
           <a:lstStyle/>
@@ -12088,7 +13120,7 @@
           <a:noFill/>
         </p:spPr>
         <p:txBody>
-          <a:bodyPr wrap="square" lIns="0" rIns="0" tIns="0" bIns="0">
+          <a:bodyPr wrap="square" lIns="0" tIns="0" rIns="0" bIns="0">
             <a:spAutoFit/>
           </a:bodyPr>
           <a:lstStyle/>
@@ -12123,21 +13155,13 @@
           <a:noFill/>
         </p:spPr>
         <p:txBody>
-          <a:bodyPr wrap="square" lIns="0" rIns="0" tIns="0" bIns="0">
-            <a:spAutoFit/>
-          </a:bodyPr>
-          <a:lstStyle/>
-          <a:p>
-            <a:pPr algn="l"/>
-            <a:r>
-              <a:rPr sz="1100" b="0" i="0">
-                <a:solidFill>
-                  <a:srgbClr val="1E293B"/>
-                </a:solidFill>
-                <a:latin typeface="Calibri"/>
-              </a:rPr>
-              <a:t/>
-            </a:r>
+          <a:bodyPr wrap="square" lIns="0" tIns="0" rIns="0" bIns="0">
+            <a:spAutoFit/>
+          </a:bodyPr>
+          <a:lstStyle/>
+          <a:p>
+            <a:pPr algn="l"/>
+            <a:endParaRPr/>
           </a:p>
         </p:txBody>
       </p:sp>
@@ -12158,7 +13182,7 @@
           <a:noFill/>
         </p:spPr>
         <p:txBody>
-          <a:bodyPr wrap="square" lIns="0" rIns="0" tIns="0" bIns="0">
+          <a:bodyPr wrap="square" lIns="0" tIns="0" rIns="0" bIns="0">
             <a:spAutoFit/>
           </a:bodyPr>
           <a:lstStyle/>
@@ -12216,6 +13240,7 @@
           <a:lstStyle/>
           <a:p>
             <a:pPr algn="ctr"/>
+            <a:endParaRPr/>
           </a:p>
         </p:txBody>
       </p:sp>
@@ -12236,7 +13261,7 @@
           <a:noFill/>
         </p:spPr>
         <p:txBody>
-          <a:bodyPr wrap="square" lIns="0" rIns="0" tIns="0" bIns="0">
+          <a:bodyPr wrap="square" lIns="0" tIns="0" rIns="0" bIns="0">
             <a:spAutoFit/>
           </a:bodyPr>
           <a:lstStyle/>
@@ -12271,7 +13296,7 @@
           <a:noFill/>
         </p:spPr>
         <p:txBody>
-          <a:bodyPr wrap="square" lIns="0" rIns="0" tIns="0" bIns="0">
+          <a:bodyPr wrap="square" lIns="0" tIns="0" rIns="0" bIns="0">
             <a:spAutoFit/>
           </a:bodyPr>
           <a:lstStyle/>
@@ -12329,6 +13354,7 @@
           <a:lstStyle/>
           <a:p>
             <a:pPr algn="ctr"/>
+            <a:endParaRPr/>
           </a:p>
         </p:txBody>
       </p:sp>
@@ -12349,7 +13375,7 @@
           <a:noFill/>
         </p:spPr>
         <p:txBody>
-          <a:bodyPr wrap="square" lIns="0" rIns="0" tIns="0" bIns="0">
+          <a:bodyPr wrap="square" lIns="0" tIns="0" rIns="0" bIns="0">
             <a:spAutoFit/>
           </a:bodyPr>
           <a:lstStyle/>
@@ -12384,7 +13410,7 @@
           <a:noFill/>
         </p:spPr>
         <p:txBody>
-          <a:bodyPr wrap="square" lIns="0" rIns="0" tIns="0" bIns="0">
+          <a:bodyPr wrap="square" lIns="0" tIns="0" rIns="0" bIns="0">
             <a:spAutoFit/>
           </a:bodyPr>
           <a:lstStyle/>
@@ -12442,6 +13468,7 @@
           <a:lstStyle/>
           <a:p>
             <a:pPr algn="ctr"/>
+            <a:endParaRPr/>
           </a:p>
         </p:txBody>
       </p:sp>
@@ -12462,7 +13489,7 @@
           <a:noFill/>
         </p:spPr>
         <p:txBody>
-          <a:bodyPr wrap="square" lIns="0" rIns="0" tIns="0" bIns="0">
+          <a:bodyPr wrap="square" lIns="0" tIns="0" rIns="0" bIns="0">
             <a:spAutoFit/>
           </a:bodyPr>
           <a:lstStyle/>
@@ -12497,7 +13524,7 @@
           <a:noFill/>
         </p:spPr>
         <p:txBody>
-          <a:bodyPr wrap="square" lIns="0" rIns="0" tIns="0" bIns="0">
+          <a:bodyPr wrap="square" lIns="0" tIns="0" rIns="0" bIns="0">
             <a:spAutoFit/>
           </a:bodyPr>
           <a:lstStyle/>
@@ -12555,6 +13582,7 @@
           <a:lstStyle/>
           <a:p>
             <a:pPr algn="ctr"/>
+            <a:endParaRPr/>
           </a:p>
         </p:txBody>
       </p:sp>
@@ -12575,7 +13603,7 @@
           <a:noFill/>
         </p:spPr>
         <p:txBody>
-          <a:bodyPr wrap="square" lIns="0" rIns="0" tIns="0" bIns="0">
+          <a:bodyPr wrap="square" lIns="0" tIns="0" rIns="0" bIns="0">
             <a:spAutoFit/>
           </a:bodyPr>
           <a:lstStyle/>
@@ -12610,7 +13638,7 @@
           <a:noFill/>
         </p:spPr>
         <p:txBody>
-          <a:bodyPr wrap="square" lIns="0" rIns="0" tIns="0" bIns="0">
+          <a:bodyPr wrap="square" lIns="0" tIns="0" rIns="0" bIns="0">
             <a:spAutoFit/>
           </a:bodyPr>
           <a:lstStyle/>
@@ -12668,6 +13696,7 @@
           <a:lstStyle/>
           <a:p>
             <a:pPr algn="ctr"/>
+            <a:endParaRPr/>
           </a:p>
         </p:txBody>
       </p:sp>
@@ -12688,7 +13717,7 @@
           <a:noFill/>
         </p:spPr>
         <p:txBody>
-          <a:bodyPr wrap="square" lIns="0" rIns="0" tIns="0" bIns="0">
+          <a:bodyPr wrap="square" lIns="0" tIns="0" rIns="0" bIns="0">
             <a:spAutoFit/>
           </a:bodyPr>
           <a:lstStyle/>
@@ -12723,7 +13752,7 @@
           <a:noFill/>
         </p:spPr>
         <p:txBody>
-          <a:bodyPr wrap="square" lIns="0" rIns="0" tIns="0" bIns="0">
+          <a:bodyPr wrap="square" lIns="0" tIns="0" rIns="0" bIns="0">
             <a:spAutoFit/>
           </a:bodyPr>
           <a:lstStyle/>
@@ -12781,6 +13810,7 @@
           <a:lstStyle/>
           <a:p>
             <a:pPr algn="ctr"/>
+            <a:endParaRPr/>
           </a:p>
         </p:txBody>
       </p:sp>
@@ -12801,7 +13831,7 @@
           <a:noFill/>
         </p:spPr>
         <p:txBody>
-          <a:bodyPr wrap="square" lIns="0" rIns="0" tIns="0" bIns="0">
+          <a:bodyPr wrap="square" lIns="0" tIns="0" rIns="0" bIns="0">
             <a:spAutoFit/>
           </a:bodyPr>
           <a:lstStyle/>
@@ -12836,7 +13866,7 @@
           <a:noFill/>
         </p:spPr>
         <p:txBody>
-          <a:bodyPr wrap="square" lIns="0" rIns="0" tIns="0" bIns="0">
+          <a:bodyPr wrap="square" lIns="0" tIns="0" rIns="0" bIns="0">
             <a:spAutoFit/>
           </a:bodyPr>
           <a:lstStyle/>
@@ -12894,6 +13924,7 @@
           <a:lstStyle/>
           <a:p>
             <a:pPr algn="ctr"/>
+            <a:endParaRPr/>
           </a:p>
         </p:txBody>
       </p:sp>
@@ -12914,7 +13945,7 @@
           <a:noFill/>
         </p:spPr>
         <p:txBody>
-          <a:bodyPr wrap="square" lIns="0" rIns="0" tIns="0" bIns="0">
+          <a:bodyPr wrap="square" lIns="0" tIns="0" rIns="0" bIns="0">
             <a:spAutoFit/>
           </a:bodyPr>
           <a:lstStyle/>
@@ -12949,7 +13980,7 @@
           <a:noFill/>
         </p:spPr>
         <p:txBody>
-          <a:bodyPr wrap="square" lIns="0" rIns="0" tIns="0" bIns="0">
+          <a:bodyPr wrap="square" lIns="0" tIns="0" rIns="0" bIns="0">
             <a:spAutoFit/>
           </a:bodyPr>
           <a:lstStyle/>
@@ -13007,6 +14038,7 @@
           <a:lstStyle/>
           <a:p>
             <a:pPr algn="ctr"/>
+            <a:endParaRPr/>
           </a:p>
         </p:txBody>
       </p:sp>
@@ -13050,6 +14082,7 @@
           <a:lstStyle/>
           <a:p>
             <a:pPr algn="ctr"/>
+            <a:endParaRPr/>
           </a:p>
         </p:txBody>
       </p:sp>
@@ -13070,7 +14103,7 @@
           <a:noFill/>
         </p:spPr>
         <p:txBody>
-          <a:bodyPr wrap="square" lIns="0" rIns="0" tIns="0" bIns="0">
+          <a:bodyPr wrap="square" lIns="0" tIns="0" rIns="0" bIns="0">
             <a:spAutoFit/>
           </a:bodyPr>
           <a:lstStyle/>
@@ -13128,6 +14161,7 @@
           <a:lstStyle/>
           <a:p>
             <a:pPr algn="ctr"/>
+            <a:endParaRPr/>
           </a:p>
         </p:txBody>
       </p:sp>
@@ -13148,7 +14182,7 @@
           <a:noFill/>
         </p:spPr>
         <p:txBody>
-          <a:bodyPr wrap="square" lIns="0" rIns="0" tIns="0" bIns="0">
+          <a:bodyPr wrap="square" lIns="0" tIns="0" rIns="0" bIns="0">
             <a:spAutoFit/>
           </a:bodyPr>
           <a:lstStyle/>
@@ -13183,7 +14217,7 @@
           <a:noFill/>
         </p:spPr>
         <p:txBody>
-          <a:bodyPr wrap="square" lIns="0" rIns="0" tIns="0" bIns="0">
+          <a:bodyPr wrap="square" lIns="0" tIns="0" rIns="0" bIns="0">
             <a:spAutoFit/>
           </a:bodyPr>
           <a:lstStyle/>
@@ -13218,7 +14252,7 @@
           <a:noFill/>
         </p:spPr>
         <p:txBody>
-          <a:bodyPr wrap="square" lIns="0" rIns="0" tIns="0" bIns="0">
+          <a:bodyPr wrap="square" lIns="0" tIns="0" rIns="0" bIns="0">
             <a:spAutoFit/>
           </a:bodyPr>
           <a:lstStyle/>
@@ -13277,6 +14311,7 @@
           <a:lstStyle/>
           <a:p>
             <a:pPr algn="ctr"/>
+            <a:endParaRPr/>
           </a:p>
         </p:txBody>
       </p:sp>
@@ -13297,7 +14332,7 @@
           <a:noFill/>
         </p:spPr>
         <p:txBody>
-          <a:bodyPr wrap="square" lIns="0" rIns="0" tIns="0" bIns="0">
+          <a:bodyPr wrap="square" lIns="0" tIns="0" rIns="0" bIns="0">
             <a:spAutoFit/>
           </a:bodyPr>
           <a:lstStyle/>
@@ -13332,7 +14367,7 @@
           <a:noFill/>
         </p:spPr>
         <p:txBody>
-          <a:bodyPr wrap="square" lIns="0" rIns="0" tIns="0" bIns="0">
+          <a:bodyPr wrap="square" lIns="0" tIns="0" rIns="0" bIns="0">
             <a:spAutoFit/>
           </a:bodyPr>
           <a:lstStyle/>
@@ -13367,7 +14402,7 @@
           <a:noFill/>
         </p:spPr>
         <p:txBody>
-          <a:bodyPr wrap="square" lIns="0" rIns="0" tIns="0" bIns="0">
+          <a:bodyPr wrap="square" lIns="0" tIns="0" rIns="0" bIns="0">
             <a:spAutoFit/>
           </a:bodyPr>
           <a:lstStyle/>
@@ -13426,6 +14461,7 @@
           <a:lstStyle/>
           <a:p>
             <a:pPr algn="ctr"/>
+            <a:endParaRPr/>
           </a:p>
         </p:txBody>
       </p:sp>
@@ -13446,7 +14482,7 @@
           <a:noFill/>
         </p:spPr>
         <p:txBody>
-          <a:bodyPr wrap="square" lIns="0" rIns="0" tIns="0" bIns="0">
+          <a:bodyPr wrap="square" lIns="0" tIns="0" rIns="0" bIns="0">
             <a:spAutoFit/>
           </a:bodyPr>
           <a:lstStyle/>
@@ -13481,7 +14517,7 @@
           <a:noFill/>
         </p:spPr>
         <p:txBody>
-          <a:bodyPr wrap="square" lIns="0" rIns="0" tIns="0" bIns="0">
+          <a:bodyPr wrap="square" lIns="0" tIns="0" rIns="0" bIns="0">
             <a:spAutoFit/>
           </a:bodyPr>
           <a:lstStyle/>
@@ -13516,7 +14552,7 @@
           <a:noFill/>
         </p:spPr>
         <p:txBody>
-          <a:bodyPr wrap="square" lIns="0" rIns="0" tIns="0" bIns="0">
+          <a:bodyPr wrap="square" lIns="0" tIns="0" rIns="0" bIns="0">
             <a:spAutoFit/>
           </a:bodyPr>
           <a:lstStyle/>
@@ -13575,6 +14611,7 @@
           <a:lstStyle/>
           <a:p>
             <a:pPr algn="ctr"/>
+            <a:endParaRPr/>
           </a:p>
         </p:txBody>
       </p:sp>
@@ -13595,7 +14632,7 @@
           <a:noFill/>
         </p:spPr>
         <p:txBody>
-          <a:bodyPr wrap="square" lIns="0" rIns="0" tIns="0" bIns="0">
+          <a:bodyPr wrap="square" lIns="0" tIns="0" rIns="0" bIns="0">
             <a:spAutoFit/>
           </a:bodyPr>
           <a:lstStyle/>
@@ -13630,7 +14667,7 @@
           <a:noFill/>
         </p:spPr>
         <p:txBody>
-          <a:bodyPr wrap="square" lIns="0" rIns="0" tIns="0" bIns="0">
+          <a:bodyPr wrap="square" lIns="0" tIns="0" rIns="0" bIns="0">
             <a:spAutoFit/>
           </a:bodyPr>
           <a:lstStyle/>
@@ -13665,7 +14702,7 @@
           <a:noFill/>
         </p:spPr>
         <p:txBody>
-          <a:bodyPr wrap="square" lIns="0" rIns="0" tIns="0" bIns="0">
+          <a:bodyPr wrap="square" lIns="0" tIns="0" rIns="0" bIns="0">
             <a:spAutoFit/>
           </a:bodyPr>
           <a:lstStyle/>
@@ -13724,6 +14761,7 @@
           <a:lstStyle/>
           <a:p>
             <a:pPr algn="ctr"/>
+            <a:endParaRPr/>
           </a:p>
         </p:txBody>
       </p:sp>
@@ -13744,7 +14782,7 @@
           <a:noFill/>
         </p:spPr>
         <p:txBody>
-          <a:bodyPr wrap="square" lIns="0" rIns="0" tIns="0" bIns="0">
+          <a:bodyPr wrap="square" lIns="0" tIns="0" rIns="0" bIns="0">
             <a:spAutoFit/>
           </a:bodyPr>
           <a:lstStyle/>
@@ -13779,7 +14817,7 @@
           <a:noFill/>
         </p:spPr>
         <p:txBody>
-          <a:bodyPr wrap="square" lIns="0" rIns="0" tIns="0" bIns="0">
+          <a:bodyPr wrap="square" lIns="0" tIns="0" rIns="0" bIns="0">
             <a:spAutoFit/>
           </a:bodyPr>
           <a:lstStyle/>
@@ -13814,7 +14852,7 @@
           <a:noFill/>
         </p:spPr>
         <p:txBody>
-          <a:bodyPr wrap="square" lIns="0" rIns="0" tIns="0" bIns="0">
+          <a:bodyPr wrap="square" lIns="0" tIns="0" rIns="0" bIns="0">
             <a:spAutoFit/>
           </a:bodyPr>
           <a:lstStyle/>
@@ -13873,6 +14911,7 @@
           <a:lstStyle/>
           <a:p>
             <a:pPr algn="ctr"/>
+            <a:endParaRPr/>
           </a:p>
         </p:txBody>
       </p:sp>
@@ -13916,6 +14955,7 @@
           <a:lstStyle/>
           <a:p>
             <a:pPr algn="ctr"/>
+            <a:endParaRPr/>
           </a:p>
         </p:txBody>
       </p:sp>
@@ -13936,7 +14976,7 @@
           <a:noFill/>
         </p:spPr>
         <p:txBody>
-          <a:bodyPr wrap="square" lIns="0" rIns="0" tIns="0" bIns="0">
+          <a:bodyPr wrap="square" lIns="0" tIns="0" rIns="0" bIns="0">
             <a:spAutoFit/>
           </a:bodyPr>
           <a:lstStyle/>
@@ -13963,7 +15003,7 @@
 </file>
 
 <file path=ppt/slides/slide7.xml><?xml version="1.0" encoding="utf-8"?>
-<p:sld xmlns:a="http://schemas.openxmlformats.org/drawingml/2006/main" xmlns:p="http://schemas.openxmlformats.org/presentationml/2006/main" xmlns:r="http://schemas.openxmlformats.org/officeDocument/2006/relationships">
+<p:sld xmlns:a="http://schemas.openxmlformats.org/drawingml/2006/main" xmlns:r="http://schemas.openxmlformats.org/officeDocument/2006/relationships" xmlns:p="http://schemas.openxmlformats.org/presentationml/2006/main">
   <p:cSld>
     <p:bg>
       <p:bgPr>
@@ -13979,7 +15019,14 @@
         <p:cNvGrpSpPr/>
         <p:nvPr/>
       </p:nvGrpSpPr>
-      <p:grpSpPr/>
+      <p:grpSpPr>
+        <a:xfrm>
+          <a:off x="0" y="0"/>
+          <a:ext cx="0" cy="0"/>
+          <a:chOff x="0" y="0"/>
+          <a:chExt cx="0" cy="0"/>
+        </a:xfrm>
+      </p:grpSpPr>
       <p:sp>
         <p:nvSpPr>
           <p:cNvPr id="2" name="Rectangle 1"/>
@@ -14020,6 +15067,7 @@
           <a:lstStyle/>
           <a:p>
             <a:pPr algn="ctr"/>
+            <a:endParaRPr/>
           </a:p>
         </p:txBody>
       </p:sp>
@@ -14040,7 +15088,7 @@
           <a:noFill/>
         </p:spPr>
         <p:txBody>
-          <a:bodyPr wrap="square" lIns="0" rIns="0" tIns="0" bIns="0">
+          <a:bodyPr wrap="square" lIns="0" tIns="0" rIns="0" bIns="0">
             <a:spAutoFit/>
           </a:bodyPr>
           <a:lstStyle/>
@@ -14098,6 +15146,7 @@
           <a:lstStyle/>
           <a:p>
             <a:pPr algn="ctr"/>
+            <a:endParaRPr/>
           </a:p>
         </p:txBody>
       </p:sp>
@@ -14141,6 +15190,7 @@
           <a:lstStyle/>
           <a:p>
             <a:pPr algn="ctr"/>
+            <a:endParaRPr/>
           </a:p>
         </p:txBody>
       </p:sp>
@@ -14184,6 +15234,7 @@
           <a:lstStyle/>
           <a:p>
             <a:pPr algn="ctr"/>
+            <a:endParaRPr/>
           </a:p>
         </p:txBody>
       </p:sp>
@@ -14204,7 +15255,7 @@
           <a:noFill/>
         </p:spPr>
         <p:txBody>
-          <a:bodyPr wrap="square" lIns="0" rIns="0" tIns="0" bIns="0">
+          <a:bodyPr wrap="square" lIns="0" tIns="0" rIns="0" bIns="0">
             <a:spAutoFit/>
           </a:bodyPr>
           <a:lstStyle/>
@@ -14262,6 +15313,7 @@
           <a:lstStyle/>
           <a:p>
             <a:pPr algn="ctr"/>
+            <a:endParaRPr/>
           </a:p>
         </p:txBody>
       </p:sp>
@@ -14282,7 +15334,7 @@
           <a:noFill/>
         </p:spPr>
         <p:txBody>
-          <a:bodyPr wrap="square" lIns="0" rIns="0" tIns="0" bIns="0">
+          <a:bodyPr wrap="square" lIns="0" tIns="0" rIns="0" bIns="0">
             <a:spAutoFit/>
           </a:bodyPr>
           <a:lstStyle/>
@@ -14317,7 +15369,7 @@
           <a:noFill/>
         </p:spPr>
         <p:txBody>
-          <a:bodyPr wrap="square" lIns="0" rIns="0" tIns="0" bIns="0">
+          <a:bodyPr wrap="square" lIns="0" tIns="0" rIns="0" bIns="0">
             <a:spAutoFit/>
           </a:bodyPr>
           <a:lstStyle/>
@@ -14375,6 +15427,7 @@
           <a:lstStyle/>
           <a:p>
             <a:pPr algn="ctr"/>
+            <a:endParaRPr/>
           </a:p>
         </p:txBody>
       </p:sp>
@@ -14395,7 +15448,7 @@
           <a:noFill/>
         </p:spPr>
         <p:txBody>
-          <a:bodyPr wrap="square" lIns="0" rIns="0" tIns="0" bIns="0">
+          <a:bodyPr wrap="square" lIns="0" tIns="0" rIns="0" bIns="0">
             <a:spAutoFit/>
           </a:bodyPr>
           <a:lstStyle/>
@@ -14430,7 +15483,7 @@
           <a:noFill/>
         </p:spPr>
         <p:txBody>
-          <a:bodyPr wrap="square" lIns="0" rIns="0" tIns="0" bIns="0">
+          <a:bodyPr wrap="square" lIns="0" tIns="0" rIns="0" bIns="0">
             <a:spAutoFit/>
           </a:bodyPr>
           <a:lstStyle/>
@@ -14488,6 +15541,7 @@
           <a:lstStyle/>
           <a:p>
             <a:pPr algn="ctr"/>
+            <a:endParaRPr/>
           </a:p>
         </p:txBody>
       </p:sp>
@@ -14508,7 +15562,7 @@
           <a:noFill/>
         </p:spPr>
         <p:txBody>
-          <a:bodyPr wrap="square" lIns="0" rIns="0" tIns="0" bIns="0">
+          <a:bodyPr wrap="square" lIns="0" tIns="0" rIns="0" bIns="0">
             <a:spAutoFit/>
           </a:bodyPr>
           <a:lstStyle/>
@@ -14543,7 +15597,7 @@
           <a:noFill/>
         </p:spPr>
         <p:txBody>
-          <a:bodyPr wrap="square" lIns="0" rIns="0" tIns="0" bIns="0">
+          <a:bodyPr wrap="square" lIns="0" tIns="0" rIns="0" bIns="0">
             <a:spAutoFit/>
           </a:bodyPr>
           <a:lstStyle/>
@@ -14601,6 +15655,7 @@
           <a:lstStyle/>
           <a:p>
             <a:pPr algn="ctr"/>
+            <a:endParaRPr/>
           </a:p>
         </p:txBody>
       </p:sp>
@@ -14621,7 +15676,7 @@
           <a:noFill/>
         </p:spPr>
         <p:txBody>
-          <a:bodyPr wrap="square" lIns="0" rIns="0" tIns="0" bIns="0">
+          <a:bodyPr wrap="square" lIns="0" tIns="0" rIns="0" bIns="0">
             <a:spAutoFit/>
           </a:bodyPr>
           <a:lstStyle/>
@@ -14656,7 +15711,7 @@
           <a:noFill/>
         </p:spPr>
         <p:txBody>
-          <a:bodyPr wrap="square" lIns="0" rIns="0" tIns="0" bIns="0">
+          <a:bodyPr wrap="square" lIns="0" tIns="0" rIns="0" bIns="0">
             <a:spAutoFit/>
           </a:bodyPr>
           <a:lstStyle/>
@@ -14714,6 +15769,7 @@
           <a:lstStyle/>
           <a:p>
             <a:pPr algn="ctr"/>
+            <a:endParaRPr/>
           </a:p>
         </p:txBody>
       </p:sp>
@@ -14734,7 +15790,7 @@
           <a:noFill/>
         </p:spPr>
         <p:txBody>
-          <a:bodyPr wrap="square" lIns="0" rIns="0" tIns="0" bIns="0">
+          <a:bodyPr wrap="square" lIns="0" tIns="0" rIns="0" bIns="0">
             <a:spAutoFit/>
           </a:bodyPr>
           <a:lstStyle/>
@@ -14769,7 +15825,7 @@
           <a:noFill/>
         </p:spPr>
         <p:txBody>
-          <a:bodyPr wrap="square" lIns="0" rIns="0" tIns="0" bIns="0">
+          <a:bodyPr wrap="square" lIns="0" tIns="0" rIns="0" bIns="0">
             <a:spAutoFit/>
           </a:bodyPr>
           <a:lstStyle/>
@@ -14827,6 +15883,7 @@
           <a:lstStyle/>
           <a:p>
             <a:pPr algn="ctr"/>
+            <a:endParaRPr/>
           </a:p>
         </p:txBody>
       </p:sp>
@@ -14870,6 +15927,7 @@
           <a:lstStyle/>
           <a:p>
             <a:pPr algn="ctr"/>
+            <a:endParaRPr/>
           </a:p>
         </p:txBody>
       </p:sp>
@@ -14890,7 +15948,7 @@
           <a:noFill/>
         </p:spPr>
         <p:txBody>
-          <a:bodyPr wrap="square" lIns="0" rIns="0" tIns="0" bIns="0">
+          <a:bodyPr wrap="square" lIns="0" tIns="0" rIns="0" bIns="0">
             <a:spAutoFit/>
           </a:bodyPr>
           <a:lstStyle/>
@@ -14948,6 +16006,7 @@
           <a:lstStyle/>
           <a:p>
             <a:pPr algn="ctr"/>
+            <a:endParaRPr/>
           </a:p>
         </p:txBody>
       </p:sp>
@@ -14968,7 +16027,7 @@
           <a:noFill/>
         </p:spPr>
         <p:txBody>
-          <a:bodyPr wrap="square" lIns="0" rIns="0" tIns="0" bIns="0">
+          <a:bodyPr wrap="square" lIns="0" tIns="0" rIns="0" bIns="0">
             <a:spAutoFit/>
           </a:bodyPr>
           <a:lstStyle/>
@@ -15003,7 +16062,7 @@
           <a:noFill/>
         </p:spPr>
         <p:txBody>
-          <a:bodyPr wrap="square" lIns="0" rIns="0" tIns="0" bIns="0">
+          <a:bodyPr wrap="square" lIns="0" tIns="0" rIns="0" bIns="0">
             <a:spAutoFit/>
           </a:bodyPr>
           <a:lstStyle/>
@@ -15061,6 +16120,7 @@
           <a:lstStyle/>
           <a:p>
             <a:pPr algn="ctr"/>
+            <a:endParaRPr/>
           </a:p>
         </p:txBody>
       </p:sp>
@@ -15081,7 +16141,7 @@
           <a:noFill/>
         </p:spPr>
         <p:txBody>
-          <a:bodyPr wrap="square" lIns="0" rIns="0" tIns="0" bIns="0">
+          <a:bodyPr wrap="square" lIns="0" tIns="0" rIns="0" bIns="0">
             <a:spAutoFit/>
           </a:bodyPr>
           <a:lstStyle/>
@@ -15116,7 +16176,7 @@
           <a:noFill/>
         </p:spPr>
         <p:txBody>
-          <a:bodyPr wrap="square" lIns="0" rIns="0" tIns="0" bIns="0">
+          <a:bodyPr wrap="square" lIns="0" tIns="0" rIns="0" bIns="0">
             <a:spAutoFit/>
           </a:bodyPr>
           <a:lstStyle/>
@@ -15174,6 +16234,7 @@
           <a:lstStyle/>
           <a:p>
             <a:pPr algn="ctr"/>
+            <a:endParaRPr/>
           </a:p>
         </p:txBody>
       </p:sp>
@@ -15194,7 +16255,7 @@
           <a:noFill/>
         </p:spPr>
         <p:txBody>
-          <a:bodyPr wrap="square" lIns="0" rIns="0" tIns="0" bIns="0">
+          <a:bodyPr wrap="square" lIns="0" tIns="0" rIns="0" bIns="0">
             <a:spAutoFit/>
           </a:bodyPr>
           <a:lstStyle/>
@@ -15229,7 +16290,7 @@
           <a:noFill/>
         </p:spPr>
         <p:txBody>
-          <a:bodyPr wrap="square" lIns="0" rIns="0" tIns="0" bIns="0">
+          <a:bodyPr wrap="square" lIns="0" tIns="0" rIns="0" bIns="0">
             <a:spAutoFit/>
           </a:bodyPr>
           <a:lstStyle/>
@@ -15287,6 +16348,7 @@
           <a:lstStyle/>
           <a:p>
             <a:pPr algn="ctr"/>
+            <a:endParaRPr/>
           </a:p>
         </p:txBody>
       </p:sp>
@@ -15307,7 +16369,7 @@
           <a:noFill/>
         </p:spPr>
         <p:txBody>
-          <a:bodyPr wrap="square" lIns="0" rIns="0" tIns="0" bIns="0">
+          <a:bodyPr wrap="square" lIns="0" tIns="0" rIns="0" bIns="0">
             <a:spAutoFit/>
           </a:bodyPr>
           <a:lstStyle/>
@@ -15342,7 +16404,7 @@
           <a:noFill/>
         </p:spPr>
         <p:txBody>
-          <a:bodyPr wrap="square" lIns="0" rIns="0" tIns="0" bIns="0">
+          <a:bodyPr wrap="square" lIns="0" tIns="0" rIns="0" bIns="0">
             <a:spAutoFit/>
           </a:bodyPr>
           <a:lstStyle/>
@@ -15400,6 +16462,7 @@
           <a:lstStyle/>
           <a:p>
             <a:pPr algn="ctr"/>
+            <a:endParaRPr/>
           </a:p>
         </p:txBody>
       </p:sp>
@@ -15420,7 +16483,7 @@
           <a:noFill/>
         </p:spPr>
         <p:txBody>
-          <a:bodyPr wrap="square" lIns="0" rIns="0" tIns="0" bIns="0">
+          <a:bodyPr wrap="square" lIns="0" tIns="0" rIns="0" bIns="0">
             <a:spAutoFit/>
           </a:bodyPr>
           <a:lstStyle/>
@@ -15455,7 +16518,7 @@
           <a:noFill/>
         </p:spPr>
         <p:txBody>
-          <a:bodyPr wrap="square" lIns="0" rIns="0" tIns="0" bIns="0">
+          <a:bodyPr wrap="square" lIns="0" tIns="0" rIns="0" bIns="0">
             <a:spAutoFit/>
           </a:bodyPr>
           <a:lstStyle/>
@@ -15482,7 +16545,7 @@
 </file>
 
 <file path=ppt/slides/slide8.xml><?xml version="1.0" encoding="utf-8"?>
-<p:sld xmlns:a="http://schemas.openxmlformats.org/drawingml/2006/main" xmlns:p="http://schemas.openxmlformats.org/presentationml/2006/main" xmlns:r="http://schemas.openxmlformats.org/officeDocument/2006/relationships">
+<p:sld xmlns:a="http://schemas.openxmlformats.org/drawingml/2006/main" xmlns:r="http://schemas.openxmlformats.org/officeDocument/2006/relationships" xmlns:p="http://schemas.openxmlformats.org/presentationml/2006/main">
   <p:cSld>
     <p:bg>
       <p:bgPr>
@@ -15498,7 +16561,14 @@
         <p:cNvGrpSpPr/>
         <p:nvPr/>
       </p:nvGrpSpPr>
-      <p:grpSpPr/>
+      <p:grpSpPr>
+        <a:xfrm>
+          <a:off x="0" y="0"/>
+          <a:ext cx="0" cy="0"/>
+          <a:chOff x="0" y="0"/>
+          <a:chExt cx="0" cy="0"/>
+        </a:xfrm>
+      </p:grpSpPr>
       <p:sp>
         <p:nvSpPr>
           <p:cNvPr id="2" name="Rectangle 1"/>
@@ -15539,6 +16609,7 @@
           <a:lstStyle/>
           <a:p>
             <a:pPr algn="ctr"/>
+            <a:endParaRPr/>
           </a:p>
         </p:txBody>
       </p:sp>
@@ -15559,7 +16630,7 @@
           <a:noFill/>
         </p:spPr>
         <p:txBody>
-          <a:bodyPr wrap="square" lIns="0" rIns="0" tIns="0" bIns="0">
+          <a:bodyPr wrap="square" lIns="0" tIns="0" rIns="0" bIns="0">
             <a:spAutoFit/>
           </a:bodyPr>
           <a:lstStyle/>
@@ -15617,6 +16688,7 @@
           <a:lstStyle/>
           <a:p>
             <a:pPr algn="ctr"/>
+            <a:endParaRPr/>
           </a:p>
         </p:txBody>
       </p:sp>
@@ -15660,6 +16732,7 @@
           <a:lstStyle/>
           <a:p>
             <a:pPr algn="ctr"/>
+            <a:endParaRPr/>
           </a:p>
         </p:txBody>
       </p:sp>
@@ -15703,6 +16776,7 @@
           <a:lstStyle/>
           <a:p>
             <a:pPr algn="ctr"/>
+            <a:endParaRPr/>
           </a:p>
         </p:txBody>
       </p:sp>
@@ -15746,6 +16820,7 @@
           <a:lstStyle/>
           <a:p>
             <a:pPr algn="ctr"/>
+            <a:endParaRPr/>
           </a:p>
         </p:txBody>
       </p:sp>
@@ -15766,7 +16841,7 @@
           <a:noFill/>
         </p:spPr>
         <p:txBody>
-          <a:bodyPr wrap="square" lIns="0" rIns="0" tIns="0" bIns="0">
+          <a:bodyPr wrap="square" lIns="0" tIns="0" rIns="0" bIns="0">
             <a:spAutoFit/>
           </a:bodyPr>
           <a:lstStyle/>
@@ -15801,7 +16876,7 @@
           <a:noFill/>
         </p:spPr>
         <p:txBody>
-          <a:bodyPr wrap="square" lIns="0" rIns="0" tIns="0" bIns="0">
+          <a:bodyPr wrap="square" lIns="0" tIns="0" rIns="0" bIns="0">
             <a:spAutoFit/>
           </a:bodyPr>
           <a:lstStyle/>
@@ -15836,7 +16911,7 @@
           <a:noFill/>
         </p:spPr>
         <p:txBody>
-          <a:bodyPr wrap="square" lIns="0" rIns="0" tIns="0" bIns="0">
+          <a:bodyPr wrap="square" lIns="0" tIns="0" rIns="0" bIns="0">
             <a:spAutoFit/>
           </a:bodyPr>
           <a:lstStyle/>
@@ -15894,6 +16969,7 @@
           <a:lstStyle/>
           <a:p>
             <a:pPr algn="ctr"/>
+            <a:endParaRPr/>
           </a:p>
         </p:txBody>
       </p:sp>
@@ -15937,6 +17013,7 @@
           <a:lstStyle/>
           <a:p>
             <a:pPr algn="ctr"/>
+            <a:endParaRPr/>
           </a:p>
         </p:txBody>
       </p:sp>
@@ -15957,7 +17034,7 @@
           <a:noFill/>
         </p:spPr>
         <p:txBody>
-          <a:bodyPr wrap="square" lIns="0" rIns="0" tIns="0" bIns="0">
+          <a:bodyPr wrap="square" lIns="0" tIns="0" rIns="0" bIns="0">
             <a:spAutoFit/>
           </a:bodyPr>
           <a:lstStyle/>
@@ -15992,7 +17069,7 @@
           <a:noFill/>
         </p:spPr>
         <p:txBody>
-          <a:bodyPr wrap="square" lIns="0" rIns="0" tIns="0" bIns="0">
+          <a:bodyPr wrap="square" lIns="0" tIns="0" rIns="0" bIns="0">
             <a:spAutoFit/>
           </a:bodyPr>
           <a:lstStyle/>
@@ -16028,7 +17105,7 @@
           <a:noFill/>
         </p:spPr>
         <p:txBody>
-          <a:bodyPr wrap="square" lIns="0" rIns="0" tIns="0" bIns="0">
+          <a:bodyPr wrap="square" lIns="0" tIns="0" rIns="0" bIns="0">
             <a:spAutoFit/>
           </a:bodyPr>
           <a:lstStyle/>
@@ -16087,6 +17164,7 @@
           <a:lstStyle/>
           <a:p>
             <a:pPr algn="ctr"/>
+            <a:endParaRPr/>
           </a:p>
         </p:txBody>
       </p:sp>
@@ -16130,6 +17208,7 @@
           <a:lstStyle/>
           <a:p>
             <a:pPr algn="ctr"/>
+            <a:endParaRPr/>
           </a:p>
         </p:txBody>
       </p:sp>
@@ -16150,7 +17229,7 @@
           <a:noFill/>
         </p:spPr>
         <p:txBody>
-          <a:bodyPr wrap="square" lIns="0" rIns="0" tIns="0" bIns="0">
+          <a:bodyPr wrap="square" lIns="0" tIns="0" rIns="0" bIns="0">
             <a:spAutoFit/>
           </a:bodyPr>
           <a:lstStyle/>
@@ -16185,7 +17264,7 @@
           <a:noFill/>
         </p:spPr>
         <p:txBody>
-          <a:bodyPr wrap="square" lIns="0" rIns="0" tIns="0" bIns="0">
+          <a:bodyPr wrap="square" lIns="0" tIns="0" rIns="0" bIns="0">
             <a:spAutoFit/>
           </a:bodyPr>
           <a:lstStyle/>
@@ -16221,7 +17300,7 @@
           <a:noFill/>
         </p:spPr>
         <p:txBody>
-          <a:bodyPr wrap="square" lIns="0" rIns="0" tIns="0" bIns="0">
+          <a:bodyPr wrap="square" lIns="0" tIns="0" rIns="0" bIns="0">
             <a:spAutoFit/>
           </a:bodyPr>
           <a:lstStyle/>
@@ -16280,6 +17359,7 @@
           <a:lstStyle/>
           <a:p>
             <a:pPr algn="ctr"/>
+            <a:endParaRPr/>
           </a:p>
         </p:txBody>
       </p:sp>
@@ -16323,6 +17403,7 @@
           <a:lstStyle/>
           <a:p>
             <a:pPr algn="ctr"/>
+            <a:endParaRPr/>
           </a:p>
         </p:txBody>
       </p:sp>
@@ -16343,7 +17424,7 @@
           <a:noFill/>
         </p:spPr>
         <p:txBody>
-          <a:bodyPr wrap="square" lIns="0" rIns="0" tIns="0" bIns="0">
+          <a:bodyPr wrap="square" lIns="0" tIns="0" rIns="0" bIns="0">
             <a:spAutoFit/>
           </a:bodyPr>
           <a:lstStyle/>
@@ -16378,7 +17459,7 @@
           <a:noFill/>
         </p:spPr>
         <p:txBody>
-          <a:bodyPr wrap="square" lIns="0" rIns="0" tIns="0" bIns="0">
+          <a:bodyPr wrap="square" lIns="0" tIns="0" rIns="0" bIns="0">
             <a:spAutoFit/>
           </a:bodyPr>
           <a:lstStyle/>
@@ -16414,7 +17495,7 @@
           <a:noFill/>
         </p:spPr>
         <p:txBody>
-          <a:bodyPr wrap="square" lIns="0" rIns="0" tIns="0" bIns="0">
+          <a:bodyPr wrap="square" lIns="0" tIns="0" rIns="0" bIns="0">
             <a:spAutoFit/>
           </a:bodyPr>
           <a:lstStyle/>
@@ -16473,6 +17554,7 @@
           <a:lstStyle/>
           <a:p>
             <a:pPr algn="ctr"/>
+            <a:endParaRPr/>
           </a:p>
         </p:txBody>
       </p:sp>
@@ -16516,6 +17598,7 @@
           <a:lstStyle/>
           <a:p>
             <a:pPr algn="ctr"/>
+            <a:endParaRPr/>
           </a:p>
         </p:txBody>
       </p:sp>
@@ -16536,7 +17619,7 @@
           <a:noFill/>
         </p:spPr>
         <p:txBody>
-          <a:bodyPr wrap="square" lIns="0" rIns="0" tIns="0" bIns="0">
+          <a:bodyPr wrap="square" lIns="0" tIns="0" rIns="0" bIns="0">
             <a:spAutoFit/>
           </a:bodyPr>
           <a:lstStyle/>
@@ -16571,7 +17654,7 @@
           <a:noFill/>
         </p:spPr>
         <p:txBody>
-          <a:bodyPr wrap="square" lIns="0" rIns="0" tIns="0" bIns="0">
+          <a:bodyPr wrap="square" lIns="0" tIns="0" rIns="0" bIns="0">
             <a:spAutoFit/>
           </a:bodyPr>
           <a:lstStyle/>
@@ -16607,7 +17690,7 @@
           <a:noFill/>
         </p:spPr>
         <p:txBody>
-          <a:bodyPr wrap="square" lIns="0" rIns="0" tIns="0" bIns="0">
+          <a:bodyPr wrap="square" lIns="0" tIns="0" rIns="0" bIns="0">
             <a:spAutoFit/>
           </a:bodyPr>
           <a:lstStyle/>
@@ -16666,6 +17749,7 @@
           <a:lstStyle/>
           <a:p>
             <a:pPr algn="ctr"/>
+            <a:endParaRPr/>
           </a:p>
         </p:txBody>
       </p:sp>
@@ -16709,6 +17793,7 @@
           <a:lstStyle/>
           <a:p>
             <a:pPr algn="ctr"/>
+            <a:endParaRPr/>
           </a:p>
         </p:txBody>
       </p:sp>
@@ -16729,7 +17814,7 @@
           <a:noFill/>
         </p:spPr>
         <p:txBody>
-          <a:bodyPr wrap="square" lIns="0" rIns="0" tIns="0" bIns="0">
+          <a:bodyPr wrap="square" lIns="0" tIns="0" rIns="0" bIns="0">
             <a:spAutoFit/>
           </a:bodyPr>
           <a:lstStyle/>
@@ -16764,7 +17849,7 @@
           <a:noFill/>
         </p:spPr>
         <p:txBody>
-          <a:bodyPr wrap="square" lIns="0" rIns="0" tIns="0" bIns="0">
+          <a:bodyPr wrap="square" lIns="0" tIns="0" rIns="0" bIns="0">
             <a:spAutoFit/>
           </a:bodyPr>
           <a:lstStyle/>
@@ -16800,7 +17885,7 @@
           <a:noFill/>
         </p:spPr>
         <p:txBody>
-          <a:bodyPr wrap="square" lIns="0" rIns="0" tIns="0" bIns="0">
+          <a:bodyPr wrap="square" lIns="0" tIns="0" rIns="0" bIns="0">
             <a:spAutoFit/>
           </a:bodyPr>
           <a:lstStyle/>
@@ -16859,6 +17944,7 @@
           <a:lstStyle/>
           <a:p>
             <a:pPr algn="ctr"/>
+            <a:endParaRPr/>
           </a:p>
         </p:txBody>
       </p:sp>
@@ -16902,6 +17988,7 @@
           <a:lstStyle/>
           <a:p>
             <a:pPr algn="ctr"/>
+            <a:endParaRPr/>
           </a:p>
         </p:txBody>
       </p:sp>
@@ -16922,7 +18009,7 @@
           <a:noFill/>
         </p:spPr>
         <p:txBody>
-          <a:bodyPr wrap="square" lIns="0" rIns="0" tIns="0" bIns="0">
+          <a:bodyPr wrap="square" lIns="0" tIns="0" rIns="0" bIns="0">
             <a:spAutoFit/>
           </a:bodyPr>
           <a:lstStyle/>
@@ -16957,7 +18044,7 @@
           <a:noFill/>
         </p:spPr>
         <p:txBody>
-          <a:bodyPr wrap="square" lIns="0" rIns="0" tIns="0" bIns="0">
+          <a:bodyPr wrap="square" lIns="0" tIns="0" rIns="0" bIns="0">
             <a:spAutoFit/>
           </a:bodyPr>
           <a:lstStyle/>
@@ -16993,7 +18080,7 @@
           <a:noFill/>
         </p:spPr>
         <p:txBody>
-          <a:bodyPr wrap="square" lIns="0" rIns="0" tIns="0" bIns="0">
+          <a:bodyPr wrap="square" lIns="0" tIns="0" rIns="0" bIns="0">
             <a:spAutoFit/>
           </a:bodyPr>
           <a:lstStyle/>
@@ -17052,6 +18139,7 @@
           <a:lstStyle/>
           <a:p>
             <a:pPr algn="ctr"/>
+            <a:endParaRPr/>
           </a:p>
         </p:txBody>
       </p:sp>
@@ -17095,6 +18183,7 @@
           <a:lstStyle/>
           <a:p>
             <a:pPr algn="ctr"/>
+            <a:endParaRPr/>
           </a:p>
         </p:txBody>
       </p:sp>
@@ -17115,7 +18204,7 @@
           <a:noFill/>
         </p:spPr>
         <p:txBody>
-          <a:bodyPr wrap="square" lIns="0" rIns="0" tIns="0" bIns="0">
+          <a:bodyPr wrap="square" lIns="0" tIns="0" rIns="0" bIns="0">
             <a:spAutoFit/>
           </a:bodyPr>
           <a:lstStyle/>
@@ -17150,7 +18239,7 @@
           <a:noFill/>
         </p:spPr>
         <p:txBody>
-          <a:bodyPr wrap="square" lIns="0" rIns="0" tIns="0" bIns="0">
+          <a:bodyPr wrap="square" lIns="0" tIns="0" rIns="0" bIns="0">
             <a:spAutoFit/>
           </a:bodyPr>
           <a:lstStyle/>
@@ -17185,7 +18274,7 @@
           <a:noFill/>
         </p:spPr>
         <p:txBody>
-          <a:bodyPr wrap="square" lIns="0" rIns="0" tIns="0" bIns="0">
+          <a:bodyPr wrap="square" lIns="0" tIns="0" rIns="0" bIns="0">
             <a:spAutoFit/>
           </a:bodyPr>
           <a:lstStyle/>
@@ -17244,6 +18333,7 @@
           <a:lstStyle/>
           <a:p>
             <a:pPr algn="ctr"/>
+            <a:endParaRPr/>
           </a:p>
         </p:txBody>
       </p:sp>
@@ -17287,6 +18377,7 @@
           <a:lstStyle/>
           <a:p>
             <a:pPr algn="ctr"/>
+            <a:endParaRPr/>
           </a:p>
         </p:txBody>
       </p:sp>
@@ -17307,7 +18398,7 @@
           <a:noFill/>
         </p:spPr>
         <p:txBody>
-          <a:bodyPr wrap="square" lIns="0" rIns="0" tIns="0" bIns="0">
+          <a:bodyPr wrap="square" lIns="0" tIns="0" rIns="0" bIns="0">
             <a:spAutoFit/>
           </a:bodyPr>
           <a:lstStyle/>
@@ -17334,52 +18425,65 @@
 </file>
 
 <file path=ppt/slides/slide9.xml><?xml version="1.0" encoding="utf-8"?>
-<p:sld xmlns:a="http://schemas.openxmlformats.org/drawingml/2006/main" xmlns:p="http://schemas.openxmlformats.org/presentationml/2006/main" xmlns:r="http://schemas.openxmlformats.org/officeDocument/2006/relationships">
+<p:sld xmlns:a="http://schemas.openxmlformats.org/drawingml/2006/main" xmlns:r="http://schemas.openxmlformats.org/officeDocument/2006/relationships" xmlns:p="http://schemas.openxmlformats.org/presentationml/2006/main">
   <p:cSld>
-    <p:bg>
-      <p:bgPr>
-        <a:solidFill>
-          <a:srgbClr val="14263D"/>
-        </a:solidFill>
-        <a:effectLst/>
-      </p:bgPr>
-    </p:bg>
     <p:spTree>
       <p:nvGrpSpPr>
         <p:cNvPr id="1" name=""/>
         <p:cNvGrpSpPr/>
         <p:nvPr/>
       </p:nvGrpSpPr>
-      <p:grpSpPr/>
-      <p:sp>
-        <p:nvSpPr>
-          <p:cNvPr id="2" name="Rectangle 1"/>
-          <p:cNvSpPr/>
-          <p:nvPr/>
-        </p:nvSpPr>
-        <p:spPr>
-          <a:xfrm>
-            <a:off x="0" y="0"/>
-            <a:ext cx="256032" cy="6858000"/>
+      <p:grpSpPr>
+        <a:xfrm>
+          <a:off x="0" y="0"/>
+          <a:ext cx="0" cy="0"/>
+          <a:chOff x="0" y="0"/>
+          <a:chExt cx="0" cy="0"/>
+        </a:xfrm>
+      </p:grpSpPr>
+      <p:sp>
+        <p:nvSpPr>
+          <p:cNvPr id="6" name="Add-in_Banner">
+            <a:extLst>
+              <a:ext uri="{FF2B5EF4-FFF2-40B4-BE49-F238E27FC236}">
+                <a16:creationId xmlns:a16="http://schemas.microsoft.com/office/drawing/2014/main" id="{3469E413-BCF5-4E2F-BE4B-EB617C589FA5}"/>
+              </a:ext>
+            </a:extLst>
+          </p:cNvPr>
+          <p:cNvSpPr txBox="1">
+            <a:spLocks noGrp="1"/>
+          </p:cNvSpPr>
+          <p:nvPr>
+            <p:ph type="title"/>
+          </p:nvPr>
+        </p:nvSpPr>
+        <p:spPr>
+          <a:xfrm>
+            <a:off x="-1" y="352197"/>
+            <a:ext cx="12188825" cy="640348"/>
           </a:xfrm>
           <a:prstGeom prst="rect">
             <a:avLst/>
           </a:prstGeom>
           <a:solidFill>
-            <a:srgbClr val="E8A020"/>
+            <a:srgbClr val="494748">
+              <a:alpha val="4706"/>
+            </a:srgbClr>
           </a:solidFill>
           <a:ln>
             <a:noFill/>
           </a:ln>
         </p:spPr>
         <p:style>
-          <a:lnRef idx="1">
-            <a:schemeClr val="accent1"/>
+          <a:lnRef idx="2">
+            <a:schemeClr val="accent1">
+              <a:shade val="50000"/>
+            </a:schemeClr>
           </a:lnRef>
-          <a:fillRef idx="3">
+          <a:fillRef idx="1">
             <a:schemeClr val="accent1"/>
           </a:fillRef>
-          <a:effectRef idx="2">
+          <a:effectRef idx="0">
             <a:schemeClr val="accent1"/>
           </a:effectRef>
           <a:fontRef idx="minor">
@@ -17387,563 +18491,117 @@
           </a:fontRef>
         </p:style>
         <p:txBody>
-          <a:bodyPr rtlCol="0" anchor="ctr"/>
-          <a:lstStyle/>
-          <a:p>
-            <a:pPr algn="ctr"/>
-          </a:p>
-        </p:txBody>
-      </p:sp>
-      <p:sp>
-        <p:nvSpPr>
-          <p:cNvPr id="3" name="Oval 2"/>
-          <p:cNvSpPr/>
-          <p:nvPr/>
-        </p:nvSpPr>
-        <p:spPr>
-          <a:xfrm>
-            <a:off x="8229600" y="-731520"/>
-            <a:ext cx="4572000" cy="4572000"/>
-          </a:xfrm>
-          <a:prstGeom prst="ellipse">
-            <a:avLst/>
-          </a:prstGeom>
-          <a:solidFill>
-            <a:srgbClr val="2D4A6E"/>
-          </a:solidFill>
-          <a:ln>
-            <a:noFill/>
-          </a:ln>
-        </p:spPr>
-        <p:style>
-          <a:lnRef idx="1">
-            <a:schemeClr val="accent1"/>
-          </a:lnRef>
-          <a:fillRef idx="3">
-            <a:schemeClr val="accent1"/>
-          </a:fillRef>
-          <a:effectRef idx="2">
-            <a:schemeClr val="accent1"/>
-          </a:effectRef>
-          <a:fontRef idx="minor">
-            <a:schemeClr val="lt1"/>
-          </a:fontRef>
-        </p:style>
-        <p:txBody>
-          <a:bodyPr rtlCol="0" anchor="ctr"/>
-          <a:lstStyle/>
-          <a:p>
-            <a:pPr algn="ctr"/>
-          </a:p>
-        </p:txBody>
-      </p:sp>
-      <p:sp>
-        <p:nvSpPr>
-          <p:cNvPr id="4" name="TextBox 3"/>
-          <p:cNvSpPr txBox="1"/>
-          <p:nvPr/>
-        </p:nvSpPr>
-        <p:spPr>
-          <a:xfrm>
-            <a:off x="502920" y="1097280"/>
-            <a:ext cx="9144000" cy="731520"/>
-          </a:xfrm>
-          <a:prstGeom prst="rect">
-            <a:avLst/>
-          </a:prstGeom>
-          <a:noFill/>
-        </p:spPr>
-        <p:txBody>
-          <a:bodyPr wrap="square" lIns="0" rIns="0" tIns="0" bIns="0">
-            <a:spAutoFit/>
-          </a:bodyPr>
-          <a:lstStyle/>
-          <a:p>
-            <a:pPr algn="l"/>
-            <a:r>
-              <a:rPr sz="3800" b="1" i="0">
-                <a:solidFill>
-                  <a:srgbClr val="FFFFFF"/>
-                </a:solidFill>
-                <a:latin typeface="Calibri"/>
-              </a:rPr>
-              <a:t>Let's connect</a:t>
-            </a:r>
-          </a:p>
-        </p:txBody>
-      </p:sp>
-      <p:sp>
-        <p:nvSpPr>
-          <p:cNvPr id="5" name="TextBox 4"/>
-          <p:cNvSpPr txBox="1"/>
-          <p:nvPr/>
-        </p:nvSpPr>
-        <p:spPr>
-          <a:xfrm>
-            <a:off x="502920" y="1965960"/>
-            <a:ext cx="8686800" cy="640080"/>
-          </a:xfrm>
-          <a:prstGeom prst="rect">
-            <a:avLst/>
-          </a:prstGeom>
-          <a:noFill/>
-        </p:spPr>
-        <p:txBody>
-          <a:bodyPr wrap="square" lIns="0" rIns="0" tIns="0" bIns="0">
-            <a:spAutoFit/>
-          </a:bodyPr>
-          <a:lstStyle/>
-          <a:p>
-            <a:pPr algn="l"/>
-            <a:r>
-              <a:rPr sz="1400" b="0" i="0">
-                <a:solidFill>
-                  <a:srgbClr val="A0B4CC"/>
-                </a:solidFill>
-                <a:latin typeface="Calibri"/>
-              </a:rPr>
-              <a:t>I built this pipeline specifically to demonstrate readiness for the BIS Banking Department analytics role.</a:t>
-            </a:r>
-          </a:p>
-        </p:txBody>
-      </p:sp>
-      <p:sp>
-        <p:nvSpPr>
-          <p:cNvPr id="6" name="Rectangle 5"/>
-          <p:cNvSpPr/>
-          <p:nvPr/>
-        </p:nvSpPr>
-        <p:spPr>
-          <a:xfrm>
-            <a:off x="502920" y="2761488"/>
-            <a:ext cx="5486400" cy="18288"/>
-          </a:xfrm>
-          <a:prstGeom prst="rect">
-            <a:avLst/>
-          </a:prstGeom>
-          <a:solidFill>
-            <a:srgbClr val="2D4A6E"/>
-          </a:solidFill>
-          <a:ln>
-            <a:noFill/>
-          </a:ln>
-        </p:spPr>
-        <p:style>
-          <a:lnRef idx="1">
-            <a:schemeClr val="accent1"/>
-          </a:lnRef>
-          <a:fillRef idx="3">
-            <a:schemeClr val="accent1"/>
-          </a:fillRef>
-          <a:effectRef idx="2">
-            <a:schemeClr val="accent1"/>
-          </a:effectRef>
-          <a:fontRef idx="minor">
-            <a:schemeClr val="lt1"/>
-          </a:fontRef>
-        </p:style>
-        <p:txBody>
-          <a:bodyPr rtlCol="0" anchor="ctr"/>
-          <a:lstStyle/>
-          <a:p>
-            <a:pPr algn="ctr"/>
-          </a:p>
-        </p:txBody>
-      </p:sp>
-      <p:sp>
-        <p:nvSpPr>
-          <p:cNvPr id="7" name="TextBox 6"/>
-          <p:cNvSpPr txBox="1"/>
-          <p:nvPr/>
-        </p:nvSpPr>
-        <p:spPr>
-          <a:xfrm>
-            <a:off x="502920" y="2907792"/>
-            <a:ext cx="1371600" cy="402336"/>
-          </a:xfrm>
-          <a:prstGeom prst="rect">
-            <a:avLst/>
-          </a:prstGeom>
-          <a:noFill/>
-        </p:spPr>
-        <p:txBody>
-          <a:bodyPr wrap="square" lIns="0" rIns="0" tIns="0" bIns="0">
-            <a:spAutoFit/>
-          </a:bodyPr>
-          <a:lstStyle/>
-          <a:p>
-            <a:pPr algn="l"/>
-            <a:r>
-              <a:rPr sz="1200" b="1" i="0">
-                <a:solidFill>
-                  <a:srgbClr val="E8A020"/>
-                </a:solidFill>
-                <a:latin typeface="Calibri"/>
-              </a:rPr>
-              <a:t>Email:</a:t>
-            </a:r>
-          </a:p>
-        </p:txBody>
-      </p:sp>
-      <p:sp>
-        <p:nvSpPr>
-          <p:cNvPr id="8" name="TextBox 7"/>
-          <p:cNvSpPr txBox="1"/>
-          <p:nvPr/>
-        </p:nvSpPr>
-        <p:spPr>
-          <a:xfrm>
-            <a:off x="1920240" y="2907792"/>
-            <a:ext cx="8686800" cy="402336"/>
-          </a:xfrm>
-          <a:prstGeom prst="rect">
-            <a:avLst/>
-          </a:prstGeom>
-          <a:noFill/>
-        </p:spPr>
-        <p:txBody>
-          <a:bodyPr wrap="square" lIns="0" rIns="0" tIns="0" bIns="0">
-            <a:spAutoFit/>
-          </a:bodyPr>
-          <a:lstStyle/>
-          <a:p>
-            <a:pPr algn="l"/>
-            <a:r>
-              <a:rPr sz="1200" b="0" i="0">
-                <a:solidFill>
-                  <a:srgbClr val="FFFFFF"/>
-                </a:solidFill>
-                <a:latin typeface="Calibri"/>
-              </a:rPr>
-              <a:t>sosa_ny@hotmail.com</a:t>
-            </a:r>
-          </a:p>
-        </p:txBody>
-      </p:sp>
-      <p:sp>
-        <p:nvSpPr>
-          <p:cNvPr id="9" name="TextBox 8"/>
-          <p:cNvSpPr txBox="1"/>
-          <p:nvPr/>
-        </p:nvSpPr>
-        <p:spPr>
-          <a:xfrm>
-            <a:off x="502920" y="3474720"/>
-            <a:ext cx="1371600" cy="402336"/>
-          </a:xfrm>
-          <a:prstGeom prst="rect">
-            <a:avLst/>
-          </a:prstGeom>
-          <a:noFill/>
-        </p:spPr>
-        <p:txBody>
-          <a:bodyPr wrap="square" lIns="0" rIns="0" tIns="0" bIns="0">
-            <a:spAutoFit/>
-          </a:bodyPr>
-          <a:lstStyle/>
-          <a:p>
-            <a:pPr algn="l"/>
-            <a:r>
-              <a:rPr sz="1200" b="1" i="0">
-                <a:solidFill>
-                  <a:srgbClr val="E8A020"/>
-                </a:solidFill>
-                <a:latin typeface="Calibri"/>
-              </a:rPr>
-              <a:t>Role:</a:t>
-            </a:r>
-          </a:p>
-        </p:txBody>
-      </p:sp>
-      <p:sp>
-        <p:nvSpPr>
-          <p:cNvPr id="10" name="TextBox 9"/>
-          <p:cNvSpPr txBox="1"/>
-          <p:nvPr/>
-        </p:nvSpPr>
-        <p:spPr>
-          <a:xfrm>
-            <a:off x="1920240" y="3474720"/>
-            <a:ext cx="8686800" cy="402336"/>
-          </a:xfrm>
-          <a:prstGeom prst="rect">
-            <a:avLst/>
-          </a:prstGeom>
-          <a:noFill/>
-        </p:spPr>
-        <p:txBody>
-          <a:bodyPr wrap="square" lIns="0" rIns="0" tIns="0" bIns="0">
-            <a:spAutoFit/>
-          </a:bodyPr>
-          <a:lstStyle/>
-          <a:p>
-            <a:pPr algn="l"/>
-            <a:r>
-              <a:rPr sz="1200" b="0" i="0">
-                <a:solidFill>
-                  <a:srgbClr val="FFFFFF"/>
-                </a:solidFill>
-                <a:latin typeface="Calibri"/>
-              </a:rPr>
-              <a:t>Senior Business Data Analyst — BIS Banking Department</a:t>
-            </a:r>
-          </a:p>
-        </p:txBody>
-      </p:sp>
-      <p:sp>
-        <p:nvSpPr>
-          <p:cNvPr id="11" name="TextBox 10"/>
-          <p:cNvSpPr txBox="1"/>
-          <p:nvPr/>
-        </p:nvSpPr>
-        <p:spPr>
-          <a:xfrm>
-            <a:off x="502920" y="4041648"/>
-            <a:ext cx="1371600" cy="402336"/>
-          </a:xfrm>
-          <a:prstGeom prst="rect">
-            <a:avLst/>
-          </a:prstGeom>
-          <a:noFill/>
-        </p:spPr>
-        <p:txBody>
-          <a:bodyPr wrap="square" lIns="0" rIns="0" tIns="0" bIns="0">
-            <a:spAutoFit/>
-          </a:bodyPr>
-          <a:lstStyle/>
-          <a:p>
-            <a:pPr algn="l"/>
-            <a:r>
-              <a:rPr sz="1200" b="1" i="0">
-                <a:solidFill>
-                  <a:srgbClr val="E8A020"/>
-                </a:solidFill>
-                <a:latin typeface="Calibri"/>
-              </a:rPr>
-              <a:t>Stack:</a:t>
-            </a:r>
-          </a:p>
-        </p:txBody>
-      </p:sp>
-      <p:sp>
-        <p:nvSpPr>
-          <p:cNvPr id="12" name="TextBox 11"/>
-          <p:cNvSpPr txBox="1"/>
-          <p:nvPr/>
-        </p:nvSpPr>
-        <p:spPr>
-          <a:xfrm>
-            <a:off x="1920240" y="4041648"/>
-            <a:ext cx="8686800" cy="402336"/>
-          </a:xfrm>
-          <a:prstGeom prst="rect">
-            <a:avLst/>
-          </a:prstGeom>
-          <a:noFill/>
-        </p:spPr>
-        <p:txBody>
-          <a:bodyPr wrap="square" lIns="0" rIns="0" tIns="0" bIns="0">
-            <a:spAutoFit/>
-          </a:bodyPr>
-          <a:lstStyle/>
-          <a:p>
-            <a:pPr algn="l"/>
-            <a:r>
-              <a:rPr sz="1200" b="0" i="0">
-                <a:solidFill>
-                  <a:srgbClr val="FFFFFF"/>
-                </a:solidFill>
-                <a:latin typeface="Calibri"/>
-              </a:rPr>
-              <a:t>MS Fabric  ·  dbt Core  ·  Power BI  ·  T-SQL  ·  Python</a:t>
-            </a:r>
-          </a:p>
-        </p:txBody>
-      </p:sp>
-      <p:sp>
-        <p:nvSpPr>
-          <p:cNvPr id="13" name="TextBox 12"/>
-          <p:cNvSpPr txBox="1"/>
-          <p:nvPr/>
-        </p:nvSpPr>
-        <p:spPr>
-          <a:xfrm>
-            <a:off x="502920" y="4608576"/>
-            <a:ext cx="1371600" cy="402336"/>
-          </a:xfrm>
-          <a:prstGeom prst="rect">
-            <a:avLst/>
-          </a:prstGeom>
-          <a:noFill/>
-        </p:spPr>
-        <p:txBody>
-          <a:bodyPr wrap="square" lIns="0" rIns="0" tIns="0" bIns="0">
-            <a:spAutoFit/>
-          </a:bodyPr>
-          <a:lstStyle/>
-          <a:p>
-            <a:pPr algn="l"/>
-            <a:r>
-              <a:rPr sz="1200" b="1" i="0">
-                <a:solidFill>
-                  <a:srgbClr val="E8A020"/>
-                </a:solidFill>
-                <a:latin typeface="Calibri"/>
-              </a:rPr>
-              <a:t>Project:</a:t>
-            </a:r>
-          </a:p>
-        </p:txBody>
-      </p:sp>
-      <p:sp>
-        <p:nvSpPr>
-          <p:cNvPr id="14" name="TextBox 13"/>
-          <p:cNvSpPr txBox="1"/>
-          <p:nvPr/>
-        </p:nvSpPr>
-        <p:spPr>
-          <a:xfrm>
-            <a:off x="1920240" y="4608576"/>
-            <a:ext cx="8686800" cy="402336"/>
-          </a:xfrm>
-          <a:prstGeom prst="rect">
-            <a:avLst/>
-          </a:prstGeom>
-          <a:noFill/>
-        </p:spPr>
-        <p:txBody>
-          <a:bodyPr wrap="square" lIns="0" rIns="0" tIns="0" bIns="0">
-            <a:spAutoFit/>
-          </a:bodyPr>
-          <a:lstStyle/>
-          <a:p>
-            <a:pPr algn="l"/>
-            <a:r>
-              <a:rPr sz="1200" b="0" i="0">
-                <a:solidFill>
-                  <a:srgbClr val="FFFFFF"/>
-                </a:solidFill>
-                <a:latin typeface="Calibri"/>
-              </a:rPr>
-              <a:t>BIS_Project_2026 — full pipeline available on request</a:t>
-            </a:r>
-          </a:p>
-        </p:txBody>
-      </p:sp>
-      <p:sp>
-        <p:nvSpPr>
-          <p:cNvPr id="15" name="Rectangle 14"/>
-          <p:cNvSpPr/>
-          <p:nvPr/>
-        </p:nvSpPr>
-        <p:spPr>
-          <a:xfrm>
-            <a:off x="502920" y="5349240"/>
-            <a:ext cx="5486400" cy="18288"/>
-          </a:xfrm>
-          <a:prstGeom prst="rect">
-            <a:avLst/>
-          </a:prstGeom>
-          <a:solidFill>
-            <a:srgbClr val="2D4A6E"/>
-          </a:solidFill>
-          <a:ln>
-            <a:noFill/>
-          </a:ln>
-        </p:spPr>
-        <p:style>
-          <a:lnRef idx="1">
-            <a:schemeClr val="accent1"/>
-          </a:lnRef>
-          <a:fillRef idx="3">
-            <a:schemeClr val="accent1"/>
-          </a:fillRef>
-          <a:effectRef idx="2">
-            <a:schemeClr val="accent1"/>
-          </a:effectRef>
-          <a:fontRef idx="minor">
-            <a:schemeClr val="lt1"/>
-          </a:fontRef>
-        </p:style>
-        <p:txBody>
-          <a:bodyPr rtlCol="0" anchor="ctr"/>
-          <a:lstStyle/>
-          <a:p>
-            <a:pPr algn="ctr"/>
-          </a:p>
-        </p:txBody>
-      </p:sp>
-      <p:sp>
-        <p:nvSpPr>
-          <p:cNvPr id="16" name="TextBox 15"/>
-          <p:cNvSpPr txBox="1"/>
-          <p:nvPr/>
-        </p:nvSpPr>
-        <p:spPr>
-          <a:xfrm>
-            <a:off x="502920" y="5532120"/>
-            <a:ext cx="7315200" cy="502920"/>
-          </a:xfrm>
-          <a:prstGeom prst="rect">
-            <a:avLst/>
-          </a:prstGeom>
-          <a:noFill/>
-        </p:spPr>
-        <p:txBody>
-          <a:bodyPr wrap="square" lIns="0" rIns="0" tIns="0" bIns="0">
-            <a:spAutoFit/>
-          </a:bodyPr>
-          <a:lstStyle/>
-          <a:p>
-            <a:pPr algn="l"/>
-            <a:r>
-              <a:rPr sz="2200" b="1" i="0">
-                <a:solidFill>
-                  <a:srgbClr val="E8A020"/>
-                </a:solidFill>
-                <a:latin typeface="Calibri"/>
-              </a:rPr>
-              <a:t>Thank you</a:t>
-            </a:r>
-          </a:p>
-        </p:txBody>
-      </p:sp>
-      <p:sp>
-        <p:nvSpPr>
-          <p:cNvPr id="17" name="TextBox 16"/>
-          <p:cNvSpPr txBox="1"/>
-          <p:nvPr/>
-        </p:nvSpPr>
-        <p:spPr>
-          <a:xfrm>
-            <a:off x="502920" y="6053328"/>
-            <a:ext cx="9144000" cy="411480"/>
-          </a:xfrm>
-          <a:prstGeom prst="rect">
-            <a:avLst/>
-          </a:prstGeom>
-          <a:noFill/>
-        </p:spPr>
-        <p:txBody>
-          <a:bodyPr wrap="square" lIns="0" rIns="0" tIns="0" bIns="0">
-            <a:spAutoFit/>
-          </a:bodyPr>
-          <a:lstStyle/>
-          <a:p>
-            <a:pPr algn="l"/>
-            <a:r>
-              <a:rPr sz="1200" b="0" i="0">
-                <a:solidFill>
-                  <a:srgbClr val="A0B4CC"/>
-                </a:solidFill>
-                <a:latin typeface="Calibri"/>
-              </a:rPr>
-              <a:t>I look forward to contributing to the BIS Banking Department analytics team.</a:t>
-            </a:r>
-          </a:p>
-        </p:txBody>
-      </p:sp>
+          <a:bodyPr rot="0" spcFirstLastPara="0" vert="horz" wrap="square" lIns="1331653" tIns="179953" rIns="215944" bIns="179953" numCol="1" spcCol="0" rtlCol="0" fromWordArt="0" anchor="ctr" anchorCtr="0" forceAA="0" compatLnSpc="1">
+            <a:prstTxWarp prst="textNoShape">
+              <a:avLst/>
+            </a:prstTxWarp>
+            <a:spAutoFit/>
+          </a:bodyPr>
+          <a:lstStyle/>
+          <a:p>
+            <a:pPr algn="l"/>
+            <a:r>
+              <a:rPr lang="en-GB" sz="1799" dirty="0">
+                <a:solidFill>
+                  <a:srgbClr val="000000"/>
+                </a:solidFill>
+                <a:latin typeface="Segoe UI Light" panose="020B0502040204020203" pitchFamily="34" charset="0"/>
+                <a:ea typeface="Calibri" panose="020F0502020204030204" pitchFamily="34" charset="0"/>
+                <a:cs typeface="Segoe UI Light" panose="020B0502040204020203" pitchFamily="34" charset="0"/>
+              </a:rPr>
+              <a:t>Microsoft Power BI</a:t>
+            </a:r>
+            <a:endParaRPr lang="en-IE" sz="1200" dirty="0">
+              <a:latin typeface="Segoe UI Light" panose="020B0502040204020203" pitchFamily="34" charset="0"/>
+              <a:ea typeface="Calibri" panose="020F0502020204030204" pitchFamily="34" charset="0"/>
+              <a:cs typeface="Segoe UI Light" panose="020B0502040204020203" pitchFamily="34" charset="0"/>
+            </a:endParaRPr>
+          </a:p>
+        </p:txBody>
+      </p:sp>
+      <p:pic>
+        <p:nvPicPr>
+          <p:cNvPr id="7" name="Add-in_Icon" descr="Icon for Microsoft Power BI.">
+            <a:extLst>
+              <a:ext uri="{FF2B5EF4-FFF2-40B4-BE49-F238E27FC236}">
+                <a16:creationId xmlns:a16="http://schemas.microsoft.com/office/drawing/2014/main" id="{87D43E1C-7B4D-44A2-8E6D-6786349BFB58}"/>
+              </a:ext>
+            </a:extLst>
+          </p:cNvPr>
+          <p:cNvPicPr/>
+          <p:nvPr/>
+        </p:nvPicPr>
+        <p:blipFill>
+          <a:blip r:embed="rId2"/>
+          <a:stretch>
+            <a:fillRect/>
+          </a:stretch>
+        </p:blipFill>
+        <p:spPr bwMode="auto">
+          <a:xfrm>
+            <a:off x="914162" y="531120"/>
+            <a:ext cx="291389" cy="291389"/>
+          </a:xfrm>
+          <a:prstGeom prst="rect">
+            <a:avLst/>
+          </a:prstGeom>
+          <a:noFill/>
+        </p:spPr>
+      </p:pic>
+      <mc:AlternateContent xmlns:mc="http://schemas.openxmlformats.org/markup-compatibility/2006">
+        <mc:Choice xmlns:we="http://schemas.microsoft.com/office/webextensions/webextension/2010/11" xmlns:pca="http://schemas.microsoft.com/office/powerpoint/2013/contentapp" Requires="we pca">
+          <p:graphicFrame>
+            <p:nvGraphicFramePr>
+              <p:cNvPr id="2" name="Add-in" descr="Add-in content for Microsoft Power BI."/>
+              <p:cNvGraphicFramePr>
+                <a:graphicFrameLocks noGrp="1"/>
+              </p:cNvGraphicFramePr>
+              <p:nvPr/>
+            </p:nvGraphicFramePr>
+            <p:xfrm>
+              <a:off x="720824" y="1171468"/>
+              <a:ext cx="10747177" cy="5334335"/>
+            </p:xfrm>
+            <a:graphic>
+              <a:graphicData uri="http://schemas.microsoft.com/office/webextensions/webextension/2010/11">
+                <we:webextensionref xmlns:we="http://schemas.microsoft.com/office/webextensions/webextension/2010/11" xmlns:r="http://schemas.openxmlformats.org/officeDocument/2006/relationships" r:id="rId3"/>
+              </a:graphicData>
+            </a:graphic>
+          </p:graphicFrame>
+        </mc:Choice>
+        <mc:Fallback>
+          <p:pic>
+            <p:nvPicPr>
+              <p:cNvPr id="2" name="Add-in" descr="Add-in content for Microsoft Power BI."/>
+              <p:cNvPicPr>
+                <a:picLocks noGrp="1" noRot="1" noChangeAspect="1" noMove="1" noResize="1" noEditPoints="1" noAdjustHandles="1" noChangeArrowheads="1" noChangeShapeType="1"/>
+              </p:cNvPicPr>
+              <p:nvPr/>
+            </p:nvPicPr>
+            <p:blipFill>
+              <a:blip r:embed="rId4"/>
+              <a:stretch>
+                <a:fillRect/>
+              </a:stretch>
+            </p:blipFill>
+            <p:spPr>
+              <a:xfrm>
+                <a:off x="720824" y="1171468"/>
+                <a:ext cx="10747177" cy="5334335"/>
+              </a:xfrm>
+              <a:prstGeom prst="rect">
+                <a:avLst/>
+              </a:prstGeom>
+            </p:spPr>
+          </p:pic>
+        </mc:Fallback>
+      </mc:AlternateContent>
     </p:spTree>
+    <p:extLst>
+      <p:ext uri="{BB962C8B-B14F-4D97-AF65-F5344CB8AC3E}">
+        <p14:creationId xmlns:p14="http://schemas.microsoft.com/office/powerpoint/2010/main" val="1554327894"/>
+      </p:ext>
+    </p:extLst>
   </p:cSld>
   <p:clrMapOvr>
     <a:masterClrMapping/>
@@ -18269,4 +18927,91 @@
   </a:objectDefaults>
   <a:extraClrSchemeLst/>
 </a:theme>
+</file>
+
+<file path=ppt/webextensions/webextension1.xml><?xml version="1.0" encoding="utf-8"?>
+<we:webextension xmlns:we="http://schemas.microsoft.com/office/webextensions/webextension/2010/11" id="{cb19b00e-e1cc-4d8b-a990-6240f72314f6}">
+  <we:reference id="WA200003233" version="2.0.0.3" store="en-US" storeType="OMEX"/>
+  <we:alternateReferences/>
+  <we:properties>
+    <we:property name="Microsoft.Office.CampaignId" value="&quot;none&quot;"/>
+    <we:property name="reportUrl" value="&quot;/groups/af757372-574a-4725-b0ef-991838213ca2/reports/1d5493b0-0102-488b-a943-c8943ff1f6fd/0e02becd29a8d1780620?bookmarkGuid=c646a4f7-db74-44df-af28-6c7e6fabfc21&amp;bookmarkUsage=1&amp;ctid=04f991f3-0023-4b95-ab0d-bebbdbc8df14&amp;fromEntryPoint=export&quot;"/>
+    <we:property name="reportState" value="&quot;CONNECTED&quot;"/>
+    <we:property name="artifactViewState" value="&quot;live&quot;"/>
+    <we:property name="reportEmbeddedTime" value="&quot;2026-04-26T21:50:41.024Z&quot;"/>
+    <we:property name="creatorSessionId" value="&quot;ba502e7e-07b5-4739-ac41-ac2a56e2226d&quot;"/>
+    <we:property name="creatorUserId" value="&quot;10032005BA5268A4&quot;"/>
+    <we:property name="creatorTenantId" value="&quot;04f991f3-0023-4b95-ab0d-bebbdbc8df14&quot;"/>
+    <we:property name="pageDisplayName" value="&quot;Portfolio Overview&quot;"/>
+    <we:property name="pageName" value="&quot;0e02becd29a8d1780620&quot;"/>
+    <we:property name="reportName" value="&quot;bis_analytics_report&quot;"/>
+    <we:property name="isVisualContainerHeaderHidden" value="false"/>
+    <we:property name="isFiltersActionButtonVisible" value="true"/>
+    <we:property name="initialStateBookmark" value="&quot;H4sIAAAAAAAAA+1YbU/bMBD+K5O/7Es3OelLUr6VDqSJ8SKYmKYJVWf7UgxpHDkOo0P8952dVKylAiQYm7b2Q2Sfz/fy3HOW3RumdFXmMD+AGbIttm3M5Qzs5ZuIdVjRyg4P9/ZHx3uTg9H+DolN6bQpKrZ1wxzYKbpTXdWQewsk/HbWYZDnRzD1swzyCjusRFuZAnL9AxtlWnK2xtsOw+syNxa8yRMHDr3ZK1KnOfmO3nfJI0inr/AEpWukHHksUKp4CKmKkpQPYk5qVaMQIlur4k0H92NTONAFufGyDJMs7g55ItK+SAbDbsJ7Qa5z16qI+c51aSk7ynleelRG6goKiYqFFCxWTcQ3bDSdWpyCa6c7S4tjk9ezNfITU1uJx5iFpcJpNycfmXQTWVuLhZxPFJam0q5it4TakTWEaVAqzEwTtBOYmbpwk0rZoLFbFy1c3E/PzfexRcJXecEZSSpdTPO2HHfIfG6yk2BVu0QFFxeErMeBthmr0G7PAxQftF3UJO6sZPQ3wkB5kyiSvJ8NupmQPeCDpJ/KHn+03GOCbmqslgERfEY2Ss8mpTWqlm41h1Y8CY13v2qd/4V8eV1RJVBtgx2fg3X/FgcX5xltvPjlxGoZ1mT1uyhFDUDrvWGiBv1exofRUHD6pjx95Q5YYLka75J8Q/8N/V+OTw33MY6E4lJgzLlMVQoiFq/NfQ8P2hJ8iCvxUsH8/g37N+x/aUY1/I8yMRCQpRE1QdSnn+L4yvxX/pq/EmWmKzI+mSPYNeR/lDXQ9sRJriXaNTdXNkN6qvjBFOne701QemUTgMbqDoLl0eniKUL82rVmFra1jyXfgfcT67AmJu6L/eWcqNwWtVB6QcaPK3hVT697MwneH4SQnJ9CXocnGdn+pF2T9U0jJv23u19jHvfexf23Xv+suR+3nw7LAESkki7HSCRJAkrEA7/9wTo4vHbCXC/3bKBdNASABJXkKDnvRhE+/sb607TbnLmbM/cZdAqN5DXWHUOmdlUJEo+gwDVnEbEMCuXrF8bhLFrTw/5PFBZ8UEG1yPGJ+m1wPwHlNK0B/xEAAA==&quot;"/>
+    <we:property name="bookmark" value="&quot;H4sIAAAAAAAAA+1Y32/TMBD+V5BfeCnITtv82NtWmISE0MTQEEJTdbYvnbc0jhxnrEz73zk7KWNdxZCAgaB9iOzz+Xz33Xcnu9dMm7apYPUGlsj22IG1F0twF08EG7G6l6lsXE6KtCxEjlnKp0JMElq1jTe2btneNfPgFuhPTNtBFQyR8OPpiEFVHcEizEqoWhyxBl1ra6jMZ+yVacm7Dm9GDK+ayjoIJo89eAxmL0md5uSCeD6mE0F5c4nHqHwv5cgTiUonBeRaZDlPE05qba8QPduqEkzH42e29mBqOibISszKZFzwTOZTmaXFOOOTKDeVH1Tk6uVV4yg6innVBHD29SXUCjWLIThse4+v2f5i4XABfpi+vLM4s1W33CI/tp1T+BbLuFR741d0Rqn8XHXOYa1Wc42NbY1v2Q2hduQsYRqVars0BO0clrar/bzVLmocdvUAFw/TM/tp5pDw1UFwSpLW1ItqSMctMu/66BQ4PSxRwuU5IRtwoG3WaXQHqwjFC+PWOUlGGxH9jTBQ3CQSik/LdFxKNQGeZtNcTfiD6Z4RdAvrjIqI4E9Eo81y3jirO+U3YxjE81h/97M2+l/IV3UtZQL1AbjZGTj/b3Fw3c9o4/k3HWtgWB/V76IUFQCtT4pMp9NJyQtRSE7fnOePXAFrLDf9vSPf0X9H/1/Hp577mAipuZKYcK5ynYNM5GNzP8CDroHg4oa/lLCwf8f+Hft/NaN6/otSphLKXFARiCn9NMdH5r8O1/wNL0vTkvH5CsFtIf+DrIGhJo4ro9BtubmyJdJTJQwWSPf+YILCa3oHDLa3ENwdnayfIsSvQ2eXcdvwZgoVeD+wEet94iHZ78+IykNSa23WZHy1gVf743nvJ/H070JIh59A1cUnGdl+bXwf9XUvJv2nhx8SnkyeJdOnQf+0vx8PnxErAaTQ2ZijkFmWgZZJGrZ/Nw8er7y0V3drNtJOFACQoVYcFedjIfDhN9afpt2u5+567k/QKRZS0NjWhmzn2wYUHkGNW3oRsQxqHfIXx7EXbanh+P8Ku/latl8AURVnwtcRAAA=&quot;"/>
+    <we:property name="datasetId" value="&quot;1bc9f159-2234-42ac-8da2-ce5c6c94d7e2&quot;"/>
+    <we:property name="embedUrl" value="&quot;/reportEmbed?reportId=1d5493b0-0102-488b-a943-c8943ff1f6fd&amp;groupId=af757372-574a-4725-b0ef-991838213ca2&amp;w=2&amp;config=eyJjbHVzdGVyVXJsIjoiaHR0cHM6Ly9XQUJJLUNBTkFEQS1DRU5UUkFMLUItUFJJTUFSWS1yZWRpcmVjdC5hbmFseXNpcy53aW5kb3dzLm5ldCIsImVtYmVkRmVhdHVyZXMiOnsidXNhZ2VNZXRyaWNzVk5leHQiOnRydWV9fQ%3D%3D&amp;disableSensitivityBanner=true&amp;storytellingChangeViewModeShortcutKeys=true&quot;"/>
+    <we:property name="backgroundColor" value="&quot;#E6E6E6&quot;"/>
+  </we:properties>
+  <we:bindings/>
+  <we:snapshot xmlns:r="http://schemas.openxmlformats.org/officeDocument/2006/relationships"/>
+</we:webextension>
+</file>
+
+<file path=ppt/webextensions/webextension2.xml><?xml version="1.0" encoding="utf-8"?>
+<we:webextension xmlns:we="http://schemas.microsoft.com/office/webextensions/webextension/2010/11" id="{cb19b00e-e1cc-4d8b-a990-6240f72314f6}">
+  <we:reference id="WA200003233" version="2.0.0.3" store="en-US" storeType="OMEX"/>
+  <we:alternateReferences/>
+  <we:properties>
+    <we:property name="Microsoft.Office.CampaignId" value="&quot;none&quot;"/>
+    <we:property name="reportUrl" value="&quot;/groups/af757372-574a-4725-b0ef-991838213ca2/reports/1d5493b0-0102-488b-a943-c8943ff1f6fd/0e02becd29a8d1780620?bookmarkGuid=c646a4f7-db74-44df-af28-6c7e6fabfc21&amp;bookmarkUsage=1&amp;ctid=04f991f3-0023-4b95-ab0d-bebbdbc8df14&amp;fromEntryPoint=export&quot;"/>
+    <we:property name="reportState" value="&quot;CONNECTED&quot;"/>
+    <we:property name="artifactViewState" value="&quot;live&quot;"/>
+    <we:property name="reportEmbeddedTime" value="&quot;2026-04-26T21:50:41.024Z&quot;"/>
+    <we:property name="creatorSessionId" value="&quot;ba502e7e-07b5-4739-ac41-ac2a56e2226d&quot;"/>
+    <we:property name="creatorUserId" value="&quot;10032005BA5268A4&quot;"/>
+    <we:property name="creatorTenantId" value="&quot;04f991f3-0023-4b95-ab0d-bebbdbc8df14&quot;"/>
+    <we:property name="pageDisplayName" value="&quot;Portfolio Overview&quot;"/>
+    <we:property name="pageName" value="&quot;0e02becd29a8d1780620&quot;"/>
+    <we:property name="reportName" value="&quot;bis_analytics_report&quot;"/>
+    <we:property name="isVisualContainerHeaderHidden" value="false"/>
+    <we:property name="isFiltersActionButtonVisible" value="true"/>
+    <we:property name="initialStateBookmark" value="&quot;H4sIAAAAAAAAA+1YbU/bMBD+K5O/7Es3OelLUr6VDqSJ8SKYmKYJVWf7UgxpHDkOo0P8952dVKylAiQYm7b2Q2Sfz/fy3HOW3RumdFXmMD+AGbIttm3M5Qzs5ZuIdVjRyg4P9/ZHx3uTg9H+DolN6bQpKrZ1wxzYKbpTXdWQewsk/HbWYZDnRzD1swzyCjusRFuZAnL9AxtlWnK2xtsOw+syNxa8yRMHDr3ZK1KnOfmO3nfJI0inr/AEpWukHHksUKp4CKmKkpQPYk5qVaMQIlur4k0H92NTONAFufGyDJMs7g55ItK+SAbDbsJ7Qa5z16qI+c51aSk7ynleelRG6goKiYqFFCxWTcQ3bDSdWpyCa6c7S4tjk9ezNfITU1uJx5iFpcJpNycfmXQTWVuLhZxPFJam0q5it4TakTWEaVAqzEwTtBOYmbpwk0rZoLFbFy1c3E/PzfexRcJXecEZSSpdTPO2HHfIfG6yk2BVu0QFFxeErMeBthmr0G7PAxQftF3UJO6sZPQ3wkB5kyiSvJ8NupmQPeCDpJ/KHn+03GOCbmqslgERfEY2Ss8mpTWqlm41h1Y8CY13v2qd/4V8eV1RJVBtgx2fg3X/FgcX5xltvPjlxGoZ1mT1uyhFDUDrvWGiBv1exofRUHD6pjx95Q5YYLka75J8Q/8N/V+OTw33MY6E4lJgzLlMVQoiFq/NfQ8P2hJ8iCvxUsH8/g37N+x/aUY1/I8yMRCQpRE1QdSnn+L4yvxX/pq/EmWmKzI+mSPYNeR/lDXQ9sRJriXaNTdXNkN6qvjBFOne701QemUTgMbqDoLl0eniKUL82rVmFra1jyXfgfcT67AmJu6L/eWcqNwWtVB6QcaPK3hVT697MwneH4SQnJ9CXocnGdn+pF2T9U0jJv23u19jHvfexf23Xv+suR+3nw7LAESkki7HSCRJAkrEA7/9wTo4vHbCXC/3bKBdNASABJXkKDnvRhE+/sb607TbnLmbM/cZdAqN5DXWHUOmdlUJEo+gwDVnEbEMCuXrF8bhLFrTw/5PFBZ8UEG1yPGJ+m1wPwHlNK0B/xEAAA==&quot;"/>
+    <we:property name="bookmark" value="&quot;H4sIAAAAAAAAA+1Y32/TMBD+V5BfeCnITtv82NtWmISE0MTQEEJTdbYvnbc0jhxnrEz73zk7KWNdxZCAgaB9iOzz+Xz33Xcnu9dMm7apYPUGlsj22IG1F0twF08EG7G6l6lsXE6KtCxEjlnKp0JMElq1jTe2btneNfPgFuhPTNtBFQyR8OPpiEFVHcEizEqoWhyxBl1ra6jMZ+yVacm7Dm9GDK+ayjoIJo89eAxmL0md5uSCeD6mE0F5c4nHqHwv5cgTiUonBeRaZDlPE05qba8QPduqEkzH42e29mBqOibISszKZFzwTOZTmaXFOOOTKDeVH1Tk6uVV4yg6innVBHD29SXUCjWLIThse4+v2f5i4XABfpi+vLM4s1W33CI/tp1T+BbLuFR741d0Rqn8XHXOYa1Wc42NbY1v2Q2hduQsYRqVars0BO0clrar/bzVLmocdvUAFw/TM/tp5pDw1UFwSpLW1ItqSMctMu/66BQ4PSxRwuU5IRtwoG3WaXQHqwjFC+PWOUlGGxH9jTBQ3CQSik/LdFxKNQGeZtNcTfiD6Z4RdAvrjIqI4E9Eo81y3jirO+U3YxjE81h/97M2+l/IV3UtZQL1AbjZGTj/b3Fw3c9o4/k3HWtgWB/V76IUFQCtT4pMp9NJyQtRSE7fnOePXAFrLDf9vSPf0X9H/1/Hp577mAipuZKYcK5ynYNM5GNzP8CDroHg4oa/lLCwf8f+Hft/NaN6/otSphLKXFARiCn9NMdH5r8O1/wNL0vTkvH5CsFtIf+DrIGhJo4ro9BtubmyJdJTJQwWSPf+YILCa3oHDLa3ENwdnayfIsSvQ2eXcdvwZgoVeD+wEet94iHZ78+IykNSa23WZHy1gVf743nvJ/H070JIh59A1cUnGdl+bXwf9XUvJv2nhx8SnkyeJdOnQf+0vx8PnxErAaTQ2ZijkFmWgZZJGrZ/Nw8er7y0V3drNtJOFACQoVYcFedjIfDhN9afpt2u5+567k/QKRZS0NjWhmzn2wYUHkGNW3oRsQxqHfIXx7EXbanh+P8Ku/latl8AURVnwtcRAAA=&quot;"/>
+    <we:property name="datasetId" value="&quot;1bc9f159-2234-42ac-8da2-ce5c6c94d7e2&quot;"/>
+    <we:property name="embedUrl" value="&quot;/reportEmbed?reportId=1d5493b0-0102-488b-a943-c8943ff1f6fd&amp;groupId=af757372-574a-4725-b0ef-991838213ca2&amp;w=2&amp;config=eyJjbHVzdGVyVXJsIjoiaHR0cHM6Ly9XQUJJLUNBTkFEQS1DRU5UUkFMLUItUFJJTUFSWS1yZWRpcmVjdC5hbmFseXNpcy53aW5kb3dzLm5ldCIsImVtYmVkRmVhdHVyZXMiOnsidXNhZ2VNZXRyaWNzVk5leHQiOnRydWV9fQ%3D%3D&amp;disableSensitivityBanner=true&amp;storytellingChangeViewModeShortcutKeys=true&quot;"/>
+    <we:property name="backgroundColor" value="&quot;#E6E6E6&quot;"/>
+  </we:properties>
+  <we:bindings/>
+  <we:snapshot xmlns:r="http://schemas.openxmlformats.org/officeDocument/2006/relationships"/>
+</we:webextension>
+</file>
+
+<file path=ppt/webextensions/webextension3.xml><?xml version="1.0" encoding="utf-8"?>
+<we:webextension xmlns:we="http://schemas.microsoft.com/office/webextensions/webextension/2010/11" id="{2DC6E3CD-D1E8-42D2-B816-3BB9EDC81C62}">
+  <we:reference id="WA200003233" version="2.0.0.3" store="en-US" storeType="OMEX"/>
+  <we:alternateReferences/>
+  <we:properties>
+    <we:property name="Microsoft.Office.CampaignId" value="&quot;none&quot;"/>
+    <we:property name="reportUrl" value="&quot;/groups/af757372-574a-4725-b0ef-991838213ca2/reports/1d5493b0-0102-488b-a943-c8943ff1f6fd/5f57c4a1a6c45018354c?bookmarkGuid=6d6235c1-fcd7-4199-ad5b-179596412b56&amp;bookmarkUsage=1&amp;ctid=04f991f3-0023-4b95-ab0d-bebbdbc8df14&amp;fromEntryPoint=export&quot;"/>
+    <we:property name="reportState" value="&quot;CONNECTED&quot;"/>
+    <we:property name="artifactViewState" value="&quot;live&quot;"/>
+    <we:property name="reportEmbeddedTime" value="&quot;2026-04-26T21:49:27.262Z&quot;"/>
+    <we:property name="creatorSessionId" value="&quot;e438f960-d861-43a2-98b5-810e1b351479&quot;"/>
+    <we:property name="creatorUserId" value="&quot;10032005BA5268A4&quot;"/>
+    <we:property name="creatorTenantId" value="&quot;04f991f3-0023-4b95-ab0d-bebbdbc8df14&quot;"/>
+    <we:property name="pageDisplayName" value="&quot;Maturity &amp; Counterparty&quot;"/>
+    <we:property name="pageName" value="&quot;5f57c4a1a6c45018354c&quot;"/>
+    <we:property name="reportName" value="&quot;bis_analytics_report&quot;"/>
+    <we:property name="isVisualContainerHeaderHidden" value="false"/>
+    <we:property name="isFiltersActionButtonVisible" value="true"/>
+    <we:property name="initialStateBookmark" value="&quot;H4sIAAAAAAAAA+VYbU/jRhD+K5W/8CVUfk1IvkEuSNX1gF4QVVVF1nh3HPawve56zZGi/PfOrp0QciHk6CV3ahFC69nZ2ZlnnhmPeXS4qMoMZheQozNwzqS8y0Hd/eQ5HadoZZeX7z+cfnwfX5x+GJFYllrIonIGj44GNUV9I6oaMmOBhH9OOg5k2RVMzVMKWYUdp0RVyQIy8Tc2yrSlVY3zjoMPZSYVGJNjDRqN2XtSp2e62/s5oBuBaXGPY2S6kUZp1GMheNBlYeR6J0EUMlKrGgXr2UYVY9peP5SFBlHQNUbW74ahD5GbnHSjbuC6XZ4kRp6KTLcqyWz0UCqKjmKelQaVIfk6lUowyBwbhcKqcfrRGcqszu1q9Ew+lrVi+BFTu1VooWdkKWU6ZrVSWLBZzLGUldCVMydsrpQk5KwSR8jiigCqm61b+XmokHzgzsCdd5ZunfJ7KBhJ1306nU4VTkG3j6N9O1zIXFDGY8hlXei44spqnNdFm0X3yzAmJKlEMc1aljwl7LqJjmV1RSlBfgZqeAtKGzomnyjvJkt0WiqO6mxmE/VOqAVj/M5aYD8iGvPJgul08NMKl1uqNVHtnVuTudmOTlg3DPpRFIaB7/qe2/XcV2viWpYXlJFGx6jcLAqZEnCuZG6V21ZT1clfNVJU67kZLzZo/dtisc2SIfsyYi7ymBmQUZVg4us4DXlslbQn0tUTmzF6OkZpGWNG+dgd/+bBuraGNSv1LLaNleQLbwRmpEj3XB6MvksP07dSlZLtDDzXsqWByl9BeNeckKHfb6miW2wLLhZB/bIWQvWN4bcxQJLhy8eXFJ2bn8n83/X5L1DY4tvLDf7bvXd28scqqNkP4hKR3pz//74AtSHs6OG/9dozIv8kAd9H6AUYhH2/F/roHXAGM8TjZvpcCyAVFRmPZwhqA+teTRe0ZBxngqFqlVZz5+RIE7RZTJHGUWOCwisbBwRWTxA8X33V69AG9t1a7nMI6fIbyGr7pUC2fxW6ifqxEZP+0fkfNHCEx350ZPQnDUPaPx3H9YD3MXSjKPHDbt8NAuyZ49vLBh90ItfKxo456QmHbuhy7jNwvTDApPcq7Q7RYugjTMc5jWSKnuMMOBX4OrJaajO47dJY9tGsd3FxuZ3U7A71W2rorTO/t978DhHdPmb4t3nSjPHMD4NeEPDA66ELvhd6/eCAbXUX16GKZfrUfL+SHZXtrHvvqflqT90Y1aH6a74Vv9fbq1HUIscjarLRsRscB9616w7s71rD7Rhl2IBeLrnFFy1xNnfxd3SCy8/F0WJ4/q6V+gykF4t0Cd3eXbAAW0g20FbWuiqB4RUUuAF9Qh0KbupjawbM/9ccewcVjGi/c3bQb537B7kHOugaFAAA&quot;"/>
+    <we:property name="bookmark" value="&quot;H4sIAAAAAAAAA+VYbW/jNgz+K4O/9Es6yK95+XbNtcCA4dYtRYdhCAxZolNdbcuT5F6zIv99lOykrS9Nc90ld9iCIpAoiiYfPqSZPnhc6Lqgyw+0BG/inUl5W1J1+4PvDbyqlREgMMqSeMhjfxTBKAlZgqeyNkJW2ps8eIaqBZhroRtaWEMo/HM+8GhRXNKF3eW00DDwalBaVrQQf0OrjEdGNbAaeHBfF1JRa3JmqAFr9g7VcY8u+D+G+ETKjLiDGTDTSuM8HrKI+jRhUUz8URhHDNV0q+A826piTbvHT2VlqKjwMVY2TqIooDHJRkmchIQkPMusPBeF6VSy5fl9rTA6jHlZW3Cm6OtCKsFo4bkoFOjW6QdvKoumdKvzZ/KZbBSD3yB3R5URZomWcmZS1igFFVumHGqphdHeCrG5VBKRc0ocaJFqBKhpj27kp6kC9IF7E7IabNx6x+9oxVDa9+ndYqFgQU23PT+0w5UsBWY8paVsKpNqrpzGRVN1WSSfhzFHiRbVouhY8piwqzY6VjQaUwL8jKrpDVXG0jH7iHm3WcLbUnFQZ0uXqPdCrRkTDHqBfY9orOZrpuPFj0+43FGtjerg3Jqv7HE8YkkUjuM4isKABD5JfPJqTVzJ+gNmpNWxKtfrQsYEXChZOuWu4+gm+6sBjKqfm9n6ANe/rhe7LFmybyLmokyZBRlUTW18A68lj6uS7kb+9MZ2jB6vYVpmUGA+9se/3TjXeliz2ixT119RvvZGQIGK+JxfjkbfjYf5W6mKyfYmPnFsaaEKniC8b07Q0O83WNEdthUX66B+6oWgvzL8LgaaFfDy9Q1FV/YzX/27Pv8ZCjt8e7nBf733zl7+OAW1/E5cQtLb+//fF6CxhD2//2+99qwoGGU0CIAOQwijcTCMAvCPOINZ4nE7ffYCyIVG4+kSqNrCulfTRTsyzgrBQHVKT3PnlYATtF0sAMdRawLDq1sHBOhHCJ6vvuh16AL7Zi33OYT48GtaNO6XAtr+WZg26odWjPonF3/gwBGdBvGJ1Z+3DOm+Bh7xKR9DROI4C6JkTMIQhvb67rKBe5PJXtm4MScfcZpEhPOAUeJHIWTDV2l3jBaDv8VMWuJIpnCfFpRjgfeRNdLYwW2fxnKIZr2Pi5vjrGG3YN5SQ2+d+f1+8ztGdIeY4d/mSTvGsyAKh2HIQ38IhAZ+5I/DI7bVfVynOpX5Y/P9QnZo11kP3lPLpz11a1TH6q/lTvxeb69W0YgSTrDJxqckPA39K0Im7q/XcAdWmW5Br5Tc4QuOONu7+Hu8weWn6mQ9PH/TSn0G0otFuoHu4C44gB0kW2grG6NryuCSVrAFfUSdVtzWx84MuH+9bcBfrf4B5uUFRvITAAA=&quot;"/>
+    <we:property name="datasetId" value="&quot;1bc9f159-2234-42ac-8da2-ce5c6c94d7e2&quot;"/>
+    <we:property name="embedUrl" value="&quot;/reportEmbed?reportId=1d5493b0-0102-488b-a943-c8943ff1f6fd&amp;groupId=af757372-574a-4725-b0ef-991838213ca2&amp;w=2&amp;config=eyJjbHVzdGVyVXJsIjoiaHR0cHM6Ly9XQUJJLUNBTkFEQS1DRU5UUkFMLUItUFJJTUFSWS1yZWRpcmVjdC5hbmFseXNpcy53aW5kb3dzLm5ldCIsImVtYmVkRmVhdHVyZXMiOnsidXNhZ2VNZXRyaWNzVk5leHQiOnRydWV9fQ%3D%3D&amp;disableSensitivityBanner=true&amp;storytellingChangeViewModeShortcutKeys=true&quot;"/>
+    <we:property name="backgroundColor" value="&quot;#E6E6E6&quot;"/>
+  </we:properties>
+  <we:bindings/>
+  <we:snapshot xmlns:r="http://schemas.openxmlformats.org/officeDocument/2006/relationships"/>
+</we:webextension>
 </file>
--- a/docs/BIS_Portfolio_Deck.pptx
+++ b/docs/BIS_Portfolio_Deck.pptx
@@ -312,7 +312,7 @@
           <a:p>
             <a:fld id="{5BCAD085-E8A6-8845-BD4E-CB4CCA059FC4}" type="datetimeFigureOut">
               <a:rPr lang="en-US" smtClean="0"/>
-              <a:t>4/27/2026</a:t>
+              <a:t>5/4/2026</a:t>
             </a:fld>
             <a:endParaRPr lang="en-US"/>
           </a:p>
@@ -480,7 +480,7 @@
           <a:p>
             <a:fld id="{5BCAD085-E8A6-8845-BD4E-CB4CCA059FC4}" type="datetimeFigureOut">
               <a:rPr lang="en-US" smtClean="0"/>
-              <a:t>4/27/2026</a:t>
+              <a:t>5/4/2026</a:t>
             </a:fld>
             <a:endParaRPr lang="en-US"/>
           </a:p>
@@ -658,7 +658,7 @@
           <a:p>
             <a:fld id="{5BCAD085-E8A6-8845-BD4E-CB4CCA059FC4}" type="datetimeFigureOut">
               <a:rPr lang="en-US" smtClean="0"/>
-              <a:t>4/27/2026</a:t>
+              <a:t>5/4/2026</a:t>
             </a:fld>
             <a:endParaRPr lang="en-US"/>
           </a:p>
@@ -826,7 +826,7 @@
           <a:p>
             <a:fld id="{5BCAD085-E8A6-8845-BD4E-CB4CCA059FC4}" type="datetimeFigureOut">
               <a:rPr lang="en-US" smtClean="0"/>
-              <a:t>4/27/2026</a:t>
+              <a:t>5/4/2026</a:t>
             </a:fld>
             <a:endParaRPr lang="en-US"/>
           </a:p>
@@ -1071,7 +1071,7 @@
           <a:p>
             <a:fld id="{5BCAD085-E8A6-8845-BD4E-CB4CCA059FC4}" type="datetimeFigureOut">
               <a:rPr lang="en-US" smtClean="0"/>
-              <a:t>4/27/2026</a:t>
+              <a:t>5/4/2026</a:t>
             </a:fld>
             <a:endParaRPr lang="en-US"/>
           </a:p>
@@ -1356,7 +1356,7 @@
           <a:p>
             <a:fld id="{5BCAD085-E8A6-8845-BD4E-CB4CCA059FC4}" type="datetimeFigureOut">
               <a:rPr lang="en-US" smtClean="0"/>
-              <a:t>4/27/2026</a:t>
+              <a:t>5/4/2026</a:t>
             </a:fld>
             <a:endParaRPr lang="en-US"/>
           </a:p>
@@ -1775,7 +1775,7 @@
           <a:p>
             <a:fld id="{5BCAD085-E8A6-8845-BD4E-CB4CCA059FC4}" type="datetimeFigureOut">
               <a:rPr lang="en-US" smtClean="0"/>
-              <a:t>4/27/2026</a:t>
+              <a:t>5/4/2026</a:t>
             </a:fld>
             <a:endParaRPr lang="en-US"/>
           </a:p>
@@ -1892,7 +1892,7 @@
           <a:p>
             <a:fld id="{5BCAD085-E8A6-8845-BD4E-CB4CCA059FC4}" type="datetimeFigureOut">
               <a:rPr lang="en-US" smtClean="0"/>
-              <a:t>4/27/2026</a:t>
+              <a:t>5/4/2026</a:t>
             </a:fld>
             <a:endParaRPr lang="en-US"/>
           </a:p>
@@ -1987,7 +1987,7 @@
           <a:p>
             <a:fld id="{5BCAD085-E8A6-8845-BD4E-CB4CCA059FC4}" type="datetimeFigureOut">
               <a:rPr lang="en-US" smtClean="0"/>
-              <a:t>4/27/2026</a:t>
+              <a:t>5/4/2026</a:t>
             </a:fld>
             <a:endParaRPr lang="en-US"/>
           </a:p>
@@ -2262,7 +2262,7 @@
           <a:p>
             <a:fld id="{5BCAD085-E8A6-8845-BD4E-CB4CCA059FC4}" type="datetimeFigureOut">
               <a:rPr lang="en-US" smtClean="0"/>
-              <a:t>4/27/2026</a:t>
+              <a:t>5/4/2026</a:t>
             </a:fld>
             <a:endParaRPr lang="en-US"/>
           </a:p>
@@ -2514,7 +2514,7 @@
           <a:p>
             <a:fld id="{5BCAD085-E8A6-8845-BD4E-CB4CCA059FC4}" type="datetimeFigureOut">
               <a:rPr lang="en-US" smtClean="0"/>
-              <a:t>4/27/2026</a:t>
+              <a:t>5/4/2026</a:t>
             </a:fld>
             <a:endParaRPr lang="en-US"/>
           </a:p>
@@ -2725,7 +2725,7 @@
           <a:p>
             <a:fld id="{5BCAD085-E8A6-8845-BD4E-CB4CCA059FC4}" type="datetimeFigureOut">
               <a:rPr lang="en-US" smtClean="0"/>
-              <a:t>4/27/2026</a:t>
+              <a:t>5/4/2026</a:t>
             </a:fld>
             <a:endParaRPr lang="en-US"/>
           </a:p>
@@ -4322,29 +4322,53 @@
         <p:spPr>
           <a:xfrm>
             <a:off x="1920240" y="4608576"/>
-            <a:ext cx="8686800" cy="402336"/>
-          </a:xfrm>
-          <a:prstGeom prst="rect">
-            <a:avLst/>
-          </a:prstGeom>
-          <a:noFill/>
-        </p:spPr>
-        <p:txBody>
-          <a:bodyPr wrap="square" lIns="0" tIns="0" rIns="0" bIns="0">
-            <a:spAutoFit/>
-          </a:bodyPr>
-          <a:lstStyle/>
-          <a:p>
-            <a:pPr algn="l"/>
-            <a:r>
-              <a:rPr sz="1200" b="0" i="0">
+            <a:ext cx="8686800" cy="184666"/>
+          </a:xfrm>
+          <a:prstGeom prst="rect">
+            <a:avLst/>
+          </a:prstGeom>
+          <a:noFill/>
+        </p:spPr>
+        <p:txBody>
+          <a:bodyPr wrap="square" lIns="0" tIns="0" rIns="0" bIns="0">
+            <a:spAutoFit/>
+          </a:bodyPr>
+          <a:lstStyle/>
+          <a:p>
+            <a:pPr algn="l"/>
+            <a:r>
+              <a:rPr sz="1200" b="0" i="0" dirty="0">
                 <a:solidFill>
                   <a:srgbClr val="FFFFFF"/>
                 </a:solidFill>
                 <a:latin typeface="Calibri"/>
               </a:rPr>
-              <a:t>BIS_Project_2026 — full pipeline available on request</a:t>
-            </a:r>
+              <a:t>BIS_Project_2026 — full pipeline </a:t>
+            </a:r>
+            <a:r>
+              <a:rPr lang="en-US" sz="1200" b="0" i="0" dirty="0">
+                <a:solidFill>
+                  <a:srgbClr val="FFFFFF"/>
+                </a:solidFill>
+                <a:latin typeface="Calibri"/>
+              </a:rPr>
+              <a:t>available </a:t>
+            </a:r>
+            <a:r>
+              <a:rPr lang="en-GB" sz="1200" b="0" i="0" dirty="0">
+                <a:solidFill>
+                  <a:srgbClr val="FFFFFF"/>
+                </a:solidFill>
+                <a:latin typeface="Calibri"/>
+              </a:rPr>
+              <a:t>in the Git Hub repository</a:t>
+            </a:r>
+            <a:endParaRPr sz="1200" b="0" i="0" dirty="0">
+              <a:solidFill>
+                <a:srgbClr val="FFFFFF"/>
+              </a:solidFill>
+              <a:latin typeface="Calibri"/>
+            </a:endParaRPr>
           </a:p>
         </p:txBody>
       </p:sp>
@@ -5068,28 +5092,46 @@
         <p:spPr>
           <a:xfrm>
             <a:off x="6263640" y="1993392"/>
-            <a:ext cx="2286000" cy="658368"/>
-          </a:xfrm>
-          <a:prstGeom prst="rect">
-            <a:avLst/>
-          </a:prstGeom>
-          <a:noFill/>
-        </p:spPr>
-        <p:txBody>
-          <a:bodyPr wrap="square" lIns="0" tIns="0" rIns="0" bIns="0">
-            <a:spAutoFit/>
-          </a:bodyPr>
-          <a:lstStyle/>
-          <a:p>
-            <a:pPr algn="l"/>
-            <a:r>
-              <a:rPr sz="3400" b="1" i="0">
+            <a:ext cx="2286000" cy="523220"/>
+          </a:xfrm>
+          <a:prstGeom prst="rect">
+            <a:avLst/>
+          </a:prstGeom>
+          <a:noFill/>
+        </p:spPr>
+        <p:txBody>
+          <a:bodyPr wrap="square" lIns="0" tIns="0" rIns="0" bIns="0">
+            <a:spAutoFit/>
+          </a:bodyPr>
+          <a:lstStyle/>
+          <a:p>
+            <a:pPr algn="l"/>
+            <a:r>
+              <a:rPr sz="3400" b="1" i="0" dirty="0">
                 <a:solidFill>
                   <a:srgbClr val="C48310"/>
                 </a:solidFill>
                 <a:latin typeface="Calibri"/>
               </a:rPr>
-              <a:t>SDR 431bn</a:t>
+              <a:t>SDR </a:t>
+            </a:r>
+            <a:r>
+              <a:rPr lang="en-US" sz="3400" b="1" dirty="0">
+                <a:solidFill>
+                  <a:srgbClr val="C48310"/>
+                </a:solidFill>
+                <a:latin typeface="Calibri"/>
+              </a:rPr>
+              <a:t>297</a:t>
+            </a:r>
+            <a:r>
+              <a:rPr sz="3400" b="1" i="0" dirty="0">
+                <a:solidFill>
+                  <a:srgbClr val="C48310"/>
+                </a:solidFill>
+                <a:latin typeface="Calibri"/>
+              </a:rPr>
+              <a:t>bn</a:t>
             </a:r>
           </a:p>
         </p:txBody>
@@ -5103,30 +5145,43 @@
         <p:spPr>
           <a:xfrm>
             <a:off x="6263640" y="2633472"/>
-            <a:ext cx="2286000" cy="658368"/>
-          </a:xfrm>
-          <a:prstGeom prst="rect">
-            <a:avLst/>
-          </a:prstGeom>
-          <a:noFill/>
-        </p:spPr>
-        <p:txBody>
-          <a:bodyPr wrap="square" lIns="0" tIns="0" rIns="0" bIns="0">
-            <a:spAutoFit/>
-          </a:bodyPr>
-          <a:lstStyle/>
-          <a:p>
-            <a:pPr algn="l"/>
-            <a:r>
-              <a:rPr sz="1100" b="0" i="0">
+            <a:ext cx="2286000" cy="169277"/>
+          </a:xfrm>
+          <a:prstGeom prst="rect">
+            <a:avLst/>
+          </a:prstGeom>
+          <a:noFill/>
+        </p:spPr>
+        <p:txBody>
+          <a:bodyPr wrap="square" lIns="0" tIns="0" rIns="0" bIns="0">
+            <a:spAutoFit/>
+          </a:bodyPr>
+          <a:lstStyle/>
+          <a:p>
+            <a:r>
+              <a:rPr lang="en-GB" sz="1100" dirty="0" err="1">
                 <a:solidFill>
                   <a:srgbClr val="64748B"/>
                 </a:solidFill>
                 <a:latin typeface="Calibri"/>
               </a:rPr>
-              <a:t>BIS total assets
-replicated scope</a:t>
-            </a:r>
+              <a:t>Avg</a:t>
+            </a:r>
+            <a:r>
+              <a:rPr lang="en-GB" sz="1100" dirty="0">
+                <a:solidFill>
+                  <a:srgbClr val="64748B"/>
+                </a:solidFill>
+                <a:latin typeface="Calibri"/>
+              </a:rPr>
+              <a:t> active book</a:t>
+            </a:r>
+            <a:endParaRPr sz="1100" dirty="0">
+              <a:solidFill>
+                <a:srgbClr val="64748B"/>
+              </a:solidFill>
+              <a:latin typeface="Calibri"/>
+            </a:endParaRPr>
           </a:p>
         </p:txBody>
       </p:sp>
@@ -9157,29 +9212,74 @@
         <p:spPr>
           <a:xfrm>
             <a:off x="5166359" y="2322576"/>
-            <a:ext cx="1920240" cy="640080"/>
-          </a:xfrm>
-          <a:prstGeom prst="rect">
-            <a:avLst/>
-          </a:prstGeom>
-          <a:noFill/>
-        </p:spPr>
-        <p:txBody>
-          <a:bodyPr wrap="square" lIns="0" tIns="0" rIns="0" bIns="0">
-            <a:spAutoFit/>
-          </a:bodyPr>
-          <a:lstStyle/>
-          <a:p>
-            <a:pPr algn="l"/>
-            <a:r>
-              <a:rPr sz="1050" b="0" i="0">
+            <a:ext cx="1920240" cy="323165"/>
+          </a:xfrm>
+          <a:prstGeom prst="rect">
+            <a:avLst/>
+          </a:prstGeom>
+          <a:noFill/>
+        </p:spPr>
+        <p:txBody>
+          <a:bodyPr wrap="square" lIns="0" tIns="0" rIns="0" bIns="0">
+            <a:spAutoFit/>
+          </a:bodyPr>
+          <a:lstStyle/>
+          <a:p>
+            <a:pPr algn="l"/>
+            <a:r>
+              <a:rPr lang="en-US" sz="1050" dirty="0">
                 <a:solidFill>
                   <a:srgbClr val="64748B"/>
                 </a:solidFill>
                 <a:latin typeface="Calibri"/>
               </a:rPr>
-              <a:t>4 layers:
-stg→int→mart</a:t>
+              <a:t>3</a:t>
+            </a:r>
+            <a:r>
+              <a:rPr sz="1050" b="0" i="0" dirty="0">
+                <a:solidFill>
+                  <a:srgbClr val="64748B"/>
+                </a:solidFill>
+                <a:latin typeface="Calibri"/>
+              </a:rPr>
+              <a:t> layers:
+stg→</a:t>
+            </a:r>
+            <a:r>
+              <a:rPr lang="en-US" sz="1050" b="0" i="0" dirty="0">
+                <a:solidFill>
+                  <a:srgbClr val="64748B"/>
+                </a:solidFill>
+                <a:latin typeface="Calibri"/>
+              </a:rPr>
+              <a:t> </a:t>
+            </a:r>
+            <a:r>
+              <a:rPr sz="1050" b="0" i="0" dirty="0">
+                <a:solidFill>
+                  <a:srgbClr val="64748B"/>
+                </a:solidFill>
+                <a:latin typeface="Calibri"/>
+              </a:rPr>
+              <a:t>int→</a:t>
+            </a:r>
+            <a:r>
+              <a:rPr lang="en-US" sz="1050" b="0" i="0" dirty="0">
+                <a:solidFill>
+                  <a:srgbClr val="64748B"/>
+                </a:solidFill>
+                <a:latin typeface="Calibri"/>
+              </a:rPr>
+              <a:t> </a:t>
+            </a:r>
+            <a:r>
+              <a:rPr sz="1050" b="0" i="0" dirty="0">
+                <a:solidFill>
+                  <a:srgbClr val="64748B"/>
+                </a:solidFill>
+                <a:latin typeface="Calibri"/>
+              </a:rPr>
+              <a:t>mart</a:t>
             </a:r>
           </a:p>
         </p:txBody>
@@ -9431,29 +9531,47 @@
         <p:spPr>
           <a:xfrm>
             <a:off x="7543800" y="2322576"/>
-            <a:ext cx="1920240" cy="640080"/>
-          </a:xfrm>
-          <a:prstGeom prst="rect">
-            <a:avLst/>
-          </a:prstGeom>
-          <a:noFill/>
-        </p:spPr>
-        <p:txBody>
-          <a:bodyPr wrap="square" lIns="0" tIns="0" rIns="0" bIns="0">
-            <a:spAutoFit/>
-          </a:bodyPr>
-          <a:lstStyle/>
-          <a:p>
-            <a:pPr algn="l"/>
-            <a:r>
-              <a:rPr sz="1050" b="0" i="0">
+            <a:ext cx="1920240" cy="323165"/>
+          </a:xfrm>
+          <a:prstGeom prst="rect">
+            <a:avLst/>
+          </a:prstGeom>
+          <a:noFill/>
+        </p:spPr>
+        <p:txBody>
+          <a:bodyPr wrap="square" lIns="0" tIns="0" rIns="0" bIns="0">
+            <a:spAutoFit/>
+          </a:bodyPr>
+          <a:lstStyle/>
+          <a:p>
+            <a:pPr algn="l"/>
+            <a:r>
+              <a:rPr sz="1050" b="0" i="0" dirty="0">
                 <a:solidFill>
                   <a:srgbClr val="64748B"/>
                 </a:solidFill>
                 <a:latin typeface="Calibri"/>
               </a:rPr>
               <a:t>Import mode
-Power BI</a:t>
+</a:t>
+            </a:r>
+            <a:r>
+              <a:rPr lang="en-US" sz="1050" b="0" i="0" dirty="0">
+                <a:solidFill>
+                  <a:srgbClr val="64748B"/>
+                </a:solidFill>
+                <a:latin typeface="Calibri"/>
+              </a:rPr>
+              <a:t>Fabric </a:t>
+            </a:r>
+            <a:r>
+              <a:rPr sz="1050" b="0" i="0" dirty="0">
+                <a:solidFill>
+                  <a:srgbClr val="64748B"/>
+                </a:solidFill>
+                <a:latin typeface="Calibri"/>
+              </a:rPr>
+              <a:t>Power BI</a:t>
             </a:r>
           </a:p>
         </p:txBody>
@@ -9669,22 +9787,31 @@
         <p:spPr>
           <a:xfrm>
             <a:off x="9921240" y="1627632"/>
-            <a:ext cx="1920240" cy="640080"/>
-          </a:xfrm>
-          <a:prstGeom prst="rect">
-            <a:avLst/>
-          </a:prstGeom>
-          <a:noFill/>
-        </p:spPr>
-        <p:txBody>
-          <a:bodyPr wrap="square" lIns="0" tIns="0" rIns="0" bIns="0">
-            <a:spAutoFit/>
-          </a:bodyPr>
-          <a:lstStyle/>
-          <a:p>
-            <a:pPr algn="l"/>
-            <a:r>
-              <a:rPr sz="1400" b="1" i="0">
+            <a:ext cx="1920240" cy="430887"/>
+          </a:xfrm>
+          <a:prstGeom prst="rect">
+            <a:avLst/>
+          </a:prstGeom>
+          <a:noFill/>
+        </p:spPr>
+        <p:txBody>
+          <a:bodyPr wrap="square" lIns="0" tIns="0" rIns="0" bIns="0">
+            <a:spAutoFit/>
+          </a:bodyPr>
+          <a:lstStyle/>
+          <a:p>
+            <a:pPr algn="l"/>
+            <a:r>
+              <a:rPr lang="en-US" sz="1400" b="1" i="0" dirty="0">
+                <a:solidFill>
+                  <a:srgbClr val="C48310"/>
+                </a:solidFill>
+                <a:latin typeface="Calibri"/>
+              </a:rPr>
+              <a:t>Fabric </a:t>
+            </a:r>
+            <a:r>
+              <a:rPr sz="1400" b="1" i="0" dirty="0">
                 <a:solidFill>
                   <a:srgbClr val="C48310"/>
                 </a:solidFill>
@@ -10044,29 +10171,29 @@
         <p:spPr>
           <a:xfrm>
             <a:off x="502920" y="4864608"/>
-            <a:ext cx="11155680" cy="384048"/>
-          </a:xfrm>
-          <a:prstGeom prst="rect">
-            <a:avLst/>
-          </a:prstGeom>
-          <a:noFill/>
-        </p:spPr>
-        <p:txBody>
-          <a:bodyPr wrap="square" lIns="0" tIns="0" rIns="0" bIns="0">
-            <a:spAutoFit/>
-          </a:bodyPr>
-          <a:lstStyle/>
-          <a:p>
-            <a:pPr algn="l"/>
-            <a:r>
-              <a:rPr sz="1050" b="0" i="0">
-                <a:solidFill>
-                  <a:srgbClr val="1E293B"/>
-                </a:solidFill>
-                <a:latin typeface="Calibri"/>
-              </a:rPr>
-              <a:t>Findur → Fabric Data Factory  ·  dbt Cloud or dbt Core  ·  Direct Lake (Delta tables)  ·  Power BI Service with RLS  ·  Azure DevOps CI/CD</a:t>
-            </a:r>
+            <a:ext cx="11155680" cy="161583"/>
+          </a:xfrm>
+          <a:prstGeom prst="rect">
+            <a:avLst/>
+          </a:prstGeom>
+          <a:noFill/>
+        </p:spPr>
+        <p:txBody>
+          <a:bodyPr wrap="square" lIns="0" tIns="0" rIns="0" bIns="0">
+            <a:spAutoFit/>
+          </a:bodyPr>
+          <a:lstStyle/>
+          <a:p>
+            <a:r>
+              <a:rPr lang="en-GB" sz="1050" dirty="0"/>
+              <a:t>Findur → Scheduled ETL pipeline (Spark / Cloudera CDS) · dbt Cloud or dbt Core · Lakehouse SQL endpoint (Delta / Parquet) · Power BI or Tableau with RLS · CI/CD pipeline (e.g. Azure DevOps)</a:t>
+            </a:r>
+            <a:endParaRPr sz="1050" b="0" i="0" dirty="0">
+              <a:solidFill>
+                <a:srgbClr val="1E293B"/>
+              </a:solidFill>
+              <a:latin typeface="Calibri"/>
+            </a:endParaRPr>
           </a:p>
         </p:txBody>
       </p:sp>
@@ -10079,29 +10206,42 @@
         <p:spPr>
           <a:xfrm>
             <a:off x="502920" y="5248656"/>
-            <a:ext cx="10972800" cy="274320"/>
-          </a:xfrm>
-          <a:prstGeom prst="rect">
-            <a:avLst/>
-          </a:prstGeom>
-          <a:noFill/>
-        </p:spPr>
-        <p:txBody>
-          <a:bodyPr wrap="square" lIns="0" tIns="0" rIns="0" bIns="0">
-            <a:spAutoFit/>
-          </a:bodyPr>
-          <a:lstStyle/>
-          <a:p>
-            <a:pPr algn="l"/>
-            <a:r>
-              <a:rPr sz="1000" b="0" i="1">
+            <a:ext cx="10972800" cy="153888"/>
+          </a:xfrm>
+          <a:prstGeom prst="rect">
+            <a:avLst/>
+          </a:prstGeom>
+          <a:noFill/>
+        </p:spPr>
+        <p:txBody>
+          <a:bodyPr wrap="square" lIns="0" tIns="0" rIns="0" bIns="0">
+            <a:spAutoFit/>
+          </a:bodyPr>
+          <a:lstStyle/>
+          <a:p>
+            <a:r>
+              <a:rPr lang="en-US" sz="1000" i="1" dirty="0">
                 <a:solidFill>
                   <a:srgbClr val="64748B"/>
                 </a:solidFill>
-                <a:latin typeface="Calibri"/>
-              </a:rPr>
-              <a:t>Architecture is identical — the project uses the same tools at every layer.</a:t>
-            </a:r>
+              </a:rPr>
+              <a:t>Core skills transfer directly — star schema, dbt, SDR metrics apply on any Lakehouse platform.</a:t>
+            </a:r>
+            <a:r>
+              <a:rPr lang="en-US" sz="1000" b="0" i="1" dirty="0">
+                <a:solidFill>
+                  <a:srgbClr val="64748B"/>
+                </a:solidFill>
+                <a:latin typeface="Calibri"/>
+              </a:rPr>
+              <a:t> </a:t>
+            </a:r>
+            <a:endParaRPr sz="1000" i="1" dirty="0">
+              <a:solidFill>
+                <a:srgbClr val="64748B"/>
+              </a:solidFill>
+              <a:latin typeface="Calibri"/>
+            </a:endParaRPr>
           </a:p>
         </p:txBody>
       </p:sp>
@@ -10489,7 +10629,7 @@
           <a:p>
             <a:pPr algn="ctr"/>
             <a:r>
-              <a:rPr sz="1000" b="1" i="0">
+              <a:rPr sz="1000" b="1" i="0" dirty="0">
                 <a:solidFill>
                   <a:srgbClr val="FFFFFF"/>
                 </a:solidFill>
@@ -12306,7 +12446,7 @@
         <p:spPr>
           <a:xfrm>
             <a:off x="9234678" y="1481328"/>
-            <a:ext cx="1188719" cy="320040"/>
+            <a:ext cx="1188719" cy="138499"/>
           </a:xfrm>
           <a:prstGeom prst="rect">
             <a:avLst/>
@@ -12321,7 +12461,16 @@
           <a:p>
             <a:pPr algn="ctr"/>
             <a:r>
-              <a:rPr sz="900" b="1" i="0">
+              <a:rPr lang="en-US" sz="900" b="1" i="0" dirty="0">
+                <a:solidFill>
+                  <a:srgbClr val="FFFFFF"/>
+                </a:solidFill>
+                <a:latin typeface="Calibri"/>
+              </a:rPr>
+              <a:t>Dim </a:t>
+            </a:r>
+            <a:r>
+              <a:rPr sz="900" b="1" i="0" dirty="0">
                 <a:solidFill>
                   <a:srgbClr val="FFFFFF"/>
                 </a:solidFill>
@@ -12385,7 +12534,7 @@
         <p:spPr>
           <a:xfrm>
             <a:off x="7863840" y="2788920"/>
-            <a:ext cx="1280160" cy="320040"/>
+            <a:ext cx="1280160" cy="138499"/>
           </a:xfrm>
           <a:prstGeom prst="rect">
             <a:avLst/>
@@ -12400,7 +12549,16 @@
           <a:p>
             <a:pPr algn="ctr"/>
             <a:r>
-              <a:rPr sz="900" b="1" i="0">
+              <a:rPr lang="en-US" sz="900" b="1" i="0" dirty="0">
+                <a:solidFill>
+                  <a:srgbClr val="FFFFFF"/>
+                </a:solidFill>
+                <a:latin typeface="Calibri"/>
+              </a:rPr>
+              <a:t>Dim </a:t>
+            </a:r>
+            <a:r>
+              <a:rPr sz="900" b="1" i="0" dirty="0">
                 <a:solidFill>
                   <a:srgbClr val="FFFFFF"/>
                 </a:solidFill>
@@ -12464,7 +12622,7 @@
         <p:spPr>
           <a:xfrm>
             <a:off x="10762488" y="2788920"/>
-            <a:ext cx="1188719" cy="320040"/>
+            <a:ext cx="1188719" cy="138499"/>
           </a:xfrm>
           <a:prstGeom prst="rect">
             <a:avLst/>
@@ -12479,7 +12637,16 @@
           <a:p>
             <a:pPr algn="ctr"/>
             <a:r>
-              <a:rPr sz="900" b="1" i="0">
+              <a:rPr lang="en-US" sz="900" b="1" i="0" dirty="0">
+                <a:solidFill>
+                  <a:srgbClr val="FFFFFF"/>
+                </a:solidFill>
+                <a:latin typeface="Calibri"/>
+              </a:rPr>
+              <a:t>Dim </a:t>
+            </a:r>
+            <a:r>
+              <a:rPr sz="900" b="1" i="0" dirty="0">
                 <a:solidFill>
                   <a:srgbClr val="FFFFFF"/>
                 </a:solidFill>
@@ -12543,7 +12710,7 @@
         <p:spPr>
           <a:xfrm>
             <a:off x="9320403" y="4343400"/>
-            <a:ext cx="1188719" cy="320040"/>
+            <a:ext cx="1188719" cy="138499"/>
           </a:xfrm>
           <a:prstGeom prst="rect">
             <a:avLst/>
@@ -12558,7 +12725,16 @@
           <a:p>
             <a:pPr algn="ctr"/>
             <a:r>
-              <a:rPr sz="900" b="1" i="0">
+              <a:rPr lang="en-US" sz="900" b="1" i="0" dirty="0">
+                <a:solidFill>
+                  <a:srgbClr val="FFFFFF"/>
+                </a:solidFill>
+                <a:latin typeface="Calibri"/>
+              </a:rPr>
+              <a:t>Dim </a:t>
+            </a:r>
+            <a:r>
+              <a:rPr sz="900" b="1" i="0" dirty="0">
                 <a:solidFill>
                   <a:srgbClr val="FFFFFF"/>
                 </a:solidFill>
@@ -14244,29 +14420,74 @@
         <p:spPr>
           <a:xfrm>
             <a:off x="6830568" y="1810512"/>
-            <a:ext cx="4846320" cy="457200"/>
-          </a:xfrm>
-          <a:prstGeom prst="rect">
-            <a:avLst/>
-          </a:prstGeom>
-          <a:noFill/>
-        </p:spPr>
-        <p:txBody>
-          <a:bodyPr wrap="square" lIns="0" tIns="0" rIns="0" bIns="0">
-            <a:spAutoFit/>
-          </a:bodyPr>
-          <a:lstStyle/>
-          <a:p>
-            <a:pPr algn="l"/>
-            <a:r>
-              <a:rPr sz="1050" b="0" i="0">
+            <a:ext cx="4846320" cy="323165"/>
+          </a:xfrm>
+          <a:prstGeom prst="rect">
+            <a:avLst/>
+          </a:prstGeom>
+          <a:noFill/>
+        </p:spPr>
+        <p:txBody>
+          <a:bodyPr wrap="square" lIns="0" tIns="0" rIns="0" bIns="0">
+            <a:spAutoFit/>
+          </a:bodyPr>
+          <a:lstStyle/>
+          <a:p>
+            <a:pPr algn="l"/>
+            <a:r>
+              <a:rPr lang="en-US" sz="1050" dirty="0">
                 <a:solidFill>
                   <a:srgbClr val="1E293B"/>
                 </a:solidFill>
                 <a:latin typeface="Calibri"/>
               </a:rPr>
-              <a:t>500 active deals × 24 month-ends
-= 12,000 (deal, as-of date) pairs</a:t>
+              <a:t>7</a:t>
+            </a:r>
+            <a:r>
+              <a:rPr sz="1050" b="0" i="0" dirty="0">
+                <a:solidFill>
+                  <a:srgbClr val="1E293B"/>
+                </a:solidFill>
+                <a:latin typeface="Calibri"/>
+              </a:rPr>
+              <a:t>00 active deals × 24 month-ends
+= 1</a:t>
+            </a:r>
+            <a:r>
+              <a:rPr lang="en-US" sz="1050" b="0" i="0" dirty="0">
+                <a:solidFill>
+                  <a:srgbClr val="1E293B"/>
+                </a:solidFill>
+                <a:latin typeface="Calibri"/>
+              </a:rPr>
+              <a:t>6</a:t>
+            </a:r>
+            <a:r>
+              <a:rPr sz="1050" b="0" i="0" dirty="0">
+                <a:solidFill>
+                  <a:srgbClr val="1E293B"/>
+                </a:solidFill>
+                <a:latin typeface="Calibri"/>
+              </a:rPr>
+              <a:t>,</a:t>
+            </a:r>
+            <a:r>
+              <a:rPr lang="en-US" sz="1050" b="0" i="0" dirty="0">
+                <a:solidFill>
+                  <a:srgbClr val="1E293B"/>
+                </a:solidFill>
+                <a:latin typeface="Calibri"/>
+              </a:rPr>
+              <a:t>8</a:t>
+            </a:r>
+            <a:r>
+              <a:rPr sz="1050" b="0" i="0" dirty="0">
+                <a:solidFill>
+                  <a:srgbClr val="1E293B"/>
+                </a:solidFill>
+                <a:latin typeface="Calibri"/>
+              </a:rPr>
+              <a:t>00 (deal, as-of date) pairs</a:t>
             </a:r>
           </a:p>
         </p:txBody>
@@ -17256,30 +17477,39 @@
         <p:spPr>
           <a:xfrm>
             <a:off x="2834640" y="2267712"/>
-            <a:ext cx="4114800" cy="548640"/>
-          </a:xfrm>
-          <a:prstGeom prst="rect">
-            <a:avLst/>
-          </a:prstGeom>
-          <a:noFill/>
-        </p:spPr>
-        <p:txBody>
-          <a:bodyPr wrap="square" lIns="0" tIns="0" rIns="0" bIns="0">
-            <a:spAutoFit/>
-          </a:bodyPr>
-          <a:lstStyle/>
-          <a:p>
-            <a:pPr algn="l"/>
-            <a:r>
-              <a:rPr sz="1050" b="0" i="0">
-                <a:solidFill>
-                  <a:srgbClr val="1E293B"/>
-                </a:solidFill>
-                <a:latin typeface="Calibri"/>
-              </a:rPr>
-              <a:t>PySpark notebook
-(CSV → Delta / OneLake)</a:t>
-            </a:r>
+            <a:ext cx="4114800" cy="323165"/>
+          </a:xfrm>
+          <a:prstGeom prst="rect">
+            <a:avLst/>
+          </a:prstGeom>
+          <a:noFill/>
+        </p:spPr>
+        <p:txBody>
+          <a:bodyPr wrap="square" lIns="0" tIns="0" rIns="0" bIns="0">
+            <a:spAutoFit/>
+          </a:bodyPr>
+          <a:lstStyle/>
+          <a:p>
+            <a:r>
+              <a:rPr lang="en-US" sz="1050" dirty="0" err="1"/>
+              <a:t>PySpark</a:t>
+            </a:r>
+            <a:r>
+              <a:rPr lang="en-US" sz="1050" dirty="0"/>
+              <a:t> notebook </a:t>
+            </a:r>
+          </a:p>
+          <a:p>
+            <a:r>
+              <a:rPr lang="en-US" sz="1050" dirty="0"/>
+              <a:t>(CSV → Fabric Lakehouse)</a:t>
+            </a:r>
+            <a:endParaRPr sz="1050" b="0" i="0" dirty="0">
+              <a:solidFill>
+                <a:srgbClr val="1E293B"/>
+              </a:solidFill>
+              <a:latin typeface="Calibri"/>
+            </a:endParaRPr>
           </a:p>
         </p:txBody>
       </p:sp>
@@ -17313,8 +17543,19 @@
                 </a:solidFill>
                 <a:latin typeface="Calibri"/>
               </a:rPr>
-              <a:t>Fabric Data Factory
-(scheduled pipeline)</a:t>
+              <a:t>Scheduled ETL pipeline</a:t>
+            </a:r>
+          </a:p>
+          <a:p>
+            <a:pPr algn="l"/>
+            <a:r>
+              <a:rPr sz="1050" b="0" i="0">
+                <a:solidFill>
+                  <a:srgbClr val="1E293B"/>
+                </a:solidFill>
+                <a:latin typeface="Calibri"/>
+              </a:rPr>
+              <a:t>(Spark / Cloudera CDS)</a:t>
             </a:r>
           </a:p>
         </p:txBody>
@@ -17451,30 +17692,35 @@
         <p:spPr>
           <a:xfrm>
             <a:off x="2834640" y="2926080"/>
-            <a:ext cx="4114800" cy="548640"/>
-          </a:xfrm>
-          <a:prstGeom prst="rect">
-            <a:avLst/>
-          </a:prstGeom>
-          <a:noFill/>
-        </p:spPr>
-        <p:txBody>
-          <a:bodyPr wrap="square" lIns="0" tIns="0" rIns="0" bIns="0">
-            <a:spAutoFit/>
-          </a:bodyPr>
-          <a:lstStyle/>
-          <a:p>
-            <a:pPr algn="l"/>
-            <a:r>
-              <a:rPr sz="1050" b="0" i="0">
-                <a:solidFill>
-                  <a:srgbClr val="1E293B"/>
-                </a:solidFill>
-                <a:latin typeface="Calibri"/>
-              </a:rPr>
-              <a:t>dbt Core (CLI)
-9 SQL models, views</a:t>
-            </a:r>
+            <a:ext cx="4114800" cy="323165"/>
+          </a:xfrm>
+          <a:prstGeom prst="rect">
+            <a:avLst/>
+          </a:prstGeom>
+          <a:noFill/>
+        </p:spPr>
+        <p:txBody>
+          <a:bodyPr wrap="square" lIns="0" tIns="0" rIns="0" bIns="0">
+            <a:spAutoFit/>
+          </a:bodyPr>
+          <a:lstStyle/>
+          <a:p>
+            <a:r>
+              <a:rPr lang="en-US" sz="1050" dirty="0"/>
+              <a:t>dbt Core (CLI) </a:t>
+            </a:r>
+          </a:p>
+          <a:p>
+            <a:r>
+              <a:rPr lang="en-US" sz="1050" dirty="0"/>
+              <a:t>Fabric SQL Analytics Endpoint</a:t>
+            </a:r>
+            <a:endParaRPr sz="1050" b="0" i="0" dirty="0">
+              <a:solidFill>
+                <a:srgbClr val="1E293B"/>
+              </a:solidFill>
+              <a:latin typeface="Calibri"/>
+            </a:endParaRPr>
           </a:p>
         </p:txBody>
       </p:sp>
@@ -17508,8 +17754,19 @@
                 </a:solidFill>
                 <a:latin typeface="Calibri"/>
               </a:rPr>
-              <a:t>dbt Core or dbt Cloud
-Fabric SQL Endpoint</a:t>
+              <a:t>dbt Core or dbt Cloud</a:t>
+            </a:r>
+          </a:p>
+          <a:p>
+            <a:pPr algn="l"/>
+            <a:r>
+              <a:rPr sz="1050" b="0" i="0">
+                <a:solidFill>
+                  <a:srgbClr val="1E293B"/>
+                </a:solidFill>
+                <a:latin typeface="Calibri"/>
+              </a:rPr>
+              <a:t>(Databricks / Snowflake)</a:t>
             </a:r>
           </a:p>
         </p:txBody>
@@ -17646,30 +17903,39 @@
         <p:spPr>
           <a:xfrm>
             <a:off x="2834640" y="3584448"/>
-            <a:ext cx="4114800" cy="548640"/>
-          </a:xfrm>
-          <a:prstGeom prst="rect">
-            <a:avLst/>
-          </a:prstGeom>
-          <a:noFill/>
-        </p:spPr>
-        <p:txBody>
-          <a:bodyPr wrap="square" lIns="0" tIns="0" rIns="0" bIns="0">
-            <a:spAutoFit/>
-          </a:bodyPr>
-          <a:lstStyle/>
-          <a:p>
-            <a:pPr algn="l"/>
-            <a:r>
-              <a:rPr sz="1050" b="0" i="0">
-                <a:solidFill>
-                  <a:srgbClr val="1E293B"/>
-                </a:solidFill>
-                <a:latin typeface="Calibri"/>
-              </a:rPr>
-              <a:t>Power BI Import mode
-SQL Server connector</a:t>
-            </a:r>
+            <a:ext cx="4114800" cy="323165"/>
+          </a:xfrm>
+          <a:prstGeom prst="rect">
+            <a:avLst/>
+          </a:prstGeom>
+          <a:noFill/>
+        </p:spPr>
+        <p:txBody>
+          <a:bodyPr wrap="square" lIns="0" tIns="0" rIns="0" bIns="0">
+            <a:spAutoFit/>
+          </a:bodyPr>
+          <a:lstStyle/>
+          <a:p>
+            <a:r>
+              <a:rPr lang="en-GB" sz="1050"/>
+              <a:t>Fabric Power </a:t>
+            </a:r>
+            <a:r>
+              <a:rPr lang="en-GB" sz="1050" dirty="0"/>
+              <a:t>BI Import mode </a:t>
+            </a:r>
+          </a:p>
+          <a:p>
+            <a:r>
+              <a:rPr lang="en-GB" sz="1050" dirty="0"/>
+              <a:t>Fabric SQL Endpoint</a:t>
+            </a:r>
+            <a:endParaRPr sz="1050" b="0" i="0" dirty="0">
+              <a:solidFill>
+                <a:srgbClr val="1E293B"/>
+              </a:solidFill>
+              <a:latin typeface="Calibri"/>
+            </a:endParaRPr>
           </a:p>
         </p:txBody>
       </p:sp>
@@ -17703,8 +17969,19 @@
                 </a:solidFill>
                 <a:latin typeface="Calibri"/>
               </a:rPr>
-              <a:t>Power BI Direct Lake
-(Delta tables)</a:t>
+              <a:t>Power BI or Tableau</a:t>
+            </a:r>
+          </a:p>
+          <a:p>
+            <a:pPr algn="l"/>
+            <a:r>
+              <a:rPr sz="1050" b="0" i="0">
+                <a:solidFill>
+                  <a:srgbClr val="1E293B"/>
+                </a:solidFill>
+                <a:latin typeface="Calibri"/>
+              </a:rPr>
+              <a:t>(direct connection)</a:t>
             </a:r>
           </a:p>
         </p:txBody>
@@ -17841,30 +18118,45 @@
         <p:spPr>
           <a:xfrm>
             <a:off x="2834640" y="4242816"/>
-            <a:ext cx="4114800" cy="548640"/>
-          </a:xfrm>
-          <a:prstGeom prst="rect">
-            <a:avLst/>
-          </a:prstGeom>
-          <a:noFill/>
-        </p:spPr>
-        <p:txBody>
-          <a:bodyPr wrap="square" lIns="0" tIns="0" rIns="0" bIns="0">
-            <a:spAutoFit/>
-          </a:bodyPr>
-          <a:lstStyle/>
-          <a:p>
-            <a:pPr algn="l"/>
-            <a:r>
-              <a:rPr sz="1050" b="0" i="0">
+            <a:ext cx="4114800" cy="323165"/>
+          </a:xfrm>
+          <a:prstGeom prst="rect">
+            <a:avLst/>
+          </a:prstGeom>
+          <a:noFill/>
+        </p:spPr>
+        <p:txBody>
+          <a:bodyPr wrap="square" lIns="0" tIns="0" rIns="0" bIns="0">
+            <a:spAutoFit/>
+          </a:bodyPr>
+          <a:lstStyle/>
+          <a:p>
+            <a:r>
+              <a:rPr lang="en-US" sz="1050" dirty="0">
                 <a:solidFill>
                   <a:srgbClr val="1E293B"/>
                 </a:solidFill>
                 <a:latin typeface="Calibri"/>
               </a:rPr>
-              <a:t>Power BI Desktop
-(local publish)</a:t>
-            </a:r>
+              <a:t>Fabric Power BI </a:t>
+            </a:r>
+          </a:p>
+          <a:p>
+            <a:r>
+              <a:rPr lang="en-US" sz="1050" dirty="0">
+                <a:solidFill>
+                  <a:srgbClr val="1E293B"/>
+                </a:solidFill>
+                <a:latin typeface="Calibri"/>
+              </a:rPr>
+              <a:t>(workspace publish)</a:t>
+            </a:r>
+            <a:endParaRPr sz="1050" dirty="0">
+              <a:solidFill>
+                <a:srgbClr val="1E293B"/>
+              </a:solidFill>
+              <a:latin typeface="Calibri"/>
+            </a:endParaRPr>
           </a:p>
         </p:txBody>
       </p:sp>
@@ -18036,29 +18328,56 @@
         <p:spPr>
           <a:xfrm>
             <a:off x="2834640" y="4901183"/>
-            <a:ext cx="4114800" cy="548640"/>
-          </a:xfrm>
-          <a:prstGeom prst="rect">
-            <a:avLst/>
-          </a:prstGeom>
-          <a:noFill/>
-        </p:spPr>
-        <p:txBody>
-          <a:bodyPr wrap="square" lIns="0" tIns="0" rIns="0" bIns="0">
-            <a:spAutoFit/>
-          </a:bodyPr>
-          <a:lstStyle/>
-          <a:p>
-            <a:pPr algn="l"/>
-            <a:r>
-              <a:rPr sz="1050" b="0" i="0">
+            <a:ext cx="4114800" cy="323165"/>
+          </a:xfrm>
+          <a:prstGeom prst="rect">
+            <a:avLst/>
+          </a:prstGeom>
+          <a:noFill/>
+        </p:spPr>
+        <p:txBody>
+          <a:bodyPr wrap="square" lIns="0" tIns="0" rIns="0" bIns="0">
+            <a:spAutoFit/>
+          </a:bodyPr>
+          <a:lstStyle/>
+          <a:p>
+            <a:pPr algn="l"/>
+            <a:r>
+              <a:rPr sz="1050" b="0" i="0" dirty="0">
                 <a:solidFill>
                   <a:srgbClr val="1E293B"/>
                 </a:solidFill>
                 <a:latin typeface="Calibri"/>
               </a:rPr>
               <a:t>Azure CLI interactive
-(az login)</a:t>
+(</a:t>
+            </a:r>
+            <a:r>
+              <a:rPr sz="1050" b="0" i="0" dirty="0" err="1">
+                <a:solidFill>
+                  <a:srgbClr val="1E293B"/>
+                </a:solidFill>
+                <a:latin typeface="Calibri"/>
+              </a:rPr>
+              <a:t>az</a:t>
+            </a:r>
+            <a:r>
+              <a:rPr sz="1050" b="0" i="0" dirty="0">
+                <a:solidFill>
+                  <a:srgbClr val="1E293B"/>
+                </a:solidFill>
+                <a:latin typeface="Calibri"/>
+              </a:rPr>
+              <a:t> logi</a:t>
+            </a:r>
+            <a:r>
+              <a:rPr sz="1050" dirty="0">
+                <a:solidFill>
+                  <a:srgbClr val="1E293B"/>
+                </a:solidFill>
+                <a:latin typeface="Calibri"/>
+              </a:rPr>
+              <a:t>n)</a:t>
             </a:r>
           </a:p>
         </p:txBody>
@@ -18287,8 +18606,19 @@
                 </a:solidFill>
                 <a:latin typeface="Calibri"/>
               </a:rPr>
-              <a:t>Fabric Data Factory
-Azure DevOps CI/CD</a:t>
+              <a:t>CI/CD pipeline</a:t>
+            </a:r>
+          </a:p>
+          <a:p>
+            <a:pPr algn="l"/>
+            <a:r>
+              <a:rPr sz="1050" b="0" i="0">
+                <a:solidFill>
+                  <a:srgbClr val="1E293B"/>
+                </a:solidFill>
+                <a:latin typeface="Calibri"/>
+              </a:rPr>
+              <a:t>(e.g. Azure DevOps)</a:t>
             </a:r>
           </a:p>
         </p:txBody>
@@ -18390,28 +18720,46 @@
         <p:spPr>
           <a:xfrm>
             <a:off x="566928" y="6291072"/>
-            <a:ext cx="11064240" cy="320040"/>
-          </a:xfrm>
-          <a:prstGeom prst="rect">
-            <a:avLst/>
-          </a:prstGeom>
-          <a:noFill/>
-        </p:spPr>
-        <p:txBody>
-          <a:bodyPr wrap="square" lIns="0" tIns="0" rIns="0" bIns="0">
-            <a:spAutoFit/>
-          </a:bodyPr>
-          <a:lstStyle/>
-          <a:p>
-            <a:pPr algn="l"/>
-            <a:r>
-              <a:rPr sz="1100" b="1" i="0">
+            <a:ext cx="11064240" cy="169277"/>
+          </a:xfrm>
+          <a:prstGeom prst="rect">
+            <a:avLst/>
+          </a:prstGeom>
+          <a:noFill/>
+        </p:spPr>
+        <p:txBody>
+          <a:bodyPr wrap="square" lIns="0" tIns="0" rIns="0" bIns="0">
+            <a:spAutoFit/>
+          </a:bodyPr>
+          <a:lstStyle/>
+          <a:p>
+            <a:pPr algn="l"/>
+            <a:r>
+              <a:rPr sz="1100" b="1" i="0" dirty="0">
                 <a:solidFill>
                   <a:srgbClr val="2D9D78"/>
                 </a:solidFill>
                 <a:latin typeface="Calibri"/>
               </a:rPr>
-              <a:t>Architecture is identical — differences are automation, live data sources, and auth method only.</a:t>
+              <a:t>Architecture maps to modern data Lake</a:t>
+            </a:r>
+            <a:r>
+              <a:rPr lang="en-US" sz="1100" b="1" dirty="0">
+                <a:solidFill>
+                  <a:srgbClr val="2D9D78"/>
+                </a:solidFill>
+                <a:latin typeface="Calibri"/>
+              </a:rPr>
+              <a:t>h</a:t>
+            </a:r>
+            <a:r>
+              <a:rPr sz="1100" b="1" i="0" dirty="0">
+                <a:solidFill>
+                  <a:srgbClr val="2D9D78"/>
+                </a:solidFill>
+                <a:latin typeface="Calibri"/>
+              </a:rPr>
+              <a:t>ouse principles — dbt, SQL views, star schema, BI layer.</a:t>
             </a:r>
           </a:p>
         </p:txBody>
@@ -18935,23 +19283,23 @@
   <we:alternateReferences/>
   <we:properties>
     <we:property name="Microsoft.Office.CampaignId" value="&quot;none&quot;"/>
-    <we:property name="reportUrl" value="&quot;/groups/af757372-574a-4725-b0ef-991838213ca2/reports/1d5493b0-0102-488b-a943-c8943ff1f6fd/0e02becd29a8d1780620?bookmarkGuid=c646a4f7-db74-44df-af28-6c7e6fabfc21&amp;bookmarkUsage=1&amp;ctid=04f991f3-0023-4b95-ab0d-bebbdbc8df14&amp;fromEntryPoint=export&quot;"/>
-    <we:property name="reportState" value="&quot;CONNECTED&quot;"/>
     <we:property name="artifactViewState" value="&quot;live&quot;"/>
-    <we:property name="reportEmbeddedTime" value="&quot;2026-04-26T21:50:41.024Z&quot;"/>
+    <we:property name="backgroundColor" value="&quot;#E6E6E6&quot;"/>
+    <we:property name="bookmark" value="&quot;H4sIAAAAAAAAA+1Y32/TMBD+V5BfeCnISX8k2dtWNgkJoYmiIYSm6mxfOm9pHDnOaKn2v3N2Uka7akPaGAjah8g+n3133313srtiStdVAcv3MEd2wI6MuZqDvXoRsR4rW5lIxCBLBhFmKlMjwRPkQKumctqUNTtYMQd2hu5M1w0U/iASfmFRLkYC8jRSXEZD+imO7LzHoChOYeZ1cihq7LEKbW1KKPQ3bI+gJWcbvOkxXFSFseANTRw49MauSZ3m5Fj0uk9+gHT6GicoXSvlyGOBUsUZpCpKUj6KOanVrULwd6eKPzqYH5vSgS7JjJflmORxP+OJSIciGWX9hA+CXBeuUxHL40VlKWZCYll5yA7VNZQSFQshWKxbj1fscDazOAPXTY83FsemaOY75BPTWIkfMA9LpdNuSTZy6aaysRZLuZwqrEytXc1uCLVTawjToFSauSZopzA3TemmtbJB46QpO7i4n16Yr2OLhK/ygnOS1LqcFV06bpH52EYnwapuiWggLglZjwNtM1ahPVoGKN5ou85J3NuK6G+EgeImUST5MB/1cyEHwEfJMJUD/mC6xwTdzFgtAyL4iGiUnk8ra1Qj3XYMnXgaqvJu1nr/C/mKpqZMoDoCO74A6/4tDq77GW28/KljdQxro/pdlKICoHXq9Wo0HOQ8izLB6Zvy9JkrYI3ltr8b8j399/R/Oj613Mc4EnRdERhzLlOVgojFc3Pfw4O2Au/ilr+UML9/z/49+5+aUS3/d97Zn5f/yl/zt7zMdU2HT5cIdgf5H2QNdDUxKbREu+PmyuZIDxg/mCHd+/0RFF7VOqCxvoVgc3S2fooQv06smYdt3UvKV+DdwHqs9Yn7ZH+6ICp3SS2VXpPx7RZe9a/nvZ0E6/dCSMbPoGjCQ43OfqddG/WqFZP+y5PPMY8Hr+LhS69/3t6Pu0+P5QAiUkmfYySSJAEl4pHffm8eHC6cMIvNmg20izIASFBJjpLzfhThw2+sP027fc/d99xH0CkUktfY1YZM4+oKJJ5CiTt6EbEMSuXzF8ahF+2o4fD/Crv5UbbfAQpFi+PtEQAA&quot;"/>
     <we:property name="creatorSessionId" value="&quot;ba502e7e-07b5-4739-ac41-ac2a56e2226d&quot;"/>
+    <we:property name="creatorTenantId" value="&quot;04f991f3-0023-4b95-ab0d-bebbdbc8df14&quot;"/>
     <we:property name="creatorUserId" value="&quot;10032005BA5268A4&quot;"/>
-    <we:property name="creatorTenantId" value="&quot;04f991f3-0023-4b95-ab0d-bebbdbc8df14&quot;"/>
+    <we:property name="datasetId" value="&quot;1bc9f159-2234-42ac-8da2-ce5c6c94d7e2&quot;"/>
+    <we:property name="embedUrl" value="&quot;/reportEmbed?reportId=1d5493b0-0102-488b-a943-c8943ff1f6fd&amp;groupId=af757372-574a-4725-b0ef-991838213ca2&amp;w=2&amp;config=eyJjbHVzdGVyVXJsIjoiaHR0cHM6Ly9XQUJJLUNBTkFEQS1DRU5UUkFMLUItUFJJTUFSWS1yZWRpcmVjdC5hbmFseXNpcy53aW5kb3dzLm5ldCIsImVtYmVkRmVhdHVyZXMiOnsidXNhZ2VNZXRyaWNzVk5leHQiOnRydWV9fQ%3D%3D&amp;disableSensitivityBanner=true&amp;storytellingChangeViewModeShortcutKeys=true&quot;"/>
+    <we:property name="initialStateBookmark" value="&quot;H4sIAAAAAAAAA+1YbU/bMBD+K5O/7Es3OelLUr6VDqSJ8SKYmKYJVWf7UgxpHDkOo0P8952dVKylAiQYm7b2Q2Sfz/fy3HOW3RumdFXmMD+AGbIttm3M5Qzs5ZuIdVjRyg4P9/ZHx3uTg9H+DolN6bQpKrZ1wxzYKbpTXdWQewsk/HbWYZDnRzD1swzyCjusRFuZAnL9AxtlWnK2xtsOw+syNxa8yRMHDr3ZK1KnOfmO3nfJI0inr/AEpWukHHksUKp4CKmKkpQPYk5qVaMQIlur4k0H92NTONAFufGyDJMs7g55ItK+SAbDbsJ7Qa5z16qI+c51aSk7ynleelRG6goKiYqFFCxWTcQ3bDSdWpyCa6c7S4tjk9ezNfITU1uJx5iFpcJpNycfmXQTWVuLhZxPFJam0q5it4TakTWEaVAqzEwTtBOYmbpwk0rZoLFbFy1c3E/PzfexRcJXecEZSSpdTPO2HHfIfG6yk2BVu0QFFxeErMeBthmr0G7PAxQftF3UJO6sZPQ3wkB5kyiSvJ8NupmQPeCDpJ/KHn+03GOCbmqslgERfEY2Ss8mpTWqlm41h1Y8CY13v2qd/4V8eV1RJVBtgx2fg3X/FgcX5xltvPjlxGoZ1mT1uyhFDUDrvWGiBv1exofRUHD6pjx95Q5YYLka75J8Q/8N/V+OTw33MY6E4lJgzLlMVQoiFq/NfQ8P2hJ8iCvxUsH8/g37N+x/aUY1/I8yMRCQpRE1QdSnn+L4yvxX/pq/EmWmKzI+mSPYNeR/lDXQ9sRJriXaNTdXNkN6qvjBFOne701QemUTgMbqDoLl0eniKUL82rVmFra1jyXfgfcT67AmJu6L/eWcqNwWtVB6QcaPK3hVT697MwneH4SQnJ9CXocnGdn+pF2T9U0jJv23u19jHvfexf23Xv+suR+3nw7LAESkki7HSCRJAkrEA7/9wTo4vHbCXC/3bKBdNASABJXkKDnvRhE+/sb607TbnLmbM/cZdAqN5DXWHUOmdlUJEo+gwDVnEbEMCuXrF8bhLFrTw/5PFBZ8UEG1yPGJ+m1wPwHlNK0B/xEAAA==&quot;"/>
+    <we:property name="isFiltersActionButtonVisible" value="true"/>
+    <we:property name="isVisualContainerHeaderHidden" value="false"/>
     <we:property name="pageDisplayName" value="&quot;Portfolio Overview&quot;"/>
     <we:property name="pageName" value="&quot;0e02becd29a8d1780620&quot;"/>
+    <we:property name="reportEmbeddedTime" value="&quot;2026-04-26T21:50:41.024Z&quot;"/>
     <we:property name="reportName" value="&quot;bis_analytics_report&quot;"/>
-    <we:property name="isVisualContainerHeaderHidden" value="false"/>
-    <we:property name="isFiltersActionButtonVisible" value="true"/>
-    <we:property name="initialStateBookmark" value="&quot;H4sIAAAAAAAAA+1YbU/bMBD+K5O/7Es3OelLUr6VDqSJ8SKYmKYJVWf7UgxpHDkOo0P8952dVKylAiQYm7b2Q2Sfz/fy3HOW3RumdFXmMD+AGbIttm3M5Qzs5ZuIdVjRyg4P9/ZHx3uTg9H+DolN6bQpKrZ1wxzYKbpTXdWQewsk/HbWYZDnRzD1swzyCjusRFuZAnL9AxtlWnK2xtsOw+syNxa8yRMHDr3ZK1KnOfmO3nfJI0inr/AEpWukHHksUKp4CKmKkpQPYk5qVaMQIlur4k0H92NTONAFufGyDJMs7g55ItK+SAbDbsJ7Qa5z16qI+c51aSk7ynleelRG6goKiYqFFCxWTcQ3bDSdWpyCa6c7S4tjk9ezNfITU1uJx5iFpcJpNycfmXQTWVuLhZxPFJam0q5it4TakTWEaVAqzEwTtBOYmbpwk0rZoLFbFy1c3E/PzfexRcJXecEZSSpdTPO2HHfIfG6yk2BVu0QFFxeErMeBthmr0G7PAxQftF3UJO6sZPQ3wkB5kyiSvJ8NupmQPeCDpJ/KHn+03GOCbmqslgERfEY2Ss8mpTWqlm41h1Y8CY13v2qd/4V8eV1RJVBtgx2fg3X/FgcX5xltvPjlxGoZ1mT1uyhFDUDrvWGiBv1exofRUHD6pjx95Q5YYLka75J8Q/8N/V+OTw33MY6E4lJgzLlMVQoiFq/NfQ8P2hJ8iCvxUsH8/g37N+x/aUY1/I8yMRCQpRE1QdSnn+L4yvxX/pq/EmWmKzI+mSPYNeR/lDXQ9sRJriXaNTdXNkN6qvjBFOne701QemUTgMbqDoLl0eniKUL82rVmFra1jyXfgfcT67AmJu6L/eWcqNwWtVB6QcaPK3hVT697MwneH4SQnJ9CXocnGdn+pF2T9U0jJv23u19jHvfexf23Xv+suR+3nw7LAESkki7HSCRJAkrEA7/9wTo4vHbCXC/3bKBdNASABJXkKDnvRhE+/sb607TbnLmbM/cZdAqN5DXWHUOmdlUJEo+gwDVnEbEMCuXrF8bhLFrTw/5PFBZ8UEG1yPGJ+m1wPwHlNK0B/xEAAA==&quot;"/>
-    <we:property name="bookmark" value="&quot;H4sIAAAAAAAAA+1Y32/TMBD+V5BfeCnITtv82NtWmISE0MTQEEJTdbYvnbc0jhxnrEz73zk7KWNdxZCAgaB9iOzz+Xz33Xcnu9dMm7apYPUGlsj22IG1F0twF08EG7G6l6lsXE6KtCxEjlnKp0JMElq1jTe2btneNfPgFuhPTNtBFQyR8OPpiEFVHcEizEqoWhyxBl1ra6jMZ+yVacm7Dm9GDK+ayjoIJo89eAxmL0md5uSCeD6mE0F5c4nHqHwv5cgTiUonBeRaZDlPE05qba8QPduqEkzH42e29mBqOibISszKZFzwTOZTmaXFOOOTKDeVH1Tk6uVV4yg6innVBHD29SXUCjWLIThse4+v2f5i4XABfpi+vLM4s1W33CI/tp1T+BbLuFR741d0Rqn8XHXOYa1Wc42NbY1v2Q2hduQsYRqVars0BO0clrar/bzVLmocdvUAFw/TM/tp5pDw1UFwSpLW1ItqSMctMu/66BQ4PSxRwuU5IRtwoG3WaXQHqwjFC+PWOUlGGxH9jTBQ3CQSik/LdFxKNQGeZtNcTfiD6Z4RdAvrjIqI4E9Eo81y3jirO+U3YxjE81h/97M2+l/IV3UtZQL1AbjZGTj/b3Fw3c9o4/k3HWtgWB/V76IUFQCtT4pMp9NJyQtRSE7fnOePXAFrLDf9vSPf0X9H/1/Hp577mAipuZKYcK5ynYNM5GNzP8CDroHg4oa/lLCwf8f+Hft/NaN6/otSphLKXFARiCn9NMdH5r8O1/wNL0vTkvH5CsFtIf+DrIGhJo4ro9BtubmyJdJTJQwWSPf+YILCa3oHDLa3ENwdnayfIsSvQ2eXcdvwZgoVeD+wEet94iHZ78+IykNSa23WZHy1gVf743nvJ/H070JIh59A1cUnGdl+bXwf9XUvJv2nhx8SnkyeJdOnQf+0vx8PnxErAaTQ2ZijkFmWgZZJGrZ/Nw8er7y0V3drNtJOFACQoVYcFedjIfDhN9afpt2u5+567k/QKRZS0NjWhmzn2wYUHkGNW3oRsQxqHfIXx7EXbanh+P8Ku/latl8AURVnwtcRAAA=&quot;"/>
-    <we:property name="datasetId" value="&quot;1bc9f159-2234-42ac-8da2-ce5c6c94d7e2&quot;"/>
-    <we:property name="embedUrl" value="&quot;/reportEmbed?reportId=1d5493b0-0102-488b-a943-c8943ff1f6fd&amp;groupId=af757372-574a-4725-b0ef-991838213ca2&amp;w=2&amp;config=eyJjbHVzdGVyVXJsIjoiaHR0cHM6Ly9XQUJJLUNBTkFEQS1DRU5UUkFMLUItUFJJTUFSWS1yZWRpcmVjdC5hbmFseXNpcy53aW5kb3dzLm5ldCIsImVtYmVkRmVhdHVyZXMiOnsidXNhZ2VNZXRyaWNzVk5leHQiOnRydWV9fQ%3D%3D&amp;disableSensitivityBanner=true&amp;storytellingChangeViewModeShortcutKeys=true&quot;"/>
-    <we:property name="backgroundColor" value="&quot;#E6E6E6&quot;"/>
+    <we:property name="reportState" value="&quot;CONNECTED&quot;"/>
+    <we:property name="reportUrl" value="&quot;/groups/af757372-574a-4725-b0ef-991838213ca2/reports/1d5493b0-0102-488b-a943-c8943ff1f6fd/0e02becd29a8d1780620?bookmarkGuid=c646a4f7-db74-44df-af28-6c7e6fabfc21&amp;bookmarkUsage=1&amp;ctid=04f991f3-0023-4b95-ab0d-bebbdbc8df14&amp;fromEntryPoint=export&quot;"/>
   </we:properties>
   <we:bindings/>
   <we:snapshot xmlns:r="http://schemas.openxmlformats.org/officeDocument/2006/relationships"/>

--- a/docs/BIS_Portfolio_Deck.pptx
+++ b/docs/BIS_Portfolio_Deck.pptx
@@ -312,7 +312,7 @@
           <a:p>
             <a:fld id="{5BCAD085-E8A6-8845-BD4E-CB4CCA059FC4}" type="datetimeFigureOut">
               <a:rPr lang="en-US" smtClean="0"/>
-              <a:t>5/4/2026</a:t>
+              <a:t>5/6/2026</a:t>
             </a:fld>
             <a:endParaRPr lang="en-US"/>
           </a:p>
@@ -480,7 +480,7 @@
           <a:p>
             <a:fld id="{5BCAD085-E8A6-8845-BD4E-CB4CCA059FC4}" type="datetimeFigureOut">
               <a:rPr lang="en-US" smtClean="0"/>
-              <a:t>5/4/2026</a:t>
+              <a:t>5/6/2026</a:t>
             </a:fld>
             <a:endParaRPr lang="en-US"/>
           </a:p>
@@ -658,7 +658,7 @@
           <a:p>
             <a:fld id="{5BCAD085-E8A6-8845-BD4E-CB4CCA059FC4}" type="datetimeFigureOut">
               <a:rPr lang="en-US" smtClean="0"/>
-              <a:t>5/4/2026</a:t>
+              <a:t>5/6/2026</a:t>
             </a:fld>
             <a:endParaRPr lang="en-US"/>
           </a:p>
@@ -826,7 +826,7 @@
           <a:p>
             <a:fld id="{5BCAD085-E8A6-8845-BD4E-CB4CCA059FC4}" type="datetimeFigureOut">
               <a:rPr lang="en-US" smtClean="0"/>
-              <a:t>5/4/2026</a:t>
+              <a:t>5/6/2026</a:t>
             </a:fld>
             <a:endParaRPr lang="en-US"/>
           </a:p>
@@ -1071,7 +1071,7 @@
           <a:p>
             <a:fld id="{5BCAD085-E8A6-8845-BD4E-CB4CCA059FC4}" type="datetimeFigureOut">
               <a:rPr lang="en-US" smtClean="0"/>
-              <a:t>5/4/2026</a:t>
+              <a:t>5/6/2026</a:t>
             </a:fld>
             <a:endParaRPr lang="en-US"/>
           </a:p>
@@ -1356,7 +1356,7 @@
           <a:p>
             <a:fld id="{5BCAD085-E8A6-8845-BD4E-CB4CCA059FC4}" type="datetimeFigureOut">
               <a:rPr lang="en-US" smtClean="0"/>
-              <a:t>5/4/2026</a:t>
+              <a:t>5/6/2026</a:t>
             </a:fld>
             <a:endParaRPr lang="en-US"/>
           </a:p>
@@ -1775,7 +1775,7 @@
           <a:p>
             <a:fld id="{5BCAD085-E8A6-8845-BD4E-CB4CCA059FC4}" type="datetimeFigureOut">
               <a:rPr lang="en-US" smtClean="0"/>
-              <a:t>5/4/2026</a:t>
+              <a:t>5/6/2026</a:t>
             </a:fld>
             <a:endParaRPr lang="en-US"/>
           </a:p>
@@ -1892,7 +1892,7 @@
           <a:p>
             <a:fld id="{5BCAD085-E8A6-8845-BD4E-CB4CCA059FC4}" type="datetimeFigureOut">
               <a:rPr lang="en-US" smtClean="0"/>
-              <a:t>5/4/2026</a:t>
+              <a:t>5/6/2026</a:t>
             </a:fld>
             <a:endParaRPr lang="en-US"/>
           </a:p>
@@ -1987,7 +1987,7 @@
           <a:p>
             <a:fld id="{5BCAD085-E8A6-8845-BD4E-CB4CCA059FC4}" type="datetimeFigureOut">
               <a:rPr lang="en-US" smtClean="0"/>
-              <a:t>5/4/2026</a:t>
+              <a:t>5/6/2026</a:t>
             </a:fld>
             <a:endParaRPr lang="en-US"/>
           </a:p>
@@ -2262,7 +2262,7 @@
           <a:p>
             <a:fld id="{5BCAD085-E8A6-8845-BD4E-CB4CCA059FC4}" type="datetimeFigureOut">
               <a:rPr lang="en-US" smtClean="0"/>
-              <a:t>5/4/2026</a:t>
+              <a:t>5/6/2026</a:t>
             </a:fld>
             <a:endParaRPr lang="en-US"/>
           </a:p>
@@ -2514,7 +2514,7 @@
           <a:p>
             <a:fld id="{5BCAD085-E8A6-8845-BD4E-CB4CCA059FC4}" type="datetimeFigureOut">
               <a:rPr lang="en-US" smtClean="0"/>
-              <a:t>5/4/2026</a:t>
+              <a:t>5/6/2026</a:t>
             </a:fld>
             <a:endParaRPr lang="en-US"/>
           </a:p>
@@ -2725,7 +2725,7 @@
           <a:p>
             <a:fld id="{5BCAD085-E8A6-8845-BD4E-CB4CCA059FC4}" type="datetimeFigureOut">
               <a:rPr lang="en-US" smtClean="0"/>
-              <a:t>5/4/2026</a:t>
+              <a:t>5/6/2026</a:t>
             </a:fld>
             <a:endParaRPr lang="en-US"/>
           </a:p>
@@ -3705,8 +3705,8 @@
           <a:noFill/>
         </p:spPr>
       </p:pic>
-      <mc:AlternateContent xmlns:mc="http://schemas.openxmlformats.org/markup-compatibility/2006">
-        <mc:Choice xmlns:we="http://schemas.microsoft.com/office/webextensions/webextension/2010/11" xmlns:pca="http://schemas.microsoft.com/office/powerpoint/2013/contentapp" Requires="we pca">
+      <mc:AlternateContent xmlns:mc="http://schemas.openxmlformats.org/markup-compatibility/2006" xmlns:we="http://schemas.microsoft.com/office/webextensions/webextension/2010/11" xmlns:pca="http://schemas.microsoft.com/office/powerpoint/2013/contentapp">
+        <mc:Choice Requires="we pca">
           <p:graphicFrame>
             <p:nvGraphicFramePr>
               <p:cNvPr id="2" name="Add-in" descr="Add-in content for Microsoft Power BI."/>
@@ -3726,7 +3726,7 @@
             </a:graphic>
           </p:graphicFrame>
         </mc:Choice>
-        <mc:Fallback>
+        <mc:Fallback xmlns="">
           <p:pic>
             <p:nvPicPr>
               <p:cNvPr id="2" name="Add-in" descr="Add-in content for Microsoft Power BI."/>
@@ -3753,8 +3753,8 @@
           </p:pic>
         </mc:Fallback>
       </mc:AlternateContent>
-      <mc:AlternateContent xmlns:mc="http://schemas.openxmlformats.org/markup-compatibility/2006">
-        <mc:Choice xmlns:we="http://schemas.microsoft.com/office/webextensions/webextension/2010/11" xmlns:pca="http://schemas.microsoft.com/office/powerpoint/2013/contentapp" Requires="we pca">
+      <mc:AlternateContent xmlns:mc="http://schemas.openxmlformats.org/markup-compatibility/2006" xmlns:we="http://schemas.microsoft.com/office/webextensions/webextension/2010/11" xmlns:pca="http://schemas.microsoft.com/office/powerpoint/2013/contentapp">
+        <mc:Choice Requires="we pca">
           <p:graphicFrame>
             <p:nvGraphicFramePr>
               <p:cNvPr id="3" name="Add-in" descr="Add-in content for Microsoft Power BI.">
@@ -3780,7 +3780,7 @@
             </a:graphic>
           </p:graphicFrame>
         </mc:Choice>
-        <mc:Fallback>
+        <mc:Fallback xmlns="">
           <p:pic>
             <p:nvPicPr>
               <p:cNvPr id="3" name="Add-in" descr="Add-in content for Microsoft Power BI.">
@@ -3976,41 +3976,6 @@
       </p:sp>
       <p:sp>
         <p:nvSpPr>
-          <p:cNvPr id="5" name="TextBox 4"/>
-          <p:cNvSpPr txBox="1"/>
-          <p:nvPr/>
-        </p:nvSpPr>
-        <p:spPr>
-          <a:xfrm>
-            <a:off x="502920" y="1965960"/>
-            <a:ext cx="8686800" cy="640080"/>
-          </a:xfrm>
-          <a:prstGeom prst="rect">
-            <a:avLst/>
-          </a:prstGeom>
-          <a:noFill/>
-        </p:spPr>
-        <p:txBody>
-          <a:bodyPr wrap="square" lIns="0" tIns="0" rIns="0" bIns="0">
-            <a:spAutoFit/>
-          </a:bodyPr>
-          <a:lstStyle/>
-          <a:p>
-            <a:pPr algn="l"/>
-            <a:r>
-              <a:rPr sz="1400" b="0" i="0">
-                <a:solidFill>
-                  <a:srgbClr val="A0B4CC"/>
-                </a:solidFill>
-                <a:latin typeface="Calibri"/>
-              </a:rPr>
-              <a:t>I built this pipeline specifically to demonstrate readiness for the BIS Banking Department analytics role.</a:t>
-            </a:r>
-          </a:p>
-        </p:txBody>
-      </p:sp>
-      <p:sp>
-        <p:nvSpPr>
           <p:cNvPr id="6" name="Rectangle 5"/>
           <p:cNvSpPr/>
           <p:nvPr/>
@@ -4413,76 +4378,6 @@
           <a:p>
             <a:pPr algn="ctr"/>
             <a:endParaRPr/>
-          </a:p>
-        </p:txBody>
-      </p:sp>
-      <p:sp>
-        <p:nvSpPr>
-          <p:cNvPr id="16" name="TextBox 15"/>
-          <p:cNvSpPr txBox="1"/>
-          <p:nvPr/>
-        </p:nvSpPr>
-        <p:spPr>
-          <a:xfrm>
-            <a:off x="502920" y="5532120"/>
-            <a:ext cx="7315200" cy="502920"/>
-          </a:xfrm>
-          <a:prstGeom prst="rect">
-            <a:avLst/>
-          </a:prstGeom>
-          <a:noFill/>
-        </p:spPr>
-        <p:txBody>
-          <a:bodyPr wrap="square" lIns="0" tIns="0" rIns="0" bIns="0">
-            <a:spAutoFit/>
-          </a:bodyPr>
-          <a:lstStyle/>
-          <a:p>
-            <a:pPr algn="l"/>
-            <a:r>
-              <a:rPr sz="2200" b="1" i="0">
-                <a:solidFill>
-                  <a:srgbClr val="E8A020"/>
-                </a:solidFill>
-                <a:latin typeface="Calibri"/>
-              </a:rPr>
-              <a:t>Thank you</a:t>
-            </a:r>
-          </a:p>
-        </p:txBody>
-      </p:sp>
-      <p:sp>
-        <p:nvSpPr>
-          <p:cNvPr id="17" name="TextBox 16"/>
-          <p:cNvSpPr txBox="1"/>
-          <p:nvPr/>
-        </p:nvSpPr>
-        <p:spPr>
-          <a:xfrm>
-            <a:off x="502920" y="6053328"/>
-            <a:ext cx="9144000" cy="411480"/>
-          </a:xfrm>
-          <a:prstGeom prst="rect">
-            <a:avLst/>
-          </a:prstGeom>
-          <a:noFill/>
-        </p:spPr>
-        <p:txBody>
-          <a:bodyPr wrap="square" lIns="0" tIns="0" rIns="0" bIns="0">
-            <a:spAutoFit/>
-          </a:bodyPr>
-          <a:lstStyle/>
-          <a:p>
-            <a:pPr algn="l"/>
-            <a:r>
-              <a:rPr sz="1200" b="0" i="0">
-                <a:solidFill>
-                  <a:srgbClr val="A0B4CC"/>
-                </a:solidFill>
-                <a:latin typeface="Calibri"/>
-              </a:rPr>
-              <a:t>I look forward to contributing to the BIS Banking Department analytics team.</a:t>
-            </a:r>
           </a:p>
         </p:txBody>
       </p:sp>
@@ -18896,8 +18791,8 @@
           <a:noFill/>
         </p:spPr>
       </p:pic>
-      <mc:AlternateContent xmlns:mc="http://schemas.openxmlformats.org/markup-compatibility/2006">
-        <mc:Choice xmlns:we="http://schemas.microsoft.com/office/webextensions/webextension/2010/11" xmlns:pca="http://schemas.microsoft.com/office/powerpoint/2013/contentapp" Requires="we pca">
+      <mc:AlternateContent xmlns:mc="http://schemas.openxmlformats.org/markup-compatibility/2006" xmlns:we="http://schemas.microsoft.com/office/webextensions/webextension/2010/11" xmlns:pca="http://schemas.microsoft.com/office/powerpoint/2013/contentapp">
+        <mc:Choice Requires="we pca">
           <p:graphicFrame>
             <p:nvGraphicFramePr>
               <p:cNvPr id="2" name="Add-in" descr="Add-in content for Microsoft Power BI."/>
@@ -18917,7 +18812,7 @@
             </a:graphic>
           </p:graphicFrame>
         </mc:Choice>
-        <mc:Fallback>
+        <mc:Fallback xmlns="">
           <p:pic>
             <p:nvPicPr>
               <p:cNvPr id="2" name="Add-in" descr="Add-in content for Microsoft Power BI."/>

--- a/docs/BIS_Portfolio_Deck.pptx
+++ b/docs/BIS_Portfolio_Deck.pptx
@@ -312,7 +312,7 @@
           <a:p>
             <a:fld id="{5BCAD085-E8A6-8845-BD4E-CB4CCA059FC4}" type="datetimeFigureOut">
               <a:rPr lang="en-US" smtClean="0"/>
-              <a:t>5/6/2026</a:t>
+              <a:t>5/9/2026</a:t>
             </a:fld>
             <a:endParaRPr lang="en-US"/>
           </a:p>
@@ -480,7 +480,7 @@
           <a:p>
             <a:fld id="{5BCAD085-E8A6-8845-BD4E-CB4CCA059FC4}" type="datetimeFigureOut">
               <a:rPr lang="en-US" smtClean="0"/>
-              <a:t>5/6/2026</a:t>
+              <a:t>5/9/2026</a:t>
             </a:fld>
             <a:endParaRPr lang="en-US"/>
           </a:p>
@@ -658,7 +658,7 @@
           <a:p>
             <a:fld id="{5BCAD085-E8A6-8845-BD4E-CB4CCA059FC4}" type="datetimeFigureOut">
               <a:rPr lang="en-US" smtClean="0"/>
-              <a:t>5/6/2026</a:t>
+              <a:t>5/9/2026</a:t>
             </a:fld>
             <a:endParaRPr lang="en-US"/>
           </a:p>
@@ -826,7 +826,7 @@
           <a:p>
             <a:fld id="{5BCAD085-E8A6-8845-BD4E-CB4CCA059FC4}" type="datetimeFigureOut">
               <a:rPr lang="en-US" smtClean="0"/>
-              <a:t>5/6/2026</a:t>
+              <a:t>5/9/2026</a:t>
             </a:fld>
             <a:endParaRPr lang="en-US"/>
           </a:p>
@@ -1071,7 +1071,7 @@
           <a:p>
             <a:fld id="{5BCAD085-E8A6-8845-BD4E-CB4CCA059FC4}" type="datetimeFigureOut">
               <a:rPr lang="en-US" smtClean="0"/>
-              <a:t>5/6/2026</a:t>
+              <a:t>5/9/2026</a:t>
             </a:fld>
             <a:endParaRPr lang="en-US"/>
           </a:p>
@@ -1356,7 +1356,7 @@
           <a:p>
             <a:fld id="{5BCAD085-E8A6-8845-BD4E-CB4CCA059FC4}" type="datetimeFigureOut">
               <a:rPr lang="en-US" smtClean="0"/>
-              <a:t>5/6/2026</a:t>
+              <a:t>5/9/2026</a:t>
             </a:fld>
             <a:endParaRPr lang="en-US"/>
           </a:p>
@@ -1775,7 +1775,7 @@
           <a:p>
             <a:fld id="{5BCAD085-E8A6-8845-BD4E-CB4CCA059FC4}" type="datetimeFigureOut">
               <a:rPr lang="en-US" smtClean="0"/>
-              <a:t>5/6/2026</a:t>
+              <a:t>5/9/2026</a:t>
             </a:fld>
             <a:endParaRPr lang="en-US"/>
           </a:p>
@@ -1892,7 +1892,7 @@
           <a:p>
             <a:fld id="{5BCAD085-E8A6-8845-BD4E-CB4CCA059FC4}" type="datetimeFigureOut">
               <a:rPr lang="en-US" smtClean="0"/>
-              <a:t>5/6/2026</a:t>
+              <a:t>5/9/2026</a:t>
             </a:fld>
             <a:endParaRPr lang="en-US"/>
           </a:p>
@@ -1987,7 +1987,7 @@
           <a:p>
             <a:fld id="{5BCAD085-E8A6-8845-BD4E-CB4CCA059FC4}" type="datetimeFigureOut">
               <a:rPr lang="en-US" smtClean="0"/>
-              <a:t>5/6/2026</a:t>
+              <a:t>5/9/2026</a:t>
             </a:fld>
             <a:endParaRPr lang="en-US"/>
           </a:p>
@@ -2262,7 +2262,7 @@
           <a:p>
             <a:fld id="{5BCAD085-E8A6-8845-BD4E-CB4CCA059FC4}" type="datetimeFigureOut">
               <a:rPr lang="en-US" smtClean="0"/>
-              <a:t>5/6/2026</a:t>
+              <a:t>5/9/2026</a:t>
             </a:fld>
             <a:endParaRPr lang="en-US"/>
           </a:p>
@@ -2514,7 +2514,7 @@
           <a:p>
             <a:fld id="{5BCAD085-E8A6-8845-BD4E-CB4CCA059FC4}" type="datetimeFigureOut">
               <a:rPr lang="en-US" smtClean="0"/>
-              <a:t>5/6/2026</a:t>
+              <a:t>5/9/2026</a:t>
             </a:fld>
             <a:endParaRPr lang="en-US"/>
           </a:p>
@@ -2725,7 +2725,7 @@
           <a:p>
             <a:fld id="{5BCAD085-E8A6-8845-BD4E-CB4CCA059FC4}" type="datetimeFigureOut">
               <a:rPr lang="en-US" smtClean="0"/>
-              <a:t>5/6/2026</a:t>
+              <a:t>5/9/2026</a:t>
             </a:fld>
             <a:endParaRPr lang="en-US"/>
           </a:p>
@@ -4147,7 +4147,7 @@
         <p:spPr>
           <a:xfrm>
             <a:off x="1920240" y="3474720"/>
-            <a:ext cx="8686800" cy="402336"/>
+            <a:ext cx="8686800" cy="184666"/>
           </a:xfrm>
           <a:prstGeom prst="rect">
             <a:avLst/>
@@ -4162,13 +4162,13 @@
           <a:p>
             <a:pPr algn="l"/>
             <a:r>
-              <a:rPr sz="1200" b="0" i="0">
+              <a:rPr sz="1200" b="0" i="0" dirty="0">
                 <a:solidFill>
                   <a:srgbClr val="FFFFFF"/>
                 </a:solidFill>
                 <a:latin typeface="Calibri"/>
               </a:rPr>
-              <a:t>Senior Business Data Analyst — BIS Banking Department</a:t>
+              <a:t>Business Data Analyst</a:t>
             </a:r>
           </a:p>
         </p:txBody>
@@ -4217,7 +4217,7 @@
         <p:spPr>
           <a:xfrm>
             <a:off x="1920240" y="4041648"/>
-            <a:ext cx="8686800" cy="402336"/>
+            <a:ext cx="8686800" cy="184666"/>
           </a:xfrm>
           <a:prstGeom prst="rect">
             <a:avLst/>
@@ -4232,13 +4232,13 @@
           <a:p>
             <a:pPr algn="l"/>
             <a:r>
-              <a:rPr sz="1200" b="0" i="0">
+              <a:rPr sz="1200" b="0" i="0" dirty="0">
                 <a:solidFill>
                   <a:srgbClr val="FFFFFF"/>
                 </a:solidFill>
                 <a:latin typeface="Calibri"/>
               </a:rPr>
-              <a:t>MS Fabric  ·  dbt Core  ·  Power BI  ·  T-SQL  ·  Python</a:t>
+              <a:t>MS Fabric  ·  dbt Core  ·  Power BI  ·  T-SQL </a:t>
             </a:r>
           </a:p>
         </p:txBody>
@@ -4287,7 +4287,7 @@
         <p:spPr>
           <a:xfrm>
             <a:off x="1920240" y="4608576"/>
-            <a:ext cx="8686800" cy="184666"/>
+            <a:ext cx="8686800" cy="369332"/>
           </a:xfrm>
           <a:prstGeom prst="rect">
             <a:avLst/>
@@ -4326,7 +4326,26 @@
                 </a:solidFill>
                 <a:latin typeface="Calibri"/>
               </a:rPr>
-              <a:t>in the Git Hub repository</a:t>
+              <a:t>in the Git Hub repository:</a:t>
+            </a:r>
+          </a:p>
+          <a:p>
+            <a:r>
+              <a:rPr lang="en-GB" sz="1200" dirty="0">
+                <a:solidFill>
+                  <a:srgbClr val="FFFFFF"/>
+                </a:solidFill>
+                <a:hlinkClick r:id="rId2"/>
+              </a:rPr>
+              <a:t>https://github.com/gny-analytics/BIS_Analytics_Pipeline/tree/main</a:t>
+            </a:r>
+            <a:r>
+              <a:rPr lang="en-GB" sz="1200" dirty="0">
+                <a:solidFill>
+                  <a:srgbClr val="FFFFFF"/>
+                </a:solidFill>
+              </a:rPr>
+              <a:t>  </a:t>
             </a:r>
             <a:endParaRPr sz="1200" b="0" i="0" dirty="0">
               <a:solidFill>
@@ -19236,23 +19255,23 @@
   <we:alternateReferences/>
   <we:properties>
     <we:property name="Microsoft.Office.CampaignId" value="&quot;none&quot;"/>
-    <we:property name="reportUrl" value="&quot;/groups/af757372-574a-4725-b0ef-991838213ca2/reports/1d5493b0-0102-488b-a943-c8943ff1f6fd/5f57c4a1a6c45018354c?bookmarkGuid=6d6235c1-fcd7-4199-ad5b-179596412b56&amp;bookmarkUsage=1&amp;ctid=04f991f3-0023-4b95-ab0d-bebbdbc8df14&amp;fromEntryPoint=export&quot;"/>
-    <we:property name="reportState" value="&quot;CONNECTED&quot;"/>
     <we:property name="artifactViewState" value="&quot;live&quot;"/>
-    <we:property name="reportEmbeddedTime" value="&quot;2026-04-26T21:49:27.262Z&quot;"/>
+    <we:property name="backgroundColor" value="&quot;#E6E6E6&quot;"/>
+    <we:property name="bookmark" value="&quot;H4sIAAAAAAAAA+VYbW/bNhD+K4O+5IszUG9++9a4CTBg6LI5yDAMhnAizw4bSdQoKo0b+L/vSMmO4ziOm9ZusQVBQB6Pp3vuHh6PefCErMoM5h8gR2/onSl1m4O+/cn3Ol7RyCIhgDOWxjztd3thl0dpSquqNFIVlTd88AzoGZprWdWQWUMk/HvS8SDLLmFmZ1PIKux4JepKFZDJz9go05LRNS46Ht6XmdJgTY4NGLRm70id5uSC/3NIXwRu5B2OkZtGGk/jHo/AB3IpZn4/jCNOalWj4DzbqmJNu8+PVGFAFvQZKxt0oyiAmBHKuBsy1hWEk+RTmZlWJZ2f35ea0BHmeWmDMyJfZ0pLDpnnUGisGqcfvJHK6tyNzp/Ix6rWHP/AqVsqjDRzsjTlJuG11ljweSKwVJU0lbeg2FxqRZFzSgIhSyoKUN0s3ahPI43kg/CGbNFZufVO3EHBSbrp07vZTOMMTDs9P7TDhcolZTyBXNWFSSqhncZFXbRZZM9hTEhSyWKWtSx5TNhVg45ndUUpQXEGenQD2lg6ph8p7zZLtFtpgfps7hL1XuolY4LOBrAfMRqLyZLptPHjGpdbqjWoDs6tycIux33ejcJBHEdRGLDAZ12fvXomrlT5gTLS6FiV6+VBpgRcaJU75bbiVHX6T42EajM34+UCjX9fDnZZsmRfIRYyT7gNMuoSLL6O15DHnZJ2x3R9x/YYPW6jtIwxo3zsH/9m4lzbiDUvzTxx9ZXkS28kZqRI3/ntaPRdeTh9K1Up2d7QZ44tTaiCtQjvmxMy9OcNneg2toWQS1C/bECovnH4HQZIM3x5+4qiC/szWXxdnX8WhR2+vVzgv929s5c/TkHPfxCXiPR2///3AjSWsOf3/61rz4qCfgpBgNALMYwGQS8K0D9iD2aJJ2z3uQFgKisynswR9BbWvZouaMk4ziRH3Sqt587LkTpoO5ghtaPWBMErGwckVo8heDr6ouvQAftuJfdpCOnj15DV7qVAtn+VpkH90IhJ/+TiL2o4otMgPrH6k4Yh7Z+Ox4Mo7IWhCP0eMgj8yB+ERyQKvZFMklOrpGmeZCDo4G0ihipR00c6fSFnKseVg7MkX2fJVlTHYky+M36vE8YqGpnjCdEmPmXhaehfMTZ0vxsU6lhl2BK9XAkXX3TE2c7L97RDqE/FybIdeLnw+puF98Ake/HpsArdwV1onw3TvoBuxIQIODA/CjHtvXo6j3Fl74PHKGMfQvtc1IdofvZxcbWc1vwWzVvqy1vf0Efg9HN0h3gTv82Tht/MBzHAiMVxGkTdAQtDdPze3bThvUnVRtO2aK6zbUVe1aYqgeMlFLilVhHHoBA22zvrlfvX26pULRb/Apos8tzyEwAA&quot;"/>
     <we:property name="creatorSessionId" value="&quot;e438f960-d861-43a2-98b5-810e1b351479&quot;"/>
+    <we:property name="creatorTenantId" value="&quot;04f991f3-0023-4b95-ab0d-bebbdbc8df14&quot;"/>
     <we:property name="creatorUserId" value="&quot;10032005BA5268A4&quot;"/>
-    <we:property name="creatorTenantId" value="&quot;04f991f3-0023-4b95-ab0d-bebbdbc8df14&quot;"/>
+    <we:property name="datasetId" value="&quot;1bc9f159-2234-42ac-8da2-ce5c6c94d7e2&quot;"/>
+    <we:property name="embedUrl" value="&quot;/reportEmbed?reportId=1d5493b0-0102-488b-a943-c8943ff1f6fd&amp;groupId=af757372-574a-4725-b0ef-991838213ca2&amp;w=2&amp;config=eyJjbHVzdGVyVXJsIjoiaHR0cHM6Ly9XQUJJLUNBTkFEQS1DRU5UUkFMLUItUFJJTUFSWS1yZWRpcmVjdC5hbmFseXNpcy53aW5kb3dzLm5ldCIsImVtYmVkRmVhdHVyZXMiOnsidXNhZ2VNZXRyaWNzVk5leHQiOnRydWV9fQ%3D%3D&amp;disableSensitivityBanner=true&amp;storytellingChangeViewModeShortcutKeys=true&quot;"/>
+    <we:property name="initialStateBookmark" value="&quot;H4sIAAAAAAAAA+VYbU/jRhD+K5W/8CVUfk1IvkEuSNX1gF4QVVVF1nh3HPawve56zZGi/PfOrp0QciHk6CV3ahFC69nZ2ZlnnhmPeXS4qMoMZheQozNwzqS8y0Hd/eQ5HadoZZeX7z+cfnwfX5x+GJFYllrIonIGj44GNUV9I6oaMmOBhH9OOg5k2RVMzVMKWYUdp0RVyQIy8Tc2yrSlVY3zjoMPZSYVGJNjDRqN2XtSp2e62/s5oBuBaXGPY2S6kUZp1GMheNBlYeR6J0EUMlKrGgXr2UYVY9peP5SFBlHQNUbW74ahD5GbnHSjbuC6XZ4kRp6KTLcqyWz0UCqKjmKelQaVIfk6lUowyBwbhcKqcfrRGcqszu1q9Ew+lrVi+BFTu1VooWdkKWU6ZrVSWLBZzLGUldCVMydsrpQk5KwSR8jiigCqm61b+XmokHzgzsCdd5ZunfJ7KBhJ1306nU4VTkG3j6N9O1zIXFDGY8hlXei44spqnNdFm0X3yzAmJKlEMc1aljwl7LqJjmV1RSlBfgZqeAtKGzomnyjvJkt0WiqO6mxmE/VOqAVj/M5aYD8iGvPJgul08NMKl1uqNVHtnVuTudmOTlg3DPpRFIaB7/qe2/XcV2viWpYXlJFGx6jcLAqZEnCuZG6V21ZT1clfNVJU67kZLzZo/dtisc2SIfsyYi7ymBmQUZVg4us4DXlslbQn0tUTmzF6OkZpGWNG+dgd/+bBuraGNSv1LLaNleQLbwRmpEj3XB6MvksP07dSlZLtDDzXsqWByl9BeNeckKHfb6miW2wLLhZB/bIWQvWN4bcxQJLhy8eXFJ2bn8n83/X5L1DY4tvLDf7bvXd28scqqNkP4hKR3pz//74AtSHs6OG/9dozIv8kAd9H6AUYhH2/F/roHXAGM8TjZvpcCyAVFRmPZwhqA+teTRe0ZBxngqFqlVZz5+RIE7RZTJHGUWOCwisbBwRWTxA8X33V69AG9t1a7nMI6fIbyGr7pUC2fxW6ifqxEZP+0fkfNHCEx350ZPQnDUPaPx3H9YD3MXSjKPHDbt8NAuyZ49vLBh90ItfKxo456QmHbuhy7jNwvTDApPcq7Q7RYugjTMc5jWSKnuMMOBX4OrJaajO47dJY9tGsd3FxuZ3U7A71W2rorTO/t978DhHdPmb4t3nSjPHMD4NeEPDA66ELvhd6/eCAbXUX16GKZfrUfL+SHZXtrHvvqflqT90Y1aH6a74Vv9fbq1HUIscjarLRsRscB9616w7s71rD7Rhl2IBeLrnFFy1xNnfxd3SCy8/F0WJ4/q6V+gykF4t0Cd3eXbAAW0g20FbWuiqB4RUUuAF9Qh0KbupjawbM/9ccewcVjGi/c3bQb537B7kHOugaFAAA&quot;"/>
+    <we:property name="isFiltersActionButtonVisible" value="true"/>
+    <we:property name="isVisualContainerHeaderHidden" value="false"/>
     <we:property name="pageDisplayName" value="&quot;Maturity &amp; Counterparty&quot;"/>
     <we:property name="pageName" value="&quot;5f57c4a1a6c45018354c&quot;"/>
+    <we:property name="reportEmbeddedTime" value="&quot;2026-04-26T21:49:27.262Z&quot;"/>
     <we:property name="reportName" value="&quot;bis_analytics_report&quot;"/>
-    <we:property name="isVisualContainerHeaderHidden" value="false"/>
-    <we:property name="isFiltersActionButtonVisible" value="true"/>
-    <we:property name="initialStateBookmark" value="&quot;H4sIAAAAAAAAA+VYbU/jRhD+K5W/8CVUfk1IvkEuSNX1gF4QVVVF1nh3HPawve56zZGi/PfOrp0QciHk6CV3ahFC69nZ2ZlnnhmPeXS4qMoMZheQozNwzqS8y0Hd/eQ5HadoZZeX7z+cfnwfX5x+GJFYllrIonIGj44GNUV9I6oaMmOBhH9OOg5k2RVMzVMKWYUdp0RVyQIy8Tc2yrSlVY3zjoMPZSYVGJNjDRqN2XtSp2e62/s5oBuBaXGPY2S6kUZp1GMheNBlYeR6J0EUMlKrGgXr2UYVY9peP5SFBlHQNUbW74ahD5GbnHSjbuC6XZ4kRp6KTLcqyWz0UCqKjmKelQaVIfk6lUowyBwbhcKqcfrRGcqszu1q9Ew+lrVi+BFTu1VooWdkKWU6ZrVSWLBZzLGUldCVMydsrpQk5KwSR8jiigCqm61b+XmokHzgzsCdd5ZunfJ7KBhJ1306nU4VTkG3j6N9O1zIXFDGY8hlXei44spqnNdFm0X3yzAmJKlEMc1aljwl7LqJjmV1RSlBfgZqeAtKGzomnyjvJkt0WiqO6mxmE/VOqAVj/M5aYD8iGvPJgul08NMKl1uqNVHtnVuTudmOTlg3DPpRFIaB7/qe2/XcV2viWpYXlJFGx6jcLAqZEnCuZG6V21ZT1clfNVJU67kZLzZo/dtisc2SIfsyYi7ymBmQUZVg4us4DXlslbQn0tUTmzF6OkZpGWNG+dgd/+bBuraGNSv1LLaNleQLbwRmpEj3XB6MvksP07dSlZLtDDzXsqWByl9BeNeckKHfb6miW2wLLhZB/bIWQvWN4bcxQJLhy8eXFJ2bn8n83/X5L1DY4tvLDf7bvXd28scqqNkP4hKR3pz//74AtSHs6OG/9dozIv8kAd9H6AUYhH2/F/roHXAGM8TjZvpcCyAVFRmPZwhqA+teTRe0ZBxngqFqlVZz5+RIE7RZTJHGUWOCwisbBwRWTxA8X33V69AG9t1a7nMI6fIbyGr7pUC2fxW6ifqxEZP+0fkfNHCEx350ZPQnDUPaPx3H9YD3MXSjKPHDbt8NAuyZ49vLBh90ItfKxo456QmHbuhy7jNwvTDApPcq7Q7RYugjTMc5jWSKnuMMOBX4OrJaajO47dJY9tGsd3FxuZ3U7A71W2rorTO/t978DhHdPmb4t3nSjPHMD4NeEPDA66ELvhd6/eCAbXUX16GKZfrUfL+SHZXtrHvvqflqT90Y1aH6a74Vv9fbq1HUIscjarLRsRscB9616w7s71rD7Rhl2IBeLrnFFy1xNnfxd3SCy8/F0WJ4/q6V+gykF4t0Cd3eXbAAW0g20FbWuiqB4RUUuAF9Qh0KbupjawbM/9ccewcVjGi/c3bQb537B7kHOugaFAAA&quot;"/>
-    <we:property name="bookmark" value="&quot;H4sIAAAAAAAAA+VYbW/jNgz+K4O/9Es6yK95+XbNtcCA4dYtRYdhCAxZolNdbcuT5F6zIv99lOykrS9Nc90ld9iCIpAoiiYfPqSZPnhc6Lqgyw+0BG/inUl5W1J1+4PvDbyqlREgMMqSeMhjfxTBKAlZgqeyNkJW2ps8eIaqBZhroRtaWEMo/HM+8GhRXNKF3eW00DDwalBaVrQQf0OrjEdGNbAaeHBfF1JRa3JmqAFr9g7VcY8u+D+G+ETKjLiDGTDTSuM8HrKI+jRhUUz8URhHDNV0q+A826piTbvHT2VlqKjwMVY2TqIooDHJRkmchIQkPMusPBeF6VSy5fl9rTA6jHlZW3Cm6OtCKsFo4bkoFOjW6QdvKoumdKvzZ/KZbBSD3yB3R5URZomWcmZS1igFFVumHGqphdHeCrG5VBKRc0ocaJFqBKhpj27kp6kC9IF7E7IabNx6x+9oxVDa9+ndYqFgQU23PT+0w5UsBWY8paVsKpNqrpzGRVN1WSSfhzFHiRbVouhY8piwqzY6VjQaUwL8jKrpDVXG0jH7iHm3WcLbUnFQZ0uXqPdCrRkTDHqBfY9orOZrpuPFj0+43FGtjerg3Jqv7HE8YkkUjuM4isKABD5JfPJqTVzJ+gNmpNWxKtfrQsYEXChZOuWu4+gm+6sBjKqfm9n6ANe/rhe7LFmybyLmokyZBRlUTW18A68lj6uS7kb+9MZ2jB6vYVpmUGA+9se/3TjXeliz2ixT119RvvZGQIGK+JxfjkbfjYf5W6mKyfYmPnFsaaEKniC8b07Q0O83WNEdthUX66B+6oWgvzL8LgaaFfDy9Q1FV/YzX/27Pv8ZCjt8e7nBf733zl7+OAW1/E5cQtLb+//fF6CxhD2//2+99qwoGGU0CIAOQwijcTCMAvCPOINZ4nE7ffYCyIVG4+kSqNrCulfTRTsyzgrBQHVKT3PnlYATtF0sAMdRawLDq1sHBOhHCJ6vvuh16AL7Zi33OYT48GtaNO6XAtr+WZg26odWjPonF3/gwBGdBvGJ1Z+3DOm+Bh7xKR9DROI4C6JkTMIQhvb67rKBe5PJXtm4MScfcZpEhPOAUeJHIWTDV2l3jBaDv8VMWuJIpnCfFpRjgfeRNdLYwW2fxnKIZr2Pi5vjrGG3YN5SQ2+d+f1+8ztGdIeY4d/mSTvGsyAKh2HIQ38IhAZ+5I/DI7bVfVynOpX5Y/P9QnZo11kP3lPLpz11a1TH6q/lTvxeb69W0YgSTrDJxqckPA39K0Im7q/XcAdWmW5Br5Tc4QuOONu7+Hu8weWn6mQ9PH/TSn0G0otFuoHu4C44gB0kW2grG6NryuCSVrAFfUSdVtzWx84MuH+9bcBfrf4B5uUFRvITAAA=&quot;"/>
-    <we:property name="datasetId" value="&quot;1bc9f159-2234-42ac-8da2-ce5c6c94d7e2&quot;"/>
-    <we:property name="embedUrl" value="&quot;/reportEmbed?reportId=1d5493b0-0102-488b-a943-c8943ff1f6fd&amp;groupId=af757372-574a-4725-b0ef-991838213ca2&amp;w=2&amp;config=eyJjbHVzdGVyVXJsIjoiaHR0cHM6Ly9XQUJJLUNBTkFEQS1DRU5UUkFMLUItUFJJTUFSWS1yZWRpcmVjdC5hbmFseXNpcy53aW5kb3dzLm5ldCIsImVtYmVkRmVhdHVyZXMiOnsidXNhZ2VNZXRyaWNzVk5leHQiOnRydWV9fQ%3D%3D&amp;disableSensitivityBanner=true&amp;storytellingChangeViewModeShortcutKeys=true&quot;"/>
-    <we:property name="backgroundColor" value="&quot;#E6E6E6&quot;"/>
+    <we:property name="reportState" value="&quot;CONNECTED&quot;"/>
+    <we:property name="reportUrl" value="&quot;/groups/af757372-574a-4725-b0ef-991838213ca2/reports/1d5493b0-0102-488b-a943-c8943ff1f6fd/5f57c4a1a6c45018354c?bookmarkGuid=6d6235c1-fcd7-4199-ad5b-179596412b56&amp;bookmarkUsage=1&amp;ctid=04f991f3-0023-4b95-ab0d-bebbdbc8df14&amp;fromEntryPoint=export&quot;"/>
   </we:properties>
   <we:bindings/>
   <we:snapshot xmlns:r="http://schemas.openxmlformats.org/officeDocument/2006/relationships"/>
